--- a/runs/2026-10-01_onboarding-checklist/deck.pptx
+++ b/runs/2026-10-01_onboarding-checklist/deck.pptx
@@ -11,6 +11,11 @@
     <p:sldId id="259" r:id="rId11"/>
     <p:sldId id="260" r:id="rId12"/>
     <p:sldId id="261" r:id="rId13"/>
+    <p:sldId id="262" r:id="rId14"/>
+    <p:sldId id="263" r:id="rId15"/>
+    <p:sldId id="264" r:id="rId16"/>
+    <p:sldId id="265" r:id="rId17"/>
+    <p:sldId id="266" r:id="rId18"/>
   </p:sldIdLst>
   <p:sldSz cx="12191695" cy="6858000" type="screen4x3"/>
   <p:notesSz cx="6858000" cy="9144000"/>
@@ -507,7 +512,77 @@
           <a:lstStyle/>
           <a:p>
             <a:r>
-              <a:t>Verdict: Blocked: data issue. The data failed a blocking validation check, so treatment effects cannot be trusted. The groups being compared are not the ones the experiment created, so any difference between them could come from the data problem rather than the change. iOS + Web alone show no mismatch (p = 0.323), but an iOS + Web-only readout would answer a different question (it excludes a whole platform); treat it as a sensitivity check only. Activation results were not computed: with units missing non-randomly, any difference could be caused by the loss.</a:t>
+              <a:t>The answer first. Verdict: Blocked: data issue. The data failed a blocking validation check, so treatment effects cannot be trusted. The groups being compared are not the ones the experiment created, so any difference between them could come from the data problem rather than the change. Caveats: iOS + Web alone show no mismatch (p = 0.323), but an iOS + Web-only readout would answer a different question (it excludes a whole platform); treat it as a sensitivity check only. Activation results were not computed: with units missing non-randomly, any difference could be caused by the loss.</a:t>
+            </a:r>
+          </a:p>
+        </p:txBody>
+      </p:sp>
+      <p:sp>
+        <p:nvSpPr>
+          <p:cNvPr id="4" name="Slide Number Placeholder 3"/>
+          <p:cNvSpPr>
+            <a:spLocks noGrp="1"/>
+          </p:cNvSpPr>
+          <p:nvPr>
+            <p:ph type="sldNum" idx="5" sz="quarter"/>
+          </p:nvPr>
+        </p:nvSpPr>
+        <p:spPr/>
+      </p:sp>
+    </p:spTree>
+  </p:cSld>
+  <p:clrMapOvr>
+    <a:masterClrMapping/>
+  </p:clrMapOvr>
+</p:notes>
+</file>
+
+<file path=ppt/notesSlides/notesSlide10.xml><?xml version="1.0" encoding="utf-8"?>
+<p:notes xmlns:a="http://schemas.openxmlformats.org/drawingml/2006/main" xmlns:p="http://schemas.openxmlformats.org/presentationml/2006/main" xmlns:r="http://schemas.openxmlformats.org/officeDocument/2006/relationships">
+  <p:cSld>
+    <p:spTree>
+      <p:nvGrpSpPr>
+        <p:cNvPr id="1" name=""/>
+        <p:cNvGrpSpPr/>
+        <p:nvPr/>
+      </p:nvGrpSpPr>
+      <p:grpSpPr>
+        <a:xfrm>
+          <a:off x="0" y="0"/>
+          <a:ext cx="0" cy="0"/>
+          <a:chOff x="0" y="0"/>
+          <a:chExt cx="0" cy="0"/>
+        </a:xfrm>
+      </p:grpSpPr>
+      <p:sp>
+        <p:nvSpPr>
+          <p:cNvPr id="2" name="Slide Image Placeholder 1"/>
+          <p:cNvSpPr>
+            <a:spLocks noGrp="1"/>
+          </p:cNvSpPr>
+          <p:nvPr>
+            <p:ph type="sldImg" idx="2"/>
+          </p:nvPr>
+        </p:nvSpPr>
+        <p:spPr/>
+      </p:sp>
+      <p:sp>
+        <p:nvSpPr>
+          <p:cNvPr id="3" name="Notes Placeholder 2"/>
+          <p:cNvSpPr>
+            <a:spLocks noGrp="1"/>
+          </p:cNvSpPr>
+          <p:nvPr>
+            <p:ph type="body" idx="3" sz="quarter"/>
+          </p:nvPr>
+        </p:nvSpPr>
+        <p:spPr/>
+        <p:txBody>
+          <a:bodyPr/>
+          <a:lstStyle/>
+          <a:p>
+            <a:r>
+              <a:t>Close with the decision, then who does what by when.</a:t>
             </a:r>
           </a:p>
         </p:txBody>
@@ -577,7 +652,7 @@
           <a:lstStyle/>
           <a:p>
             <a:r>
-              <a:t>This is the whole story: units went missing unevenly, so the comparison is broken.</a:t>
+              <a:t>The storyline: what we were asked, how we answered it, what we found, what it is worth, and what we recommend.</a:t>
             </a:r>
           </a:p>
         </p:txBody>
@@ -647,7 +722,7 @@
           <a:lstStyle/>
           <a:p>
             <a:r>
-              <a:t>Points engineering at the Android exposure event after the 5 September release.</a:t>
+              <a:t>Restate the question and the decision before any result, so the audience judges the answer against the ask.</a:t>
             </a:r>
           </a:p>
         </p:txBody>
@@ -717,7 +792,7 @@
           <a:lstStyle/>
           <a:p>
             <a:r>
-              <a:t>Summarise data quality: anything flagged here limits how far the results can be trusted.</a:t>
+              <a:t>How the answer was produced and why it can be trusted: data, checks, method, independent review.</a:t>
             </a:r>
           </a:p>
         </p:txBody>
@@ -787,7 +862,287 @@
           <a:lstStyle/>
           <a:p>
             <a:r>
-              <a:t>Close with the decision and owners. The data failed a blocking validation check, so treatment effects cannot be trusted.</a:t>
+              <a:t>This is the whole story: units went missing unevenly, so the comparison is broken.</a:t>
+            </a:r>
+          </a:p>
+        </p:txBody>
+      </p:sp>
+      <p:sp>
+        <p:nvSpPr>
+          <p:cNvPr id="4" name="Slide Number Placeholder 3"/>
+          <p:cNvSpPr>
+            <a:spLocks noGrp="1"/>
+          </p:cNvSpPr>
+          <p:nvPr>
+            <p:ph type="sldNum" idx="5" sz="quarter"/>
+          </p:nvPr>
+        </p:nvSpPr>
+        <p:spPr/>
+      </p:sp>
+    </p:spTree>
+  </p:cSld>
+  <p:clrMapOvr>
+    <a:masterClrMapping/>
+  </p:clrMapOvr>
+</p:notes>
+</file>
+
+<file path=ppt/notesSlides/notesSlide6.xml><?xml version="1.0" encoding="utf-8"?>
+<p:notes xmlns:a="http://schemas.openxmlformats.org/drawingml/2006/main" xmlns:p="http://schemas.openxmlformats.org/presentationml/2006/main" xmlns:r="http://schemas.openxmlformats.org/officeDocument/2006/relationships">
+  <p:cSld>
+    <p:spTree>
+      <p:nvGrpSpPr>
+        <p:cNvPr id="1" name=""/>
+        <p:cNvGrpSpPr/>
+        <p:nvPr/>
+      </p:nvGrpSpPr>
+      <p:grpSpPr>
+        <a:xfrm>
+          <a:off x="0" y="0"/>
+          <a:ext cx="0" cy="0"/>
+          <a:chOff x="0" y="0"/>
+          <a:chExt cx="0" cy="0"/>
+        </a:xfrm>
+      </p:grpSpPr>
+      <p:sp>
+        <p:nvSpPr>
+          <p:cNvPr id="2" name="Slide Image Placeholder 1"/>
+          <p:cNvSpPr>
+            <a:spLocks noGrp="1"/>
+          </p:cNvSpPr>
+          <p:nvPr>
+            <p:ph type="sldImg" idx="2"/>
+          </p:nvPr>
+        </p:nvSpPr>
+        <p:spPr/>
+      </p:sp>
+      <p:sp>
+        <p:nvSpPr>
+          <p:cNvPr id="3" name="Notes Placeholder 2"/>
+          <p:cNvSpPr>
+            <a:spLocks noGrp="1"/>
+          </p:cNvSpPr>
+          <p:nvPr>
+            <p:ph type="body" idx="3" sz="quarter"/>
+          </p:nvPr>
+        </p:nvSpPr>
+        <p:spPr/>
+        <p:txBody>
+          <a:bodyPr/>
+          <a:lstStyle/>
+          <a:p>
+            <a:r>
+              <a:t>Points engineering at the Android exposure event after the 5 September release.</a:t>
+            </a:r>
+          </a:p>
+        </p:txBody>
+      </p:sp>
+      <p:sp>
+        <p:nvSpPr>
+          <p:cNvPr id="4" name="Slide Number Placeholder 3"/>
+          <p:cNvSpPr>
+            <a:spLocks noGrp="1"/>
+          </p:cNvSpPr>
+          <p:nvPr>
+            <p:ph type="sldNum" idx="5" sz="quarter"/>
+          </p:nvPr>
+        </p:nvSpPr>
+        <p:spPr/>
+      </p:sp>
+    </p:spTree>
+  </p:cSld>
+  <p:clrMapOvr>
+    <a:masterClrMapping/>
+  </p:clrMapOvr>
+</p:notes>
+</file>
+
+<file path=ppt/notesSlides/notesSlide7.xml><?xml version="1.0" encoding="utf-8"?>
+<p:notes xmlns:a="http://schemas.openxmlformats.org/drawingml/2006/main" xmlns:p="http://schemas.openxmlformats.org/presentationml/2006/main" xmlns:r="http://schemas.openxmlformats.org/officeDocument/2006/relationships">
+  <p:cSld>
+    <p:spTree>
+      <p:nvGrpSpPr>
+        <p:cNvPr id="1" name=""/>
+        <p:cNvGrpSpPr/>
+        <p:nvPr/>
+      </p:nvGrpSpPr>
+      <p:grpSpPr>
+        <a:xfrm>
+          <a:off x="0" y="0"/>
+          <a:ext cx="0" cy="0"/>
+          <a:chOff x="0" y="0"/>
+          <a:chExt cx="0" cy="0"/>
+        </a:xfrm>
+      </p:grpSpPr>
+      <p:sp>
+        <p:nvSpPr>
+          <p:cNvPr id="2" name="Slide Image Placeholder 1"/>
+          <p:cNvSpPr>
+            <a:spLocks noGrp="1"/>
+          </p:cNvSpPr>
+          <p:nvPr>
+            <p:ph type="sldImg" idx="2"/>
+          </p:nvPr>
+        </p:nvSpPr>
+        <p:spPr/>
+      </p:sp>
+      <p:sp>
+        <p:nvSpPr>
+          <p:cNvPr id="3" name="Notes Placeholder 2"/>
+          <p:cNvSpPr>
+            <a:spLocks noGrp="1"/>
+          </p:cNvSpPr>
+          <p:nvPr>
+            <p:ph type="body" idx="3" sz="quarter"/>
+          </p:nvPr>
+        </p:nvSpPr>
+        <p:spPr/>
+        <p:txBody>
+          <a:bodyPr/>
+          <a:lstStyle/>
+          <a:p>
+            <a:r>
+              <a:t>Anything flagged here limits how far the data can be trusted.</a:t>
+            </a:r>
+          </a:p>
+        </p:txBody>
+      </p:sp>
+      <p:sp>
+        <p:nvSpPr>
+          <p:cNvPr id="4" name="Slide Number Placeholder 3"/>
+          <p:cNvSpPr>
+            <a:spLocks noGrp="1"/>
+          </p:cNvSpPr>
+          <p:nvPr>
+            <p:ph type="sldNum" idx="5" sz="quarter"/>
+          </p:nvPr>
+        </p:nvSpPr>
+        <p:spPr/>
+      </p:sp>
+    </p:spTree>
+  </p:cSld>
+  <p:clrMapOvr>
+    <a:masterClrMapping/>
+  </p:clrMapOvr>
+</p:notes>
+</file>
+
+<file path=ppt/notesSlides/notesSlide8.xml><?xml version="1.0" encoding="utf-8"?>
+<p:notes xmlns:a="http://schemas.openxmlformats.org/drawingml/2006/main" xmlns:p="http://schemas.openxmlformats.org/presentationml/2006/main" xmlns:r="http://schemas.openxmlformats.org/officeDocument/2006/relationships">
+  <p:cSld>
+    <p:spTree>
+      <p:nvGrpSpPr>
+        <p:cNvPr id="1" name=""/>
+        <p:cNvGrpSpPr/>
+        <p:nvPr/>
+      </p:nvGrpSpPr>
+      <p:grpSpPr>
+        <a:xfrm>
+          <a:off x="0" y="0"/>
+          <a:ext cx="0" cy="0"/>
+          <a:chOff x="0" y="0"/>
+          <a:chExt cx="0" cy="0"/>
+        </a:xfrm>
+      </p:grpSpPr>
+      <p:sp>
+        <p:nvSpPr>
+          <p:cNvPr id="2" name="Slide Image Placeholder 1"/>
+          <p:cNvSpPr>
+            <a:spLocks noGrp="1"/>
+          </p:cNvSpPr>
+          <p:nvPr>
+            <p:ph type="sldImg" idx="2"/>
+          </p:nvPr>
+        </p:nvSpPr>
+        <p:spPr/>
+      </p:sp>
+      <p:sp>
+        <p:nvSpPr>
+          <p:cNvPr id="3" name="Notes Placeholder 2"/>
+          <p:cNvSpPr>
+            <a:spLocks noGrp="1"/>
+          </p:cNvSpPr>
+          <p:nvPr>
+            <p:ph type="body" idx="3" sz="quarter"/>
+          </p:nvPr>
+        </p:nvSpPr>
+        <p:spPr/>
+        <p:txBody>
+          <a:bodyPr/>
+          <a:lstStyle/>
+          <a:p>
+            <a:r>
+              <a:t>Translate the statistics into business terms: what the change is worth.</a:t>
+            </a:r>
+          </a:p>
+        </p:txBody>
+      </p:sp>
+      <p:sp>
+        <p:nvSpPr>
+          <p:cNvPr id="4" name="Slide Number Placeholder 3"/>
+          <p:cNvSpPr>
+            <a:spLocks noGrp="1"/>
+          </p:cNvSpPr>
+          <p:nvPr>
+            <p:ph type="sldNum" idx="5" sz="quarter"/>
+          </p:nvPr>
+        </p:nvSpPr>
+        <p:spPr/>
+      </p:sp>
+    </p:spTree>
+  </p:cSld>
+  <p:clrMapOvr>
+    <a:masterClrMapping/>
+  </p:clrMapOvr>
+</p:notes>
+</file>
+
+<file path=ppt/notesSlides/notesSlide9.xml><?xml version="1.0" encoding="utf-8"?>
+<p:notes xmlns:a="http://schemas.openxmlformats.org/drawingml/2006/main" xmlns:p="http://schemas.openxmlformats.org/presentationml/2006/main" xmlns:r="http://schemas.openxmlformats.org/officeDocument/2006/relationships">
+  <p:cSld>
+    <p:spTree>
+      <p:nvGrpSpPr>
+        <p:cNvPr id="1" name=""/>
+        <p:cNvGrpSpPr/>
+        <p:nvPr/>
+      </p:nvGrpSpPr>
+      <p:grpSpPr>
+        <a:xfrm>
+          <a:off x="0" y="0"/>
+          <a:ext cx="0" cy="0"/>
+          <a:chOff x="0" y="0"/>
+          <a:chExt cx="0" cy="0"/>
+        </a:xfrm>
+      </p:grpSpPr>
+      <p:sp>
+        <p:nvSpPr>
+          <p:cNvPr id="2" name="Slide Image Placeholder 1"/>
+          <p:cNvSpPr>
+            <a:spLocks noGrp="1"/>
+          </p:cNvSpPr>
+          <p:nvPr>
+            <p:ph type="sldImg" idx="2"/>
+          </p:nvPr>
+        </p:nvSpPr>
+        <p:spPr/>
+      </p:sp>
+      <p:sp>
+        <p:nvSpPr>
+          <p:cNvPr id="3" name="Notes Placeholder 2"/>
+          <p:cNvSpPr>
+            <a:spLocks noGrp="1"/>
+          </p:cNvSpPr>
+          <p:nvPr>
+            <p:ph type="body" idx="3" sz="quarter"/>
+          </p:nvPr>
+        </p:nvSpPr>
+        <p:spPr/>
+        <p:txBody>
+          <a:bodyPr/>
+          <a:lstStyle/>
+          <a:p>
+            <a:r>
+              <a:t>Be explicit about what could make the conclusion wrong.</a:t>
             </a:r>
           </a:p>
         </p:txBody>
@@ -3994,7 +4349,7 @@
 </p:sld>
 </file>
 
-<file path=ppt/slides/slide2.xml><?xml version="1.0" encoding="utf-8"?>
+<file path=ppt/slides/slide10.xml><?xml version="1.0" encoding="utf-8"?>
 <p:sld xmlns:a="http://schemas.openxmlformats.org/drawingml/2006/main" xmlns:p="http://schemas.openxmlformats.org/presentationml/2006/main" xmlns:r="http://schemas.openxmlformats.org/officeDocument/2006/relationships">
   <p:cSld>
     <p:spTree>
@@ -4012,7 +4367,77 @@
         </p:nvSpPr>
         <p:spPr>
           <a:xfrm>
-            <a:off x="502920" y="320040"/>
+            <a:off x="502920" y="109728"/>
+            <a:ext cx="11185855" cy="256032"/>
+          </a:xfrm>
+          <a:prstGeom prst="rect">
+            <a:avLst/>
+          </a:prstGeom>
+          <a:noFill/>
+        </p:spPr>
+        <p:txBody>
+          <a:bodyPr wrap="none" lIns="0" rIns="0" tIns="0" bIns="0">
+            <a:spAutoFit/>
+          </a:bodyPr>
+          <a:lstStyle/>
+          <a:p>
+            <a:r>
+              <a:rPr sz="900" b="0">
+                <a:solidFill>
+                  <a:srgbClr val="8C8C8C"/>
+                </a:solidFill>
+                <a:latin typeface="Arial"/>
+              </a:rPr>
+              <a:t>1  THE ASK      </a:t>
+            </a:r>
+            <a:r>
+              <a:rPr sz="900" b="0">
+                <a:solidFill>
+                  <a:srgbClr val="8C8C8C"/>
+                </a:solidFill>
+                <a:latin typeface="Arial"/>
+              </a:rPr>
+              <a:t>2  APPROACH      </a:t>
+            </a:r>
+            <a:r>
+              <a:rPr sz="900" b="0">
+                <a:solidFill>
+                  <a:srgbClr val="8C8C8C"/>
+                </a:solidFill>
+                <a:latin typeface="Arial"/>
+              </a:rPr>
+              <a:t>3  FINDINGS      </a:t>
+            </a:r>
+            <a:r>
+              <a:rPr sz="900" b="0">
+                <a:solidFill>
+                  <a:srgbClr val="8C8C8C"/>
+                </a:solidFill>
+                <a:latin typeface="Arial"/>
+              </a:rPr>
+              <a:t>4  IMPACT      </a:t>
+            </a:r>
+            <a:r>
+              <a:rPr sz="900" b="1">
+                <a:solidFill>
+                  <a:srgbClr val="2251FF"/>
+                </a:solidFill>
+                <a:latin typeface="Arial"/>
+              </a:rPr>
+              <a:t>5  RECOMMENDATION</a:t>
+            </a:r>
+          </a:p>
+        </p:txBody>
+      </p:sp>
+      <p:sp>
+        <p:nvSpPr>
+          <p:cNvPr id="3" name="TextBox 2"/>
+          <p:cNvSpPr txBox="1"/>
+          <p:nvPr/>
+        </p:nvSpPr>
+        <p:spPr>
+          <a:xfrm>
+            <a:off x="502920" y="384048"/>
             <a:ext cx="11185855" cy="868680"/>
           </a:xfrm>
           <a:prstGeom prst="rect">
@@ -4034,20 +4459,20 @@
                 </a:solidFill>
                 <a:latin typeface="Arial"/>
               </a:rPr>
-              <a:t>Results withheld: treatment has 7.1% fewer units than the intended split (p &lt; 0.001, sample ratio mismatch)</a:t>
-            </a:r>
-          </a:p>
-        </p:txBody>
-      </p:sp>
-      <p:sp>
-        <p:nvSpPr>
-          <p:cNvPr id="3" name="Rectangle 2"/>
+              <a:t>2 caveats could change or qualify this conclusion</a:t>
+            </a:r>
+          </a:p>
+        </p:txBody>
+      </p:sp>
+      <p:sp>
+        <p:nvSpPr>
+          <p:cNvPr id="4" name="Rectangle 3"/>
           <p:cNvSpPr/>
           <p:nvPr/>
         </p:nvSpPr>
         <p:spPr>
           <a:xfrm>
-            <a:off x="502920" y="1170432"/>
+            <a:off x="502920" y="1216152"/>
             <a:ext cx="822960" cy="38100"/>
           </a:xfrm>
           <a:prstGeom prst="rect">
@@ -4085,20 +4510,20 @@
       </p:sp>
       <p:sp>
         <p:nvSpPr>
-          <p:cNvPr id="4" name="Rectangle 3"/>
+          <p:cNvPr id="5" name="Rectangle 4"/>
           <p:cNvSpPr/>
           <p:nvPr/>
         </p:nvSpPr>
         <p:spPr>
           <a:xfrm>
-            <a:off x="502920" y="1417320"/>
-            <a:ext cx="11185855" cy="914400"/>
+            <a:off x="502920" y="6327648"/>
+            <a:ext cx="11185855" cy="6350"/>
           </a:xfrm>
           <a:prstGeom prst="rect">
             <a:avLst/>
           </a:prstGeom>
           <a:solidFill>
-            <a:srgbClr val="C0392B"/>
+            <a:srgbClr val="E3E3E3"/>
           </a:solidFill>
           <a:ln>
             <a:noFill/>
@@ -4120,41 +4545,58 @@
           </a:fontRef>
         </p:style>
         <p:txBody>
-          <a:bodyPr rtlCol="0" anchor="ctr" lIns="274320"/>
+          <a:bodyPr rtlCol="0" anchor="ctr"/>
+          <a:lstStyle/>
+          <a:p>
+            <a:pPr algn="ctr"/>
+          </a:p>
+        </p:txBody>
+      </p:sp>
+      <p:sp>
+        <p:nvSpPr>
+          <p:cNvPr id="6" name="TextBox 5"/>
+          <p:cNvSpPr txBox="1"/>
+          <p:nvPr/>
+        </p:nvSpPr>
+        <p:spPr>
+          <a:xfrm>
+            <a:off x="502920" y="6400800"/>
+            <a:ext cx="9875520" cy="320040"/>
+          </a:xfrm>
+          <a:prstGeom prst="rect">
+            <a:avLst/>
+          </a:prstGeom>
+          <a:noFill/>
+        </p:spPr>
+        <p:txBody>
+          <a:bodyPr wrap="square" anchor="t" lIns="18288" rIns="18288" tIns="18288" bIns="18288">
+            <a:spAutoFit/>
+          </a:bodyPr>
           <a:lstStyle/>
           <a:p>
             <a:pPr algn="l"/>
             <a:r>
-              <a:rPr sz="2200" b="1">
-                <a:solidFill>
-                  <a:srgbClr val="FFFFFF"/>
-                </a:solidFill>
-                <a:latin typeface="Arial"/>
-              </a:rPr>
-              <a:t>Recommendation: BLOCKED: DATA ISSUE</a:t>
-            </a:r>
-            <a:r>
-              <a:rPr sz="1300">
-                <a:solidFill>
-                  <a:srgbClr val="FFFFFF"/>
-                </a:solidFill>
-                <a:latin typeface="Arial"/>
-              </a:rPr>
-              <a:t>   The data failed a blocking validation check, so treatment effects cannot be trusted.</a:t>
-            </a:r>
-          </a:p>
-        </p:txBody>
-      </p:sp>
-      <p:sp>
-        <p:nvSpPr>
-          <p:cNvPr id="5" name="TextBox 4"/>
+              <a:rPr sz="900" b="0">
+                <a:solidFill>
+                  <a:srgbClr val="8C8C8C"/>
+                </a:solidFill>
+                <a:latin typeface="Arial"/>
+              </a:rPr>
+              <a:t>Source: srm_broken.csv, 2026-09-01 to 2026-09-14; run 2026-10-01_onboarding-checklist</a:t>
+            </a:r>
+          </a:p>
+        </p:txBody>
+      </p:sp>
+      <p:sp>
+        <p:nvSpPr>
+          <p:cNvPr id="7" name="TextBox 6"/>
           <p:cNvSpPr txBox="1"/>
           <p:nvPr/>
         </p:nvSpPr>
         <p:spPr>
           <a:xfrm>
-            <a:off x="502920" y="2651760"/>
-            <a:ext cx="11185855" cy="3657600"/>
+            <a:off x="10957255" y="6400800"/>
+            <a:ext cx="731520" cy="320040"/>
           </a:xfrm>
           <a:prstGeom prst="rect">
             <a:avLst/>
@@ -4162,7 +4604,42 @@
           <a:noFill/>
         </p:spPr>
         <p:txBody>
-          <a:bodyPr wrap="square">
+          <a:bodyPr wrap="square" anchor="t" lIns="18288" rIns="18288" tIns="18288" bIns="18288">
+            <a:spAutoFit/>
+          </a:bodyPr>
+          <a:lstStyle/>
+          <a:p>
+            <a:pPr algn="r"/>
+            <a:r>
+              <a:rPr sz="900" b="0">
+                <a:solidFill>
+                  <a:srgbClr val="8C8C8C"/>
+                </a:solidFill>
+                <a:latin typeface="Arial"/>
+              </a:rPr>
+              <a:t>10</a:t>
+            </a:r>
+          </a:p>
+        </p:txBody>
+      </p:sp>
+      <p:sp>
+        <p:nvSpPr>
+          <p:cNvPr id="8" name="TextBox 7"/>
+          <p:cNvSpPr txBox="1"/>
+          <p:nvPr/>
+        </p:nvSpPr>
+        <p:spPr>
+          <a:xfrm>
+            <a:off x="502920" y="1554480"/>
+            <a:ext cx="11185855" cy="4572000"/>
+          </a:xfrm>
+          <a:prstGeom prst="rect">
+            <a:avLst/>
+          </a:prstGeom>
+          <a:noFill/>
+        </p:spPr>
+        <p:txBody>
+          <a:bodyPr wrap="square" lIns="18288" rIns="18288">
             <a:spAutoFit/>
           </a:bodyPr>
           <a:lstStyle/>
@@ -4173,7 +4650,7 @@
               </a:spcAft>
             </a:pPr>
             <a:r>
-              <a:rPr sz="1700" b="1">
+              <a:rPr sz="1600" b="1">
                 <a:solidFill>
                   <a:srgbClr val="2251FF"/>
                 </a:solidFill>
@@ -4182,22 +4659,13 @@
               <a:t>•  </a:t>
             </a:r>
             <a:r>
-              <a:rPr sz="1700" b="1">
+              <a:rPr sz="1600">
                 <a:solidFill>
                   <a:srgbClr val="1A1A1A"/>
                 </a:solidFill>
                 <a:latin typeface="Arial"/>
               </a:rPr>
-              <a:t>Observed share control: </a:t>
-            </a:r>
-            <a:r>
-              <a:rPr sz="1700">
-                <a:solidFill>
-                  <a:srgbClr val="1A1A1A"/>
-                </a:solidFill>
-                <a:latin typeface="Arial"/>
-              </a:rPr>
-              <a:t>53.6% (expected 50.0%)</a:t>
+              <a:t>iOS + Web alone show no mismatch (p = 0.323), but an iOS + Web-only readout would answer a different question (it excludes a whole platform); treat it as a sensitivity check only.</a:t>
             </a:r>
           </a:p>
           <a:p>
@@ -4207,7 +4675,7 @@
               </a:spcAft>
             </a:pPr>
             <a:r>
-              <a:rPr sz="1700" b="1">
+              <a:rPr sz="1600" b="1">
                 <a:solidFill>
                   <a:srgbClr val="2251FF"/>
                 </a:solidFill>
@@ -4216,110 +4684,165 @@
               <a:t>•  </a:t>
             </a:r>
             <a:r>
-              <a:rPr sz="1700" b="1">
+              <a:rPr sz="1600" b="1">
                 <a:solidFill>
                   <a:srgbClr val="1A1A1A"/>
                 </a:solidFill>
                 <a:latin typeface="Arial"/>
               </a:rPr>
-              <a:t>Observed share treatment: </a:t>
-            </a:r>
-            <a:r>
-              <a:rPr sz="1700">
+              <a:t>Activation results were not computed: </a:t>
+            </a:r>
+            <a:r>
+              <a:rPr sz="1600">
                 <a:solidFill>
                   <a:srgbClr val="1A1A1A"/>
                 </a:solidFill>
                 <a:latin typeface="Arial"/>
               </a:rPr>
-              <a:t>46.4% (expected 50.0%)</a:t>
-            </a:r>
-          </a:p>
-          <a:p>
-            <a:pPr>
-              <a:spcAft>
-                <a:spcPts val="1000"/>
-              </a:spcAft>
-            </a:pPr>
-            <a:r>
-              <a:rPr sz="1700" b="1">
+              <a:t>with units missing non-randomly, any difference could be caused by the loss.</a:t>
+            </a:r>
+          </a:p>
+        </p:txBody>
+      </p:sp>
+    </p:spTree>
+  </p:cSld>
+  <p:clrMapOvr>
+    <a:masterClrMapping/>
+  </p:clrMapOvr>
+</p:sld>
+</file>
+
+<file path=ppt/slides/slide11.xml><?xml version="1.0" encoding="utf-8"?>
+<p:sld xmlns:a="http://schemas.openxmlformats.org/drawingml/2006/main" xmlns:p="http://schemas.openxmlformats.org/presentationml/2006/main" xmlns:r="http://schemas.openxmlformats.org/officeDocument/2006/relationships">
+  <p:cSld>
+    <p:spTree>
+      <p:nvGrpSpPr>
+        <p:cNvPr id="1" name=""/>
+        <p:cNvGrpSpPr/>
+        <p:nvPr/>
+      </p:nvGrpSpPr>
+      <p:grpSpPr/>
+      <p:sp>
+        <p:nvSpPr>
+          <p:cNvPr id="2" name="TextBox 1"/>
+          <p:cNvSpPr txBox="1"/>
+          <p:nvPr/>
+        </p:nvSpPr>
+        <p:spPr>
+          <a:xfrm>
+            <a:off x="502920" y="109728"/>
+            <a:ext cx="11185855" cy="256032"/>
+          </a:xfrm>
+          <a:prstGeom prst="rect">
+            <a:avLst/>
+          </a:prstGeom>
+          <a:noFill/>
+        </p:spPr>
+        <p:txBody>
+          <a:bodyPr wrap="none" lIns="0" rIns="0" tIns="0" bIns="0">
+            <a:spAutoFit/>
+          </a:bodyPr>
+          <a:lstStyle/>
+          <a:p>
+            <a:r>
+              <a:rPr sz="900" b="0">
+                <a:solidFill>
+                  <a:srgbClr val="8C8C8C"/>
+                </a:solidFill>
+                <a:latin typeface="Arial"/>
+              </a:rPr>
+              <a:t>1  THE ASK      </a:t>
+            </a:r>
+            <a:r>
+              <a:rPr sz="900" b="0">
+                <a:solidFill>
+                  <a:srgbClr val="8C8C8C"/>
+                </a:solidFill>
+                <a:latin typeface="Arial"/>
+              </a:rPr>
+              <a:t>2  APPROACH      </a:t>
+            </a:r>
+            <a:r>
+              <a:rPr sz="900" b="0">
+                <a:solidFill>
+                  <a:srgbClr val="8C8C8C"/>
+                </a:solidFill>
+                <a:latin typeface="Arial"/>
+              </a:rPr>
+              <a:t>3  FINDINGS      </a:t>
+            </a:r>
+            <a:r>
+              <a:rPr sz="900" b="0">
+                <a:solidFill>
+                  <a:srgbClr val="8C8C8C"/>
+                </a:solidFill>
+                <a:latin typeface="Arial"/>
+              </a:rPr>
+              <a:t>4  IMPACT      </a:t>
+            </a:r>
+            <a:r>
+              <a:rPr sz="900" b="1">
                 <a:solidFill>
                   <a:srgbClr val="2251FF"/>
                 </a:solidFill>
                 <a:latin typeface="Arial"/>
               </a:rPr>
-              <a:t>•  </a:t>
-            </a:r>
-            <a:r>
-              <a:rPr sz="1700" b="1">
+              <a:t>5  RECOMMENDATION</a:t>
+            </a:r>
+          </a:p>
+        </p:txBody>
+      </p:sp>
+      <p:sp>
+        <p:nvSpPr>
+          <p:cNvPr id="3" name="TextBox 2"/>
+          <p:cNvSpPr txBox="1"/>
+          <p:nvPr/>
+        </p:nvSpPr>
+        <p:spPr>
+          <a:xfrm>
+            <a:off x="502920" y="384048"/>
+            <a:ext cx="11185855" cy="868680"/>
+          </a:xfrm>
+          <a:prstGeom prst="rect">
+            <a:avLst/>
+          </a:prstGeom>
+          <a:noFill/>
+        </p:spPr>
+        <p:txBody>
+          <a:bodyPr wrap="square" anchor="t" lIns="18288" rIns="18288" tIns="18288" bIns="18288">
+            <a:spAutoFit/>
+          </a:bodyPr>
+          <a:lstStyle/>
+          <a:p>
+            <a:pPr algn="l"/>
+            <a:r>
+              <a:rPr sz="2400" b="1">
                 <a:solidFill>
                   <a:srgbClr val="1A1A1A"/>
                 </a:solidFill>
                 <a:latin typeface="Arial"/>
               </a:rPr>
-              <a:t>SRM test: </a:t>
-            </a:r>
-            <a:r>
-              <a:rPr sz="1700">
-                <a:solidFill>
-                  <a:srgbClr val="1A1A1A"/>
-                </a:solidFill>
-                <a:latin typeface="Arial"/>
-              </a:rPr>
-              <a:t>chi-square p &lt; 0.001 (threshold 0.001)</a:t>
-            </a:r>
-          </a:p>
-          <a:p>
-            <a:pPr>
-              <a:spcAft>
-                <a:spcPts val="1000"/>
-              </a:spcAft>
-            </a:pPr>
-            <a:r>
-              <a:rPr sz="1700" b="1">
-                <a:solidFill>
-                  <a:srgbClr val="2251FF"/>
-                </a:solidFill>
-                <a:latin typeface="Arial"/>
-              </a:rPr>
-              <a:t>•  </a:t>
-            </a:r>
-            <a:r>
-              <a:rPr sz="1700" b="1">
-                <a:solidFill>
-                  <a:srgbClr val="1A1A1A"/>
-                </a:solidFill>
-                <a:latin typeface="Arial"/>
-              </a:rPr>
-              <a:t>Concentrated in: </a:t>
-            </a:r>
-            <a:r>
-              <a:rPr sz="1700">
-                <a:solidFill>
-                  <a:srgbClr val="1A1A1A"/>
-                </a:solidFill>
-                <a:latin typeface="Arial"/>
-              </a:rPr>
-              <a:t>exposure_date 2026-09-05 to 2026-09-14 (10 of 14 levels); platform=Android</a:t>
-            </a:r>
-          </a:p>
-        </p:txBody>
-      </p:sp>
-      <p:sp>
-        <p:nvSpPr>
-          <p:cNvPr id="6" name="Rectangle 5"/>
+              <a:t>Recommendation: fix the data before any decision, with 4 next steps</a:t>
+            </a:r>
+          </a:p>
+        </p:txBody>
+      </p:sp>
+      <p:sp>
+        <p:nvSpPr>
+          <p:cNvPr id="4" name="Rectangle 3"/>
           <p:cNvSpPr/>
           <p:nvPr/>
         </p:nvSpPr>
         <p:spPr>
           <a:xfrm>
-            <a:off x="502920" y="6327648"/>
-            <a:ext cx="11185855" cy="6350"/>
+            <a:off x="502920" y="1216152"/>
+            <a:ext cx="822960" cy="38100"/>
           </a:xfrm>
           <a:prstGeom prst="rect">
             <a:avLst/>
           </a:prstGeom>
           <a:solidFill>
-            <a:srgbClr val="E3E3E3"/>
+            <a:srgbClr val="2251FF"/>
           </a:solidFill>
           <a:ln>
             <a:noFill/>
@@ -4350,7 +4873,51 @@
       </p:sp>
       <p:sp>
         <p:nvSpPr>
-          <p:cNvPr id="7" name="TextBox 6"/>
+          <p:cNvPr id="5" name="Rectangle 4"/>
+          <p:cNvSpPr/>
+          <p:nvPr/>
+        </p:nvSpPr>
+        <p:spPr>
+          <a:xfrm>
+            <a:off x="502920" y="6327648"/>
+            <a:ext cx="11185855" cy="6350"/>
+          </a:xfrm>
+          <a:prstGeom prst="rect">
+            <a:avLst/>
+          </a:prstGeom>
+          <a:solidFill>
+            <a:srgbClr val="E3E3E3"/>
+          </a:solidFill>
+          <a:ln>
+            <a:noFill/>
+          </a:ln>
+          <a:effectLst/>
+        </p:spPr>
+        <p:style>
+          <a:lnRef idx="1">
+            <a:schemeClr val="accent1"/>
+          </a:lnRef>
+          <a:fillRef idx="3">
+            <a:schemeClr val="accent1"/>
+          </a:fillRef>
+          <a:effectRef idx="2">
+            <a:schemeClr val="accent1"/>
+          </a:effectRef>
+          <a:fontRef idx="minor">
+            <a:schemeClr val="lt1"/>
+          </a:fontRef>
+        </p:style>
+        <p:txBody>
+          <a:bodyPr rtlCol="0" anchor="ctr"/>
+          <a:lstStyle/>
+          <a:p>
+            <a:pPr algn="ctr"/>
+          </a:p>
+        </p:txBody>
+      </p:sp>
+      <p:sp>
+        <p:nvSpPr>
+          <p:cNvPr id="6" name="TextBox 5"/>
           <p:cNvSpPr txBox="1"/>
           <p:nvPr/>
         </p:nvSpPr>
@@ -4385,7 +4952,1417 @@
       </p:sp>
       <p:sp>
         <p:nvSpPr>
+          <p:cNvPr id="7" name="TextBox 6"/>
+          <p:cNvSpPr txBox="1"/>
+          <p:nvPr/>
+        </p:nvSpPr>
+        <p:spPr>
+          <a:xfrm>
+            <a:off x="10957255" y="6400800"/>
+            <a:ext cx="731520" cy="320040"/>
+          </a:xfrm>
+          <a:prstGeom prst="rect">
+            <a:avLst/>
+          </a:prstGeom>
+          <a:noFill/>
+        </p:spPr>
+        <p:txBody>
+          <a:bodyPr wrap="square" anchor="t" lIns="18288" rIns="18288" tIns="18288" bIns="18288">
+            <a:spAutoFit/>
+          </a:bodyPr>
+          <a:lstStyle/>
+          <a:p>
+            <a:pPr algn="r"/>
+            <a:r>
+              <a:rPr sz="900" b="0">
+                <a:solidFill>
+                  <a:srgbClr val="8C8C8C"/>
+                </a:solidFill>
+                <a:latin typeface="Arial"/>
+              </a:rPr>
+              <a:t>11</a:t>
+            </a:r>
+          </a:p>
+        </p:txBody>
+      </p:sp>
+      <p:sp>
+        <p:nvSpPr>
+          <p:cNvPr id="8" name="Rectangle 7"/>
+          <p:cNvSpPr/>
+          <p:nvPr/>
+        </p:nvSpPr>
+        <p:spPr>
+          <a:xfrm>
+            <a:off x="502920" y="1463040"/>
+            <a:ext cx="11185855" cy="777240"/>
+          </a:xfrm>
+          <a:prstGeom prst="rect">
+            <a:avLst/>
+          </a:prstGeom>
+          <a:solidFill>
+            <a:srgbClr val="C0392B"/>
+          </a:solidFill>
+          <a:ln>
+            <a:noFill/>
+          </a:ln>
+          <a:effectLst/>
+        </p:spPr>
+        <p:style>
+          <a:lnRef idx="1">
+            <a:schemeClr val="accent1"/>
+          </a:lnRef>
+          <a:fillRef idx="3">
+            <a:schemeClr val="accent1"/>
+          </a:fillRef>
+          <a:effectRef idx="2">
+            <a:schemeClr val="accent1"/>
+          </a:effectRef>
+          <a:fontRef idx="minor">
+            <a:schemeClr val="lt1"/>
+          </a:fontRef>
+        </p:style>
+        <p:txBody>
+          <a:bodyPr rtlCol="0" anchor="ctr" wrap="square" lIns="274320" rIns="274320"/>
+          <a:lstStyle/>
+          <a:p>
+            <a:pPr algn="l"/>
+            <a:r>
+              <a:rPr sz="2000" b="1">
+                <a:solidFill>
+                  <a:srgbClr val="FFFFFF"/>
+                </a:solidFill>
+                <a:latin typeface="Arial"/>
+              </a:rPr>
+              <a:t>DECISION: BLOCKED: DATA ISSUE</a:t>
+            </a:r>
+          </a:p>
+        </p:txBody>
+      </p:sp>
+      <p:sp>
+        <p:nvSpPr>
+          <p:cNvPr id="9" name="TextBox 8"/>
+          <p:cNvSpPr txBox="1"/>
+          <p:nvPr/>
+        </p:nvSpPr>
+        <p:spPr>
+          <a:xfrm>
+            <a:off x="502920" y="2377440"/>
+            <a:ext cx="11185855" cy="457200"/>
+          </a:xfrm>
+          <a:prstGeom prst="rect">
+            <a:avLst/>
+          </a:prstGeom>
+          <a:noFill/>
+        </p:spPr>
+        <p:txBody>
+          <a:bodyPr wrap="square" anchor="t" lIns="18288" rIns="18288" tIns="18288" bIns="18288">
+            <a:spAutoFit/>
+          </a:bodyPr>
+          <a:lstStyle/>
+          <a:p>
+            <a:pPr algn="l"/>
+            <a:r>
+              <a:rPr sz="1400" b="0">
+                <a:solidFill>
+                  <a:srgbClr val="1A1A1A"/>
+                </a:solidFill>
+                <a:latin typeface="Arial"/>
+              </a:rPr>
+              <a:t>The data failed a blocking validation check, so treatment effects cannot be trusted.</a:t>
+            </a:r>
+          </a:p>
+        </p:txBody>
+      </p:sp>
+      <p:sp>
+        <p:nvSpPr>
+          <p:cNvPr id="10" name="TextBox 9"/>
+          <p:cNvSpPr txBox="1"/>
+          <p:nvPr/>
+        </p:nvSpPr>
+        <p:spPr>
+          <a:xfrm>
+            <a:off x="502920" y="2926080"/>
+            <a:ext cx="3657600" cy="274320"/>
+          </a:xfrm>
+          <a:prstGeom prst="rect">
+            <a:avLst/>
+          </a:prstGeom>
+          <a:noFill/>
+        </p:spPr>
+        <p:txBody>
+          <a:bodyPr wrap="square" anchor="t" lIns="18288" rIns="18288" tIns="18288" bIns="18288">
+            <a:spAutoFit/>
+          </a:bodyPr>
+          <a:lstStyle/>
+          <a:p>
+            <a:pPr algn="l"/>
+            <a:r>
+              <a:rPr sz="1100" b="1">
+                <a:solidFill>
+                  <a:srgbClr val="0B2545"/>
+                </a:solidFill>
+                <a:latin typeface="Arial"/>
+              </a:rPr>
+              <a:t>NEXT STEPS</a:t>
+            </a:r>
+          </a:p>
+        </p:txBody>
+      </p:sp>
+      <p:graphicFrame>
+        <p:nvGraphicFramePr>
+          <p:cNvPr id="11" name="Table 10"/>
+          <p:cNvGraphicFramePr>
+            <a:graphicFrameLocks noGrp="1"/>
+          </p:cNvGraphicFramePr>
+          <p:nvPr/>
+        </p:nvGraphicFramePr>
+        <p:xfrm>
+          <a:off x="502920" y="3246119"/>
+          <a:ext cx="11185853" cy="1920240"/>
+        </p:xfrm>
+        <a:graphic>
+          <a:graphicData uri="http://schemas.openxmlformats.org/drawingml/2006/table">
+            <a:tbl>
+              <a:tblPr firstRow="1" bandRow="1">
+                <a:tableStyleId>{5C22544A-7EE6-4342-B048-85BDC9FD1C3A}</a:tableStyleId>
+              </a:tblPr>
+              <a:tblGrid>
+                <a:gridCol w="559292"/>
+                <a:gridCol w="7270805"/>
+                <a:gridCol w="1901595"/>
+                <a:gridCol w="1454161"/>
+              </a:tblGrid>
+              <a:tr h="384048">
+                <a:tc>
+                  <a:txBody>
+                    <a:bodyPr/>
+                    <a:lstStyle/>
+                    <a:p>
+                      <a:r>
+                        <a:rPr sz="1200" b="1">
+                          <a:solidFill>
+                            <a:srgbClr val="FFFFFF"/>
+                          </a:solidFill>
+                          <a:latin typeface="Arial"/>
+                        </a:rPr>
+                        <a:t>#</a:t>
+                      </a:r>
+                    </a:p>
+                  </a:txBody>
+                  <a:tcPr marL="91440" anchor="ctr">
+                    <a:solidFill>
+                      <a:srgbClr val="0B2545"/>
+                    </a:solidFill>
+                  </a:tcPr>
+                </a:tc>
+                <a:tc>
+                  <a:txBody>
+                    <a:bodyPr/>
+                    <a:lstStyle/>
+                    <a:p>
+                      <a:r>
+                        <a:rPr sz="1200" b="1">
+                          <a:solidFill>
+                            <a:srgbClr val="FFFFFF"/>
+                          </a:solidFill>
+                          <a:latin typeface="Arial"/>
+                        </a:rPr>
+                        <a:t>Action</a:t>
+                      </a:r>
+                    </a:p>
+                  </a:txBody>
+                  <a:tcPr marL="91440" anchor="ctr">
+                    <a:solidFill>
+                      <a:srgbClr val="0B2545"/>
+                    </a:solidFill>
+                  </a:tcPr>
+                </a:tc>
+                <a:tc>
+                  <a:txBody>
+                    <a:bodyPr/>
+                    <a:lstStyle/>
+                    <a:p>
+                      <a:r>
+                        <a:rPr sz="1200" b="1">
+                          <a:solidFill>
+                            <a:srgbClr val="FFFFFF"/>
+                          </a:solidFill>
+                          <a:latin typeface="Arial"/>
+                        </a:rPr>
+                        <a:t>Owner</a:t>
+                      </a:r>
+                    </a:p>
+                  </a:txBody>
+                  <a:tcPr marL="91440" anchor="ctr">
+                    <a:solidFill>
+                      <a:srgbClr val="0B2545"/>
+                    </a:solidFill>
+                  </a:tcPr>
+                </a:tc>
+                <a:tc>
+                  <a:txBody>
+                    <a:bodyPr/>
+                    <a:lstStyle/>
+                    <a:p>
+                      <a:r>
+                        <a:rPr sz="1200" b="1">
+                          <a:solidFill>
+                            <a:srgbClr val="FFFFFF"/>
+                          </a:solidFill>
+                          <a:latin typeface="Arial"/>
+                        </a:rPr>
+                        <a:t>Timing</a:t>
+                      </a:r>
+                    </a:p>
+                  </a:txBody>
+                  <a:tcPr marL="91440" anchor="ctr">
+                    <a:solidFill>
+                      <a:srgbClr val="0B2545"/>
+                    </a:solidFill>
+                  </a:tcPr>
+                </a:tc>
+              </a:tr>
+              <a:tr h="384048">
+                <a:tc>
+                  <a:txBody>
+                    <a:bodyPr/>
+                    <a:lstStyle/>
+                    <a:p>
+                      <a:r>
+                        <a:rPr sz="1300" b="1">
+                          <a:solidFill>
+                            <a:srgbClr val="2251FF"/>
+                          </a:solidFill>
+                          <a:latin typeface="Arial"/>
+                        </a:rPr>
+                        <a:t>1</a:t>
+                      </a:r>
+                    </a:p>
+                  </a:txBody>
+                  <a:tcPr marL="91440" anchor="ctr">
+                    <a:solidFill>
+                      <a:srgbClr val="FFFFFF"/>
+                    </a:solidFill>
+                  </a:tcPr>
+                </a:tc>
+                <a:tc>
+                  <a:txBody>
+                    <a:bodyPr/>
+                    <a:lstStyle/>
+                    <a:p>
+                      <a:r>
+                        <a:rPr sz="1300" b="0">
+                          <a:solidFill>
+                            <a:srgbClr val="1A1A1A"/>
+                          </a:solidFill>
+                          <a:latin typeface="Arial"/>
+                        </a:rPr>
+                        <a:t>Fix the Android exposure event lost since the 2026-09-05 release (about 3,085 treatment users missing)</a:t>
+                      </a:r>
+                    </a:p>
+                  </a:txBody>
+                  <a:tcPr marL="91440" anchor="ctr">
+                    <a:solidFill>
+                      <a:srgbClr val="FFFFFF"/>
+                    </a:solidFill>
+                  </a:tcPr>
+                </a:tc>
+                <a:tc>
+                  <a:txBody>
+                    <a:bodyPr/>
+                    <a:lstStyle/>
+                    <a:p>
+                      <a:r>
+                        <a:rPr sz="1300" b="0">
+                          <a:solidFill>
+                            <a:srgbClr val="1A1A1A"/>
+                          </a:solidFill>
+                          <a:latin typeface="Arial"/>
+                        </a:rPr>
+                        <a:t>Engineering</a:t>
+                      </a:r>
+                    </a:p>
+                  </a:txBody>
+                  <a:tcPr marL="91440" anchor="ctr">
+                    <a:solidFill>
+                      <a:srgbClr val="FFFFFF"/>
+                    </a:solidFill>
+                  </a:tcPr>
+                </a:tc>
+                <a:tc>
+                  <a:txBody>
+                    <a:bodyPr/>
+                    <a:lstStyle/>
+                    <a:p>
+                      <a:r>
+                        <a:rPr sz="1300" b="0">
+                          <a:solidFill>
+                            <a:srgbClr val="1A1A1A"/>
+                          </a:solidFill>
+                          <a:latin typeface="Arial"/>
+                        </a:rPr>
+                        <a:t>To agree</a:t>
+                      </a:r>
+                    </a:p>
+                  </a:txBody>
+                  <a:tcPr marL="91440" anchor="ctr">
+                    <a:solidFill>
+                      <a:srgbClr val="FFFFFF"/>
+                    </a:solidFill>
+                  </a:tcPr>
+                </a:tc>
+              </a:tr>
+              <a:tr h="384048">
+                <a:tc>
+                  <a:txBody>
+                    <a:bodyPr/>
+                    <a:lstStyle/>
+                    <a:p>
+                      <a:r>
+                        <a:rPr sz="1300" b="1">
+                          <a:solidFill>
+                            <a:srgbClr val="2251FF"/>
+                          </a:solidFill>
+                          <a:latin typeface="Arial"/>
+                        </a:rPr>
+                        <a:t>2</a:t>
+                      </a:r>
+                    </a:p>
+                  </a:txBody>
+                  <a:tcPr marL="91440" anchor="ctr">
+                    <a:solidFill>
+                      <a:srgbClr val="FFFFFF"/>
+                    </a:solidFill>
+                  </a:tcPr>
+                </a:tc>
+                <a:tc>
+                  <a:txBody>
+                    <a:bodyPr/>
+                    <a:lstStyle/>
+                    <a:p>
+                      <a:r>
+                        <a:rPr sz="1300" b="0">
+                          <a:solidFill>
+                            <a:srgbClr val="1A1A1A"/>
+                          </a:solidFill>
+                          <a:latin typeface="Arial"/>
+                        </a:rPr>
+                        <a:t>Re-extract exposures from server-side assignment logs and rerun this workflow on the corrected data</a:t>
+                      </a:r>
+                    </a:p>
+                  </a:txBody>
+                  <a:tcPr marL="91440" anchor="ctr">
+                    <a:solidFill>
+                      <a:srgbClr val="FFFFFF"/>
+                    </a:solidFill>
+                  </a:tcPr>
+                </a:tc>
+                <a:tc>
+                  <a:txBody>
+                    <a:bodyPr/>
+                    <a:lstStyle/>
+                    <a:p>
+                      <a:r>
+                        <a:rPr sz="1300" b="0">
+                          <a:solidFill>
+                            <a:srgbClr val="1A1A1A"/>
+                          </a:solidFill>
+                          <a:latin typeface="Arial"/>
+                        </a:rPr>
+                        <a:t>To agree</a:t>
+                      </a:r>
+                    </a:p>
+                  </a:txBody>
+                  <a:tcPr marL="91440" anchor="ctr">
+                    <a:solidFill>
+                      <a:srgbClr val="FFFFFF"/>
+                    </a:solidFill>
+                  </a:tcPr>
+                </a:tc>
+                <a:tc>
+                  <a:txBody>
+                    <a:bodyPr/>
+                    <a:lstStyle/>
+                    <a:p>
+                      <a:r>
+                        <a:rPr sz="1300" b="0">
+                          <a:solidFill>
+                            <a:srgbClr val="1A1A1A"/>
+                          </a:solidFill>
+                          <a:latin typeface="Arial"/>
+                        </a:rPr>
+                        <a:t>To agree</a:t>
+                      </a:r>
+                    </a:p>
+                  </a:txBody>
+                  <a:tcPr marL="91440" anchor="ctr">
+                    <a:solidFill>
+                      <a:srgbClr val="FFFFFF"/>
+                    </a:solidFill>
+                  </a:tcPr>
+                </a:tc>
+              </a:tr>
+              <a:tr h="384048">
+                <a:tc>
+                  <a:txBody>
+                    <a:bodyPr/>
+                    <a:lstStyle/>
+                    <a:p>
+                      <a:r>
+                        <a:rPr sz="1300" b="1">
+                          <a:solidFill>
+                            <a:srgbClr val="2251FF"/>
+                          </a:solidFill>
+                          <a:latin typeface="Arial"/>
+                        </a:rPr>
+                        <a:t>3</a:t>
+                      </a:r>
+                    </a:p>
+                  </a:txBody>
+                  <a:tcPr marL="91440" anchor="ctr">
+                    <a:solidFill>
+                      <a:srgbClr val="FFFFFF"/>
+                    </a:solidFill>
+                  </a:tcPr>
+                </a:tc>
+                <a:tc>
+                  <a:txBody>
+                    <a:bodyPr/>
+                    <a:lstStyle/>
+                    <a:p>
+                      <a:r>
+                        <a:rPr sz="1300" b="0">
+                          <a:solidFill>
+                            <a:srgbClr val="1A1A1A"/>
+                          </a:solidFill>
+                          <a:latin typeface="Arial"/>
+                        </a:rPr>
+                        <a:t>If the logs cannot be repaired, rerun the test for two full weeks after the fix</a:t>
+                      </a:r>
+                    </a:p>
+                  </a:txBody>
+                  <a:tcPr marL="91440" anchor="ctr">
+                    <a:solidFill>
+                      <a:srgbClr val="FFFFFF"/>
+                    </a:solidFill>
+                  </a:tcPr>
+                </a:tc>
+                <a:tc>
+                  <a:txBody>
+                    <a:bodyPr/>
+                    <a:lstStyle/>
+                    <a:p>
+                      <a:r>
+                        <a:rPr sz="1300" b="0">
+                          <a:solidFill>
+                            <a:srgbClr val="1A1A1A"/>
+                          </a:solidFill>
+                          <a:latin typeface="Arial"/>
+                        </a:rPr>
+                        <a:t>To agree</a:t>
+                      </a:r>
+                    </a:p>
+                  </a:txBody>
+                  <a:tcPr marL="91440" anchor="ctr">
+                    <a:solidFill>
+                      <a:srgbClr val="FFFFFF"/>
+                    </a:solidFill>
+                  </a:tcPr>
+                </a:tc>
+                <a:tc>
+                  <a:txBody>
+                    <a:bodyPr/>
+                    <a:lstStyle/>
+                    <a:p>
+                      <a:r>
+                        <a:rPr sz="1300" b="0">
+                          <a:solidFill>
+                            <a:srgbClr val="1A1A1A"/>
+                          </a:solidFill>
+                          <a:latin typeface="Arial"/>
+                        </a:rPr>
+                        <a:t>To agree</a:t>
+                      </a:r>
+                    </a:p>
+                  </a:txBody>
+                  <a:tcPr marL="91440" anchor="ctr">
+                    <a:solidFill>
+                      <a:srgbClr val="FFFFFF"/>
+                    </a:solidFill>
+                  </a:tcPr>
+                </a:tc>
+              </a:tr>
+              <a:tr h="384048">
+                <a:tc>
+                  <a:txBody>
+                    <a:bodyPr/>
+                    <a:lstStyle/>
+                    <a:p>
+                      <a:r>
+                        <a:rPr sz="1300" b="1">
+                          <a:solidFill>
+                            <a:srgbClr val="2251FF"/>
+                          </a:solidFill>
+                          <a:latin typeface="Arial"/>
+                        </a:rPr>
+                        <a:t>4</a:t>
+                      </a:r>
+                    </a:p>
+                  </a:txBody>
+                  <a:tcPr marL="91440" anchor="ctr">
+                    <a:solidFill>
+                      <a:srgbClr val="FFFFFF"/>
+                    </a:solidFill>
+                  </a:tcPr>
+                </a:tc>
+                <a:tc>
+                  <a:txBody>
+                    <a:bodyPr/>
+                    <a:lstStyle/>
+                    <a:p>
+                      <a:r>
+                        <a:rPr sz="1300" b="0">
+                          <a:solidFill>
+                            <a:srgbClr val="1A1A1A"/>
+                          </a:solidFill>
+                          <a:latin typeface="Arial"/>
+                        </a:rPr>
+                        <a:t>Add an automated daily SRM alert (by platform) to the experiment dashboard</a:t>
+                      </a:r>
+                    </a:p>
+                  </a:txBody>
+                  <a:tcPr marL="91440" anchor="ctr">
+                    <a:solidFill>
+                      <a:srgbClr val="FFFFFF"/>
+                    </a:solidFill>
+                  </a:tcPr>
+                </a:tc>
+                <a:tc>
+                  <a:txBody>
+                    <a:bodyPr/>
+                    <a:lstStyle/>
+                    <a:p>
+                      <a:r>
+                        <a:rPr sz="1300" b="0">
+                          <a:solidFill>
+                            <a:srgbClr val="1A1A1A"/>
+                          </a:solidFill>
+                          <a:latin typeface="Arial"/>
+                        </a:rPr>
+                        <a:t>To agree</a:t>
+                      </a:r>
+                    </a:p>
+                  </a:txBody>
+                  <a:tcPr marL="91440" anchor="ctr">
+                    <a:solidFill>
+                      <a:srgbClr val="FFFFFF"/>
+                    </a:solidFill>
+                  </a:tcPr>
+                </a:tc>
+                <a:tc>
+                  <a:txBody>
+                    <a:bodyPr/>
+                    <a:lstStyle/>
+                    <a:p>
+                      <a:r>
+                        <a:rPr sz="1300" b="0">
+                          <a:solidFill>
+                            <a:srgbClr val="1A1A1A"/>
+                          </a:solidFill>
+                          <a:latin typeface="Arial"/>
+                        </a:rPr>
+                        <a:t>To agree</a:t>
+                      </a:r>
+                    </a:p>
+                  </a:txBody>
+                  <a:tcPr marL="91440" anchor="ctr">
+                    <a:solidFill>
+                      <a:srgbClr val="FFFFFF"/>
+                    </a:solidFill>
+                  </a:tcPr>
+                </a:tc>
+              </a:tr>
+            </a:tbl>
+          </a:graphicData>
+        </a:graphic>
+      </p:graphicFrame>
+    </p:spTree>
+  </p:cSld>
+  <p:clrMapOvr>
+    <a:masterClrMapping/>
+  </p:clrMapOvr>
+</p:sld>
+</file>
+
+<file path=ppt/slides/slide2.xml><?xml version="1.0" encoding="utf-8"?>
+<p:sld xmlns:a="http://schemas.openxmlformats.org/drawingml/2006/main" xmlns:p="http://schemas.openxmlformats.org/presentationml/2006/main" xmlns:r="http://schemas.openxmlformats.org/officeDocument/2006/relationships">
+  <p:cSld>
+    <p:spTree>
+      <p:nvGrpSpPr>
+        <p:cNvPr id="1" name=""/>
+        <p:cNvGrpSpPr/>
+        <p:nvPr/>
+      </p:nvGrpSpPr>
+      <p:grpSpPr/>
+      <p:sp>
+        <p:nvSpPr>
+          <p:cNvPr id="2" name="TextBox 1"/>
+          <p:cNvSpPr txBox="1"/>
+          <p:nvPr/>
+        </p:nvSpPr>
+        <p:spPr>
+          <a:xfrm>
+            <a:off x="502920" y="109728"/>
+            <a:ext cx="3657600" cy="256032"/>
+          </a:xfrm>
+          <a:prstGeom prst="rect">
+            <a:avLst/>
+          </a:prstGeom>
+          <a:noFill/>
+        </p:spPr>
+        <p:txBody>
+          <a:bodyPr wrap="square" anchor="t" lIns="18288" rIns="18288" tIns="18288" bIns="18288">
+            <a:spAutoFit/>
+          </a:bodyPr>
+          <a:lstStyle/>
+          <a:p>
+            <a:pPr algn="l"/>
+            <a:r>
+              <a:rPr sz="900" b="1">
+                <a:solidFill>
+                  <a:srgbClr val="2251FF"/>
+                </a:solidFill>
+                <a:latin typeface="Arial"/>
+              </a:rPr>
+              <a:t>EXECUTIVE SUMMARY</a:t>
+            </a:r>
+          </a:p>
+        </p:txBody>
+      </p:sp>
+      <p:sp>
+        <p:nvSpPr>
+          <p:cNvPr id="3" name="TextBox 2"/>
+          <p:cNvSpPr txBox="1"/>
+          <p:nvPr/>
+        </p:nvSpPr>
+        <p:spPr>
+          <a:xfrm>
+            <a:off x="502920" y="384048"/>
+            <a:ext cx="11185855" cy="868680"/>
+          </a:xfrm>
+          <a:prstGeom prst="rect">
+            <a:avLst/>
+          </a:prstGeom>
+          <a:noFill/>
+        </p:spPr>
+        <p:txBody>
+          <a:bodyPr wrap="square" anchor="t" lIns="18288" rIns="18288" tIns="18288" bIns="18288">
+            <a:spAutoFit/>
+          </a:bodyPr>
+          <a:lstStyle/>
+          <a:p>
+            <a:pPr algn="l"/>
+            <a:r>
+              <a:rPr sz="2400" b="1">
+                <a:solidFill>
+                  <a:srgbClr val="1A1A1A"/>
+                </a:solidFill>
+                <a:latin typeface="Arial"/>
+              </a:rPr>
+              <a:t>Results withheld: treatment has 7.1% fewer units than the intended split (p &lt; 0.001, sample ratio mismatch)</a:t>
+            </a:r>
+          </a:p>
+        </p:txBody>
+      </p:sp>
+      <p:sp>
+        <p:nvSpPr>
+          <p:cNvPr id="4" name="Rectangle 3"/>
+          <p:cNvSpPr/>
+          <p:nvPr/>
+        </p:nvSpPr>
+        <p:spPr>
+          <a:xfrm>
+            <a:off x="502920" y="1216152"/>
+            <a:ext cx="822960" cy="38100"/>
+          </a:xfrm>
+          <a:prstGeom prst="rect">
+            <a:avLst/>
+          </a:prstGeom>
+          <a:solidFill>
+            <a:srgbClr val="2251FF"/>
+          </a:solidFill>
+          <a:ln>
+            <a:noFill/>
+          </a:ln>
+          <a:effectLst/>
+        </p:spPr>
+        <p:style>
+          <a:lnRef idx="1">
+            <a:schemeClr val="accent1"/>
+          </a:lnRef>
+          <a:fillRef idx="3">
+            <a:schemeClr val="accent1"/>
+          </a:fillRef>
+          <a:effectRef idx="2">
+            <a:schemeClr val="accent1"/>
+          </a:effectRef>
+          <a:fontRef idx="minor">
+            <a:schemeClr val="lt1"/>
+          </a:fontRef>
+        </p:style>
+        <p:txBody>
+          <a:bodyPr rtlCol="0" anchor="ctr"/>
+          <a:lstStyle/>
+          <a:p>
+            <a:pPr algn="ctr"/>
+          </a:p>
+        </p:txBody>
+      </p:sp>
+      <p:sp>
+        <p:nvSpPr>
+          <p:cNvPr id="5" name="Rectangle 4"/>
+          <p:cNvSpPr/>
+          <p:nvPr/>
+        </p:nvSpPr>
+        <p:spPr>
+          <a:xfrm>
+            <a:off x="502920" y="1417320"/>
+            <a:ext cx="3017520" cy="4754880"/>
+          </a:xfrm>
+          <a:prstGeom prst="rect">
+            <a:avLst/>
+          </a:prstGeom>
+          <a:solidFill>
+            <a:srgbClr val="C0392B"/>
+          </a:solidFill>
+          <a:ln>
+            <a:noFill/>
+          </a:ln>
+          <a:effectLst/>
+        </p:spPr>
+        <p:style>
+          <a:lnRef idx="1">
+            <a:schemeClr val="accent1"/>
+          </a:lnRef>
+          <a:fillRef idx="3">
+            <a:schemeClr val="accent1"/>
+          </a:fillRef>
+          <a:effectRef idx="2">
+            <a:schemeClr val="accent1"/>
+          </a:effectRef>
+          <a:fontRef idx="minor">
+            <a:schemeClr val="lt1"/>
+          </a:fontRef>
+        </p:style>
+        <p:txBody>
+          <a:bodyPr rtlCol="0" anchor="t" wrap="square" lIns="228600" rIns="228600" tIns="274320"/>
+          <a:lstStyle/>
+          <a:p>
+            <a:pPr algn="l"/>
+            <a:r>
+              <a:rPr sz="1100" b="1">
+                <a:solidFill>
+                  <a:srgbClr val="FFFFFF"/>
+                </a:solidFill>
+                <a:latin typeface="Arial"/>
+              </a:rPr>
+              <a:t>RECOMMENDATION</a:t>
+            </a:r>
+          </a:p>
+          <a:p>
+            <a:pPr algn="l"/>
+            <a:r>
+              <a:rPr sz="2600" b="1">
+                <a:solidFill>
+                  <a:srgbClr val="FFFFFF"/>
+                </a:solidFill>
+                <a:latin typeface="Arial"/>
+              </a:rPr>
+              <a:t>BLOCKED: DATA ISSUE</a:t>
+            </a:r>
+          </a:p>
+          <a:p>
+            <a:pPr algn="l"/>
+            <a:r>
+              <a:rPr sz="600" b="0">
+                <a:solidFill>
+                  <a:srgbClr val="FFFFFF"/>
+                </a:solidFill>
+                <a:latin typeface="Arial"/>
+              </a:rPr>
+              <a:t/>
+            </a:r>
+          </a:p>
+          <a:p>
+            <a:pPr algn="l"/>
+            <a:r>
+              <a:rPr sz="1300" b="0">
+                <a:solidFill>
+                  <a:srgbClr val="FFFFFF"/>
+                </a:solidFill>
+                <a:latin typeface="Arial"/>
+              </a:rPr>
+              <a:t>The data failed a blocking validation check, so treatment effects cannot be trusted.</a:t>
+            </a:r>
+          </a:p>
+        </p:txBody>
+      </p:sp>
+      <p:sp>
+        <p:nvSpPr>
+          <p:cNvPr id="6" name="TextBox 5"/>
+          <p:cNvSpPr txBox="1"/>
+          <p:nvPr/>
+        </p:nvSpPr>
+        <p:spPr>
+          <a:xfrm>
+            <a:off x="3886200" y="1417320"/>
+            <a:ext cx="7802575" cy="274320"/>
+          </a:xfrm>
+          <a:prstGeom prst="rect">
+            <a:avLst/>
+          </a:prstGeom>
+          <a:noFill/>
+        </p:spPr>
+        <p:txBody>
+          <a:bodyPr wrap="square" anchor="t" lIns="18288" rIns="18288" tIns="18288" bIns="18288">
+            <a:spAutoFit/>
+          </a:bodyPr>
+          <a:lstStyle/>
+          <a:p>
+            <a:pPr algn="l"/>
+            <a:r>
+              <a:rPr sz="1100" b="1">
+                <a:solidFill>
+                  <a:srgbClr val="0B2545"/>
+                </a:solidFill>
+                <a:latin typeface="Arial"/>
+              </a:rPr>
+              <a:t>THE ASK</a:t>
+            </a:r>
+          </a:p>
+        </p:txBody>
+      </p:sp>
+      <p:sp>
+        <p:nvSpPr>
+          <p:cNvPr id="7" name="TextBox 6"/>
+          <p:cNvSpPr txBox="1"/>
+          <p:nvPr/>
+        </p:nvSpPr>
+        <p:spPr>
+          <a:xfrm>
+            <a:off x="3886200" y="1691640"/>
+            <a:ext cx="7802575" cy="548640"/>
+          </a:xfrm>
+          <a:prstGeom prst="rect">
+            <a:avLst/>
+          </a:prstGeom>
+          <a:noFill/>
+        </p:spPr>
+        <p:txBody>
+          <a:bodyPr wrap="square" anchor="t" lIns="18288" rIns="18288" tIns="18288" bIns="18288">
+            <a:spAutoFit/>
+          </a:bodyPr>
+          <a:lstStyle/>
+          <a:p>
+            <a:pPr algn="l"/>
+            <a:r>
+              <a:rPr sz="1400" b="0">
+                <a:solidFill>
+                  <a:srgbClr val="1A1A1A"/>
+                </a:solidFill>
+                <a:latin typeface="Arial"/>
+              </a:rPr>
+              <a:t>Does the new onboarding checklist increase 7-day activation?</a:t>
+            </a:r>
+          </a:p>
+        </p:txBody>
+      </p:sp>
+      <p:sp>
+        <p:nvSpPr>
           <p:cNvPr id="8" name="TextBox 7"/>
+          <p:cNvSpPr txBox="1"/>
+          <p:nvPr/>
+        </p:nvSpPr>
+        <p:spPr>
+          <a:xfrm>
+            <a:off x="3886200" y="2286000"/>
+            <a:ext cx="7802575" cy="274320"/>
+          </a:xfrm>
+          <a:prstGeom prst="rect">
+            <a:avLst/>
+          </a:prstGeom>
+          <a:noFill/>
+        </p:spPr>
+        <p:txBody>
+          <a:bodyPr wrap="square" anchor="t" lIns="18288" rIns="18288" tIns="18288" bIns="18288">
+            <a:spAutoFit/>
+          </a:bodyPr>
+          <a:lstStyle/>
+          <a:p>
+            <a:pPr algn="l"/>
+            <a:r>
+              <a:rPr sz="1100" b="1">
+                <a:solidFill>
+                  <a:srgbClr val="0B2545"/>
+                </a:solidFill>
+                <a:latin typeface="Arial"/>
+              </a:rPr>
+              <a:t>WHAT WE FOUND</a:t>
+            </a:r>
+          </a:p>
+        </p:txBody>
+      </p:sp>
+      <p:sp>
+        <p:nvSpPr>
+          <p:cNvPr id="9" name="TextBox 8"/>
+          <p:cNvSpPr txBox="1"/>
+          <p:nvPr/>
+        </p:nvSpPr>
+        <p:spPr>
+          <a:xfrm>
+            <a:off x="3886200" y="2560320"/>
+            <a:ext cx="7802575" cy="1737360"/>
+          </a:xfrm>
+          <a:prstGeom prst="rect">
+            <a:avLst/>
+          </a:prstGeom>
+          <a:noFill/>
+        </p:spPr>
+        <p:txBody>
+          <a:bodyPr wrap="square" lIns="18288" rIns="18288">
+            <a:spAutoFit/>
+          </a:bodyPr>
+          <a:lstStyle/>
+          <a:p>
+            <a:pPr>
+              <a:spcAft>
+                <a:spcPts val="400"/>
+              </a:spcAft>
+            </a:pPr>
+            <a:r>
+              <a:rPr sz="1300" b="1">
+                <a:solidFill>
+                  <a:srgbClr val="2251FF"/>
+                </a:solidFill>
+                <a:latin typeface="Arial"/>
+              </a:rPr>
+              <a:t>•  </a:t>
+            </a:r>
+            <a:r>
+              <a:rPr sz="1300" b="1">
+                <a:solidFill>
+                  <a:srgbClr val="1A1A1A"/>
+                </a:solidFill>
+                <a:latin typeface="Arial"/>
+              </a:rPr>
+              <a:t>Observed share control: </a:t>
+            </a:r>
+            <a:r>
+              <a:rPr sz="1300">
+                <a:solidFill>
+                  <a:srgbClr val="1A1A1A"/>
+                </a:solidFill>
+                <a:latin typeface="Arial"/>
+              </a:rPr>
+              <a:t>53.6% (expected 50.0%)</a:t>
+            </a:r>
+          </a:p>
+          <a:p>
+            <a:pPr>
+              <a:spcAft>
+                <a:spcPts val="400"/>
+              </a:spcAft>
+            </a:pPr>
+            <a:r>
+              <a:rPr sz="1300" b="1">
+                <a:solidFill>
+                  <a:srgbClr val="2251FF"/>
+                </a:solidFill>
+                <a:latin typeface="Arial"/>
+              </a:rPr>
+              <a:t>•  </a:t>
+            </a:r>
+            <a:r>
+              <a:rPr sz="1300" b="1">
+                <a:solidFill>
+                  <a:srgbClr val="1A1A1A"/>
+                </a:solidFill>
+                <a:latin typeface="Arial"/>
+              </a:rPr>
+              <a:t>Observed share treatment: </a:t>
+            </a:r>
+            <a:r>
+              <a:rPr sz="1300">
+                <a:solidFill>
+                  <a:srgbClr val="1A1A1A"/>
+                </a:solidFill>
+                <a:latin typeface="Arial"/>
+              </a:rPr>
+              <a:t>46.4% (expected 50.0%)</a:t>
+            </a:r>
+          </a:p>
+          <a:p>
+            <a:pPr>
+              <a:spcAft>
+                <a:spcPts val="400"/>
+              </a:spcAft>
+            </a:pPr>
+            <a:r>
+              <a:rPr sz="1300" b="1">
+                <a:solidFill>
+                  <a:srgbClr val="2251FF"/>
+                </a:solidFill>
+                <a:latin typeface="Arial"/>
+              </a:rPr>
+              <a:t>•  </a:t>
+            </a:r>
+            <a:r>
+              <a:rPr sz="1300" b="1">
+                <a:solidFill>
+                  <a:srgbClr val="1A1A1A"/>
+                </a:solidFill>
+                <a:latin typeface="Arial"/>
+              </a:rPr>
+              <a:t>SRM test: </a:t>
+            </a:r>
+            <a:r>
+              <a:rPr sz="1300">
+                <a:solidFill>
+                  <a:srgbClr val="1A1A1A"/>
+                </a:solidFill>
+                <a:latin typeface="Arial"/>
+              </a:rPr>
+              <a:t>chi-square p &lt; 0.001 (threshold 0.001)</a:t>
+            </a:r>
+          </a:p>
+          <a:p>
+            <a:pPr>
+              <a:spcAft>
+                <a:spcPts val="400"/>
+              </a:spcAft>
+            </a:pPr>
+            <a:r>
+              <a:rPr sz="1300" b="1">
+                <a:solidFill>
+                  <a:srgbClr val="2251FF"/>
+                </a:solidFill>
+                <a:latin typeface="Arial"/>
+              </a:rPr>
+              <a:t>•  </a:t>
+            </a:r>
+            <a:r>
+              <a:rPr sz="1300" b="1">
+                <a:solidFill>
+                  <a:srgbClr val="1A1A1A"/>
+                </a:solidFill>
+                <a:latin typeface="Arial"/>
+              </a:rPr>
+              <a:t>Concentrated in: </a:t>
+            </a:r>
+            <a:r>
+              <a:rPr sz="1300">
+                <a:solidFill>
+                  <a:srgbClr val="1A1A1A"/>
+                </a:solidFill>
+                <a:latin typeface="Arial"/>
+              </a:rPr>
+              <a:t>exposure_date 2026-09-05 to 2026-09-14 (10 of 14 levels); platform=Android</a:t>
+            </a:r>
+          </a:p>
+        </p:txBody>
+      </p:sp>
+      <p:sp>
+        <p:nvSpPr>
+          <p:cNvPr id="10" name="TextBox 9"/>
+          <p:cNvSpPr txBox="1"/>
+          <p:nvPr/>
+        </p:nvSpPr>
+        <p:spPr>
+          <a:xfrm>
+            <a:off x="3886200" y="3950208"/>
+            <a:ext cx="7802575" cy="274320"/>
+          </a:xfrm>
+          <a:prstGeom prst="rect">
+            <a:avLst/>
+          </a:prstGeom>
+          <a:noFill/>
+        </p:spPr>
+        <p:txBody>
+          <a:bodyPr wrap="square" anchor="t" lIns="18288" rIns="18288" tIns="18288" bIns="18288">
+            <a:spAutoFit/>
+          </a:bodyPr>
+          <a:lstStyle/>
+          <a:p>
+            <a:pPr algn="l"/>
+            <a:r>
+              <a:rPr sz="1100" b="1">
+                <a:solidFill>
+                  <a:srgbClr val="0B2545"/>
+                </a:solidFill>
+                <a:latin typeface="Arial"/>
+              </a:rPr>
+              <a:t>WHAT IT MEANS</a:t>
+            </a:r>
+          </a:p>
+        </p:txBody>
+      </p:sp>
+      <p:sp>
+        <p:nvSpPr>
+          <p:cNvPr id="11" name="TextBox 10"/>
+          <p:cNvSpPr txBox="1"/>
+          <p:nvPr/>
+        </p:nvSpPr>
+        <p:spPr>
+          <a:xfrm>
+            <a:off x="3886200" y="4224528"/>
+            <a:ext cx="7802575" cy="640080"/>
+          </a:xfrm>
+          <a:prstGeom prst="rect">
+            <a:avLst/>
+          </a:prstGeom>
+          <a:noFill/>
+        </p:spPr>
+        <p:txBody>
+          <a:bodyPr wrap="square" anchor="t" lIns="18288" rIns="18288" tIns="18288" bIns="18288">
+            <a:spAutoFit/>
+          </a:bodyPr>
+          <a:lstStyle/>
+          <a:p>
+            <a:pPr algn="l"/>
+            <a:r>
+              <a:rPr sz="1300" b="0">
+                <a:solidFill>
+                  <a:srgbClr val="1A1A1A"/>
+                </a:solidFill>
+                <a:latin typeface="Arial"/>
+              </a:rPr>
+              <a:t>The groups being compared are not the ones the experiment created, so any difference between them could come from the data problem rather than the change.</a:t>
+            </a:r>
+          </a:p>
+        </p:txBody>
+      </p:sp>
+      <p:sp>
+        <p:nvSpPr>
+          <p:cNvPr id="12" name="TextBox 11"/>
+          <p:cNvSpPr txBox="1"/>
+          <p:nvPr/>
+        </p:nvSpPr>
+        <p:spPr>
+          <a:xfrm>
+            <a:off x="3886200" y="4910328"/>
+            <a:ext cx="7802575" cy="274320"/>
+          </a:xfrm>
+          <a:prstGeom prst="rect">
+            <a:avLst/>
+          </a:prstGeom>
+          <a:noFill/>
+        </p:spPr>
+        <p:txBody>
+          <a:bodyPr wrap="square" anchor="t" lIns="18288" rIns="18288" tIns="18288" bIns="18288">
+            <a:spAutoFit/>
+          </a:bodyPr>
+          <a:lstStyle/>
+          <a:p>
+            <a:pPr algn="l"/>
+            <a:r>
+              <a:rPr sz="1100" b="1">
+                <a:solidFill>
+                  <a:srgbClr val="0B2545"/>
+                </a:solidFill>
+                <a:latin typeface="Arial"/>
+              </a:rPr>
+              <a:t>WHAT WE RECOMMEND</a:t>
+            </a:r>
+          </a:p>
+        </p:txBody>
+      </p:sp>
+      <p:sp>
+        <p:nvSpPr>
+          <p:cNvPr id="13" name="TextBox 12"/>
+          <p:cNvSpPr txBox="1"/>
+          <p:nvPr/>
+        </p:nvSpPr>
+        <p:spPr>
+          <a:xfrm>
+            <a:off x="3886200" y="5184648"/>
+            <a:ext cx="7802575" cy="548640"/>
+          </a:xfrm>
+          <a:prstGeom prst="rect">
+            <a:avLst/>
+          </a:prstGeom>
+          <a:noFill/>
+        </p:spPr>
+        <p:txBody>
+          <a:bodyPr wrap="square" anchor="t" lIns="18288" rIns="18288" tIns="18288" bIns="18288">
+            <a:spAutoFit/>
+          </a:bodyPr>
+          <a:lstStyle/>
+          <a:p>
+            <a:pPr algn="l"/>
+            <a:r>
+              <a:rPr sz="1300" b="1">
+                <a:solidFill>
+                  <a:srgbClr val="1A1A1A"/>
+                </a:solidFill>
+                <a:latin typeface="Arial"/>
+              </a:rPr>
+              <a:t>Fix the Android exposure event lost since the 2026-09-05 release (about 3,085 treatment users missing)</a:t>
+            </a:r>
+          </a:p>
+        </p:txBody>
+      </p:sp>
+      <p:sp>
+        <p:nvSpPr>
+          <p:cNvPr id="14" name="TextBox 13"/>
+          <p:cNvSpPr txBox="1"/>
+          <p:nvPr/>
+        </p:nvSpPr>
+        <p:spPr>
+          <a:xfrm>
+            <a:off x="3886200" y="5687568"/>
+            <a:ext cx="7802575" cy="274320"/>
+          </a:xfrm>
+          <a:prstGeom prst="rect">
+            <a:avLst/>
+          </a:prstGeom>
+          <a:noFill/>
+        </p:spPr>
+        <p:txBody>
+          <a:bodyPr wrap="square" anchor="t" lIns="18288" rIns="18288" tIns="18288" bIns="18288">
+            <a:spAutoFit/>
+          </a:bodyPr>
+          <a:lstStyle/>
+          <a:p>
+            <a:pPr algn="l"/>
+            <a:r>
+              <a:rPr sz="1100" b="1">
+                <a:solidFill>
+                  <a:srgbClr val="0B2545"/>
+                </a:solidFill>
+                <a:latin typeface="Arial"/>
+              </a:rPr>
+              <a:t>MAIN CAVEAT</a:t>
+            </a:r>
+          </a:p>
+        </p:txBody>
+      </p:sp>
+      <p:sp>
+        <p:nvSpPr>
+          <p:cNvPr id="15" name="TextBox 14"/>
+          <p:cNvSpPr txBox="1"/>
+          <p:nvPr/>
+        </p:nvSpPr>
+        <p:spPr>
+          <a:xfrm>
+            <a:off x="3886200" y="5961888"/>
+            <a:ext cx="7802575" cy="548640"/>
+          </a:xfrm>
+          <a:prstGeom prst="rect">
+            <a:avLst/>
+          </a:prstGeom>
+          <a:noFill/>
+        </p:spPr>
+        <p:txBody>
+          <a:bodyPr wrap="square" anchor="t" lIns="18288" rIns="18288" tIns="18288" bIns="18288">
+            <a:spAutoFit/>
+          </a:bodyPr>
+          <a:lstStyle/>
+          <a:p>
+            <a:pPr algn="l"/>
+            <a:r>
+              <a:rPr sz="1300" b="0">
+                <a:solidFill>
+                  <a:srgbClr val="C0392B"/>
+                </a:solidFill>
+                <a:latin typeface="Arial"/>
+              </a:rPr>
+              <a:t>iOS + Web alone show no mismatch (p = 0.323), but an iOS + Web-only readout would answer a different question (it excludes a whole platform); treat it as a sensitivity check only.</a:t>
+            </a:r>
+          </a:p>
+        </p:txBody>
+      </p:sp>
+      <p:sp>
+        <p:nvSpPr>
+          <p:cNvPr id="16" name="Rectangle 15"/>
+          <p:cNvSpPr/>
+          <p:nvPr/>
+        </p:nvSpPr>
+        <p:spPr>
+          <a:xfrm>
+            <a:off x="502920" y="6327648"/>
+            <a:ext cx="11185855" cy="6350"/>
+          </a:xfrm>
+          <a:prstGeom prst="rect">
+            <a:avLst/>
+          </a:prstGeom>
+          <a:solidFill>
+            <a:srgbClr val="E3E3E3"/>
+          </a:solidFill>
+          <a:ln>
+            <a:noFill/>
+          </a:ln>
+          <a:effectLst/>
+        </p:spPr>
+        <p:style>
+          <a:lnRef idx="1">
+            <a:schemeClr val="accent1"/>
+          </a:lnRef>
+          <a:fillRef idx="3">
+            <a:schemeClr val="accent1"/>
+          </a:fillRef>
+          <a:effectRef idx="2">
+            <a:schemeClr val="accent1"/>
+          </a:effectRef>
+          <a:fontRef idx="minor">
+            <a:schemeClr val="lt1"/>
+          </a:fontRef>
+        </p:style>
+        <p:txBody>
+          <a:bodyPr rtlCol="0" anchor="ctr"/>
+          <a:lstStyle/>
+          <a:p>
+            <a:pPr algn="ctr"/>
+          </a:p>
+        </p:txBody>
+      </p:sp>
+      <p:sp>
+        <p:nvSpPr>
+          <p:cNvPr id="17" name="TextBox 16"/>
+          <p:cNvSpPr txBox="1"/>
+          <p:nvPr/>
+        </p:nvSpPr>
+        <p:spPr>
+          <a:xfrm>
+            <a:off x="502920" y="6400800"/>
+            <a:ext cx="9875520" cy="320040"/>
+          </a:xfrm>
+          <a:prstGeom prst="rect">
+            <a:avLst/>
+          </a:prstGeom>
+          <a:noFill/>
+        </p:spPr>
+        <p:txBody>
+          <a:bodyPr wrap="square" anchor="t" lIns="18288" rIns="18288" tIns="18288" bIns="18288">
+            <a:spAutoFit/>
+          </a:bodyPr>
+          <a:lstStyle/>
+          <a:p>
+            <a:pPr algn="l"/>
+            <a:r>
+              <a:rPr sz="900" b="0">
+                <a:solidFill>
+                  <a:srgbClr val="8C8C8C"/>
+                </a:solidFill>
+                <a:latin typeface="Arial"/>
+              </a:rPr>
+              <a:t>Source: srm_broken.csv, 2026-09-01 to 2026-09-14; run 2026-10-01_onboarding-checklist</a:t>
+            </a:r>
+          </a:p>
+        </p:txBody>
+      </p:sp>
+      <p:sp>
+        <p:nvSpPr>
+          <p:cNvPr id="18" name="TextBox 17"/>
           <p:cNvSpPr txBox="1"/>
           <p:nvPr/>
         </p:nvSpPr>
@@ -4444,7 +6421,7 @@
         </p:nvSpPr>
         <p:spPr>
           <a:xfrm>
-            <a:off x="502920" y="320040"/>
+            <a:off x="502920" y="384048"/>
             <a:ext cx="11185855" cy="868680"/>
           </a:xfrm>
           <a:prstGeom prst="rect">
@@ -4466,7 +6443,7 @@
                 </a:solidFill>
                 <a:latin typeface="Arial"/>
               </a:rPr>
-              <a:t>Treatment is missing 7.1% of its expected users: results cannot be trusted until this is fixed</a:t>
+              <a:t>Agenda</a:t>
             </a:r>
           </a:p>
         </p:txBody>
@@ -4479,7 +6456,7 @@
         </p:nvSpPr>
         <p:spPr>
           <a:xfrm>
-            <a:off x="502920" y="1170432"/>
+            <a:off x="502920" y="1216152"/>
             <a:ext cx="822960" cy="38100"/>
           </a:xfrm>
           <a:prstGeom prst="rect">
@@ -4515,180 +6492,22 @@
           </a:p>
         </p:txBody>
       </p:sp>
-      <p:pic>
-        <p:nvPicPr>
-          <p:cNvPr id="4" name="Picture 3" descr="srm_bar.png"/>
-          <p:cNvPicPr>
-            <a:picLocks noChangeAspect="1"/>
-          </p:cNvPicPr>
-          <p:nvPr/>
-        </p:nvPicPr>
-        <p:blipFill>
-          <a:blip r:embed="rId2"/>
-          <a:srcRect t="16900"/>
-          <a:stretch>
-            <a:fillRect/>
-          </a:stretch>
-        </p:blipFill>
-        <p:spPr>
-          <a:xfrm>
-            <a:off x="502920" y="1417320"/>
-            <a:ext cx="7589520" cy="3547626"/>
-          </a:xfrm>
-          <a:prstGeom prst="rect">
-            <a:avLst/>
-          </a:prstGeom>
-        </p:spPr>
-      </p:pic>
-      <p:sp>
-        <p:nvSpPr>
-          <p:cNvPr id="5" name="TextBox 4"/>
-          <p:cNvSpPr txBox="1"/>
-          <p:nvPr/>
-        </p:nvSpPr>
-        <p:spPr>
-          <a:xfrm>
-            <a:off x="8412480" y="1463040"/>
-            <a:ext cx="3276295" cy="365760"/>
-          </a:xfrm>
-          <a:prstGeom prst="rect">
-            <a:avLst/>
-          </a:prstGeom>
-          <a:noFill/>
-        </p:spPr>
-        <p:txBody>
-          <a:bodyPr wrap="square" anchor="t" lIns="18288" rIns="18288" tIns="18288" bIns="18288">
-            <a:spAutoFit/>
-          </a:bodyPr>
-          <a:lstStyle/>
-          <a:p>
-            <a:pPr algn="l"/>
-            <a:r>
-              <a:rPr sz="1100" b="1">
-                <a:solidFill>
-                  <a:srgbClr val="8C8C8C"/>
-                </a:solidFill>
-                <a:latin typeface="Arial"/>
-              </a:rPr>
-              <a:t>KEY TAKEAWAYS</a:t>
-            </a:r>
-          </a:p>
-        </p:txBody>
-      </p:sp>
-      <p:sp>
-        <p:nvSpPr>
-          <p:cNvPr id="6" name="TextBox 5"/>
-          <p:cNvSpPr txBox="1"/>
-          <p:nvPr/>
-        </p:nvSpPr>
-        <p:spPr>
-          <a:xfrm>
-            <a:off x="8412480" y="1874520"/>
-            <a:ext cx="3276295" cy="4114800"/>
-          </a:xfrm>
-          <a:prstGeom prst="rect">
-            <a:avLst/>
-          </a:prstGeom>
-          <a:noFill/>
-        </p:spPr>
-        <p:txBody>
-          <a:bodyPr wrap="square">
-            <a:spAutoFit/>
-          </a:bodyPr>
-          <a:lstStyle/>
-          <a:p>
-            <a:pPr>
-              <a:spcAft>
-                <a:spcPts val="1000"/>
-              </a:spcAft>
-            </a:pPr>
-            <a:r>
-              <a:rPr sz="1400" b="1">
-                <a:solidFill>
-                  <a:srgbClr val="2251FF"/>
-                </a:solidFill>
-                <a:latin typeface="Arial"/>
-              </a:rPr>
-              <a:t>1.  </a:t>
-            </a:r>
-            <a:r>
-              <a:rPr sz="1400">
-                <a:solidFill>
-                  <a:srgbClr val="1A1A1A"/>
-                </a:solidFill>
-                <a:latin typeface="Arial"/>
-              </a:rPr>
-              <a:t>Treatment share 46.4% vs 50.0% intended</a:t>
-            </a:r>
-          </a:p>
-          <a:p>
-            <a:pPr>
-              <a:spcAft>
-                <a:spcPts val="1000"/>
-              </a:spcAft>
-            </a:pPr>
-            <a:r>
-              <a:rPr sz="1400" b="1">
-                <a:solidFill>
-                  <a:srgbClr val="2251FF"/>
-                </a:solidFill>
-                <a:latin typeface="Arial"/>
-              </a:rPr>
-              <a:t>2.  </a:t>
-            </a:r>
-            <a:r>
-              <a:rPr sz="1400">
-                <a:solidFill>
-                  <a:srgbClr val="1A1A1A"/>
-                </a:solidFill>
-                <a:latin typeface="Arial"/>
-              </a:rPr>
-              <a:t>Chi-square p &lt; 0.001 (threshold 0.001)</a:t>
-            </a:r>
-          </a:p>
-          <a:p>
-            <a:pPr>
-              <a:spcAft>
-                <a:spcPts val="1000"/>
-              </a:spcAft>
-            </a:pPr>
-            <a:r>
-              <a:rPr sz="1400" b="1">
-                <a:solidFill>
-                  <a:srgbClr val="2251FF"/>
-                </a:solidFill>
-                <a:latin typeface="Arial"/>
-              </a:rPr>
-              <a:t>3.  </a:t>
-            </a:r>
-            <a:r>
-              <a:rPr sz="1400">
-                <a:solidFill>
-                  <a:srgbClr val="1A1A1A"/>
-                </a:solidFill>
-                <a:latin typeface="Arial"/>
-              </a:rPr>
-              <a:t>Effect estimates are withheld</a:t>
-            </a:r>
-          </a:p>
-        </p:txBody>
-      </p:sp>
-      <p:sp>
-        <p:nvSpPr>
-          <p:cNvPr id="7" name="Rectangle 6"/>
+      <p:sp>
+        <p:nvSpPr>
+          <p:cNvPr id="4" name="Rectangle 3"/>
           <p:cNvSpPr/>
           <p:nvPr/>
         </p:nvSpPr>
         <p:spPr>
           <a:xfrm>
-            <a:off x="502920" y="6327648"/>
-            <a:ext cx="11185855" cy="6350"/>
+            <a:off x="502920" y="1645920"/>
+            <a:ext cx="502920" cy="502920"/>
           </a:xfrm>
           <a:prstGeom prst="rect">
             <a:avLst/>
           </a:prstGeom>
           <a:solidFill>
-            <a:srgbClr val="E3E3E3"/>
+            <a:srgbClr val="0B2545"/>
           </a:solidFill>
           <a:ln>
             <a:noFill/>
@@ -4710,23 +6529,32 @@
           </a:fontRef>
         </p:style>
         <p:txBody>
-          <a:bodyPr rtlCol="0" anchor="ctr"/>
+          <a:bodyPr rtlCol="0" anchor="ctr" wrap="square" lIns="18288" rIns="18288"/>
           <a:lstStyle/>
           <a:p>
             <a:pPr algn="ctr"/>
-          </a:p>
-        </p:txBody>
-      </p:sp>
-      <p:sp>
-        <p:nvSpPr>
-          <p:cNvPr id="8" name="TextBox 7"/>
+            <a:r>
+              <a:rPr sz="1600" b="1">
+                <a:solidFill>
+                  <a:srgbClr val="FFFFFF"/>
+                </a:solidFill>
+                <a:latin typeface="Arial"/>
+              </a:rPr>
+              <a:t>1</a:t>
+            </a:r>
+          </a:p>
+        </p:txBody>
+      </p:sp>
+      <p:sp>
+        <p:nvSpPr>
+          <p:cNvPr id="5" name="TextBox 4"/>
           <p:cNvSpPr txBox="1"/>
           <p:nvPr/>
         </p:nvSpPr>
         <p:spPr>
           <a:xfrm>
-            <a:off x="502920" y="6400800"/>
-            <a:ext cx="9875520" cy="320040"/>
+            <a:off x="1234440" y="1719072"/>
+            <a:ext cx="9144000" cy="411480"/>
           </a:xfrm>
           <a:prstGeom prst="rect">
             <a:avLst/>
@@ -4741,20 +6569,451 @@
           <a:p>
             <a:pPr algn="l"/>
             <a:r>
+              <a:rPr sz="1800" b="0">
+                <a:solidFill>
+                  <a:srgbClr val="1A1A1A"/>
+                </a:solidFill>
+                <a:latin typeface="Arial"/>
+              </a:rPr>
+              <a:t>The ask: what we were asked to answer</a:t>
+            </a:r>
+          </a:p>
+        </p:txBody>
+      </p:sp>
+      <p:sp>
+        <p:nvSpPr>
+          <p:cNvPr id="6" name="Rectangle 5"/>
+          <p:cNvSpPr/>
+          <p:nvPr/>
+        </p:nvSpPr>
+        <p:spPr>
+          <a:xfrm>
+            <a:off x="502920" y="2377440"/>
+            <a:ext cx="502920" cy="502920"/>
+          </a:xfrm>
+          <a:prstGeom prst="rect">
+            <a:avLst/>
+          </a:prstGeom>
+          <a:solidFill>
+            <a:srgbClr val="0B2545"/>
+          </a:solidFill>
+          <a:ln>
+            <a:noFill/>
+          </a:ln>
+          <a:effectLst/>
+        </p:spPr>
+        <p:style>
+          <a:lnRef idx="1">
+            <a:schemeClr val="accent1"/>
+          </a:lnRef>
+          <a:fillRef idx="3">
+            <a:schemeClr val="accent1"/>
+          </a:fillRef>
+          <a:effectRef idx="2">
+            <a:schemeClr val="accent1"/>
+          </a:effectRef>
+          <a:fontRef idx="minor">
+            <a:schemeClr val="lt1"/>
+          </a:fontRef>
+        </p:style>
+        <p:txBody>
+          <a:bodyPr rtlCol="0" anchor="ctr" wrap="square" lIns="18288" rIns="18288"/>
+          <a:lstStyle/>
+          <a:p>
+            <a:pPr algn="ctr"/>
+            <a:r>
+              <a:rPr sz="1600" b="1">
+                <a:solidFill>
+                  <a:srgbClr val="FFFFFF"/>
+                </a:solidFill>
+                <a:latin typeface="Arial"/>
+              </a:rPr>
+              <a:t>2</a:t>
+            </a:r>
+          </a:p>
+        </p:txBody>
+      </p:sp>
+      <p:sp>
+        <p:nvSpPr>
+          <p:cNvPr id="7" name="TextBox 6"/>
+          <p:cNvSpPr txBox="1"/>
+          <p:nvPr/>
+        </p:nvSpPr>
+        <p:spPr>
+          <a:xfrm>
+            <a:off x="1234440" y="2450592"/>
+            <a:ext cx="9144000" cy="411480"/>
+          </a:xfrm>
+          <a:prstGeom prst="rect">
+            <a:avLst/>
+          </a:prstGeom>
+          <a:noFill/>
+        </p:spPr>
+        <p:txBody>
+          <a:bodyPr wrap="square" anchor="t" lIns="18288" rIns="18288" tIns="18288" bIns="18288">
+            <a:spAutoFit/>
+          </a:bodyPr>
+          <a:lstStyle/>
+          <a:p>
+            <a:pPr algn="l"/>
+            <a:r>
+              <a:rPr sz="1800" b="0">
+                <a:solidFill>
+                  <a:srgbClr val="1A1A1A"/>
+                </a:solidFill>
+                <a:latin typeface="Arial"/>
+              </a:rPr>
+              <a:t>Approach: how we answered it</a:t>
+            </a:r>
+          </a:p>
+        </p:txBody>
+      </p:sp>
+      <p:sp>
+        <p:nvSpPr>
+          <p:cNvPr id="8" name="Rectangle 7"/>
+          <p:cNvSpPr/>
+          <p:nvPr/>
+        </p:nvSpPr>
+        <p:spPr>
+          <a:xfrm>
+            <a:off x="502920" y="3108960"/>
+            <a:ext cx="502920" cy="502920"/>
+          </a:xfrm>
+          <a:prstGeom prst="rect">
+            <a:avLst/>
+          </a:prstGeom>
+          <a:solidFill>
+            <a:srgbClr val="0B2545"/>
+          </a:solidFill>
+          <a:ln>
+            <a:noFill/>
+          </a:ln>
+          <a:effectLst/>
+        </p:spPr>
+        <p:style>
+          <a:lnRef idx="1">
+            <a:schemeClr val="accent1"/>
+          </a:lnRef>
+          <a:fillRef idx="3">
+            <a:schemeClr val="accent1"/>
+          </a:fillRef>
+          <a:effectRef idx="2">
+            <a:schemeClr val="accent1"/>
+          </a:effectRef>
+          <a:fontRef idx="minor">
+            <a:schemeClr val="lt1"/>
+          </a:fontRef>
+        </p:style>
+        <p:txBody>
+          <a:bodyPr rtlCol="0" anchor="ctr" wrap="square" lIns="18288" rIns="18288"/>
+          <a:lstStyle/>
+          <a:p>
+            <a:pPr algn="ctr"/>
+            <a:r>
+              <a:rPr sz="1600" b="1">
+                <a:solidFill>
+                  <a:srgbClr val="FFFFFF"/>
+                </a:solidFill>
+                <a:latin typeface="Arial"/>
+              </a:rPr>
+              <a:t>3</a:t>
+            </a:r>
+          </a:p>
+        </p:txBody>
+      </p:sp>
+      <p:sp>
+        <p:nvSpPr>
+          <p:cNvPr id="9" name="TextBox 8"/>
+          <p:cNvSpPr txBox="1"/>
+          <p:nvPr/>
+        </p:nvSpPr>
+        <p:spPr>
+          <a:xfrm>
+            <a:off x="1234440" y="3182112"/>
+            <a:ext cx="9144000" cy="411480"/>
+          </a:xfrm>
+          <a:prstGeom prst="rect">
+            <a:avLst/>
+          </a:prstGeom>
+          <a:noFill/>
+        </p:spPr>
+        <p:txBody>
+          <a:bodyPr wrap="square" anchor="t" lIns="18288" rIns="18288" tIns="18288" bIns="18288">
+            <a:spAutoFit/>
+          </a:bodyPr>
+          <a:lstStyle/>
+          <a:p>
+            <a:pPr algn="l"/>
+            <a:r>
+              <a:rPr sz="1800" b="0">
+                <a:solidFill>
+                  <a:srgbClr val="1A1A1A"/>
+                </a:solidFill>
+                <a:latin typeface="Arial"/>
+              </a:rPr>
+              <a:t>Findings: what the data shows</a:t>
+            </a:r>
+          </a:p>
+        </p:txBody>
+      </p:sp>
+      <p:sp>
+        <p:nvSpPr>
+          <p:cNvPr id="10" name="Rectangle 9"/>
+          <p:cNvSpPr/>
+          <p:nvPr/>
+        </p:nvSpPr>
+        <p:spPr>
+          <a:xfrm>
+            <a:off x="502920" y="3840480"/>
+            <a:ext cx="502920" cy="502920"/>
+          </a:xfrm>
+          <a:prstGeom prst="rect">
+            <a:avLst/>
+          </a:prstGeom>
+          <a:solidFill>
+            <a:srgbClr val="0B2545"/>
+          </a:solidFill>
+          <a:ln>
+            <a:noFill/>
+          </a:ln>
+          <a:effectLst/>
+        </p:spPr>
+        <p:style>
+          <a:lnRef idx="1">
+            <a:schemeClr val="accent1"/>
+          </a:lnRef>
+          <a:fillRef idx="3">
+            <a:schemeClr val="accent1"/>
+          </a:fillRef>
+          <a:effectRef idx="2">
+            <a:schemeClr val="accent1"/>
+          </a:effectRef>
+          <a:fontRef idx="minor">
+            <a:schemeClr val="lt1"/>
+          </a:fontRef>
+        </p:style>
+        <p:txBody>
+          <a:bodyPr rtlCol="0" anchor="ctr" wrap="square" lIns="18288" rIns="18288"/>
+          <a:lstStyle/>
+          <a:p>
+            <a:pPr algn="ctr"/>
+            <a:r>
+              <a:rPr sz="1600" b="1">
+                <a:solidFill>
+                  <a:srgbClr val="FFFFFF"/>
+                </a:solidFill>
+                <a:latin typeface="Arial"/>
+              </a:rPr>
+              <a:t>4</a:t>
+            </a:r>
+          </a:p>
+        </p:txBody>
+      </p:sp>
+      <p:sp>
+        <p:nvSpPr>
+          <p:cNvPr id="11" name="TextBox 10"/>
+          <p:cNvSpPr txBox="1"/>
+          <p:nvPr/>
+        </p:nvSpPr>
+        <p:spPr>
+          <a:xfrm>
+            <a:off x="1234440" y="3913632"/>
+            <a:ext cx="9144000" cy="411480"/>
+          </a:xfrm>
+          <a:prstGeom prst="rect">
+            <a:avLst/>
+          </a:prstGeom>
+          <a:noFill/>
+        </p:spPr>
+        <p:txBody>
+          <a:bodyPr wrap="square" anchor="t" lIns="18288" rIns="18288" tIns="18288" bIns="18288">
+            <a:spAutoFit/>
+          </a:bodyPr>
+          <a:lstStyle/>
+          <a:p>
+            <a:pPr algn="l"/>
+            <a:r>
+              <a:rPr sz="1800" b="0">
+                <a:solidFill>
+                  <a:srgbClr val="1A1A1A"/>
+                </a:solidFill>
+                <a:latin typeface="Arial"/>
+              </a:rPr>
+              <a:t>Impact: what it means for the business</a:t>
+            </a:r>
+          </a:p>
+        </p:txBody>
+      </p:sp>
+      <p:sp>
+        <p:nvSpPr>
+          <p:cNvPr id="12" name="Rectangle 11"/>
+          <p:cNvSpPr/>
+          <p:nvPr/>
+        </p:nvSpPr>
+        <p:spPr>
+          <a:xfrm>
+            <a:off x="502920" y="4572000"/>
+            <a:ext cx="502920" cy="502920"/>
+          </a:xfrm>
+          <a:prstGeom prst="rect">
+            <a:avLst/>
+          </a:prstGeom>
+          <a:solidFill>
+            <a:srgbClr val="0B2545"/>
+          </a:solidFill>
+          <a:ln>
+            <a:noFill/>
+          </a:ln>
+          <a:effectLst/>
+        </p:spPr>
+        <p:style>
+          <a:lnRef idx="1">
+            <a:schemeClr val="accent1"/>
+          </a:lnRef>
+          <a:fillRef idx="3">
+            <a:schemeClr val="accent1"/>
+          </a:fillRef>
+          <a:effectRef idx="2">
+            <a:schemeClr val="accent1"/>
+          </a:effectRef>
+          <a:fontRef idx="minor">
+            <a:schemeClr val="lt1"/>
+          </a:fontRef>
+        </p:style>
+        <p:txBody>
+          <a:bodyPr rtlCol="0" anchor="ctr" wrap="square" lIns="18288" rIns="18288"/>
+          <a:lstStyle/>
+          <a:p>
+            <a:pPr algn="ctr"/>
+            <a:r>
+              <a:rPr sz="1600" b="1">
+                <a:solidFill>
+                  <a:srgbClr val="FFFFFF"/>
+                </a:solidFill>
+                <a:latin typeface="Arial"/>
+              </a:rPr>
+              <a:t>5</a:t>
+            </a:r>
+          </a:p>
+        </p:txBody>
+      </p:sp>
+      <p:sp>
+        <p:nvSpPr>
+          <p:cNvPr id="13" name="TextBox 12"/>
+          <p:cNvSpPr txBox="1"/>
+          <p:nvPr/>
+        </p:nvSpPr>
+        <p:spPr>
+          <a:xfrm>
+            <a:off x="1234440" y="4645152"/>
+            <a:ext cx="9144000" cy="411480"/>
+          </a:xfrm>
+          <a:prstGeom prst="rect">
+            <a:avLst/>
+          </a:prstGeom>
+          <a:noFill/>
+        </p:spPr>
+        <p:txBody>
+          <a:bodyPr wrap="square" anchor="t" lIns="18288" rIns="18288" tIns="18288" bIns="18288">
+            <a:spAutoFit/>
+          </a:bodyPr>
+          <a:lstStyle/>
+          <a:p>
+            <a:pPr algn="l"/>
+            <a:r>
+              <a:rPr sz="1800" b="0">
+                <a:solidFill>
+                  <a:srgbClr val="1A1A1A"/>
+                </a:solidFill>
+                <a:latin typeface="Arial"/>
+              </a:rPr>
+              <a:t>Recommendation: risks, decision and next steps</a:t>
+            </a:r>
+          </a:p>
+        </p:txBody>
+      </p:sp>
+      <p:sp>
+        <p:nvSpPr>
+          <p:cNvPr id="14" name="Rectangle 13"/>
+          <p:cNvSpPr/>
+          <p:nvPr/>
+        </p:nvSpPr>
+        <p:spPr>
+          <a:xfrm>
+            <a:off x="502920" y="6327648"/>
+            <a:ext cx="11185855" cy="6350"/>
+          </a:xfrm>
+          <a:prstGeom prst="rect">
+            <a:avLst/>
+          </a:prstGeom>
+          <a:solidFill>
+            <a:srgbClr val="E3E3E3"/>
+          </a:solidFill>
+          <a:ln>
+            <a:noFill/>
+          </a:ln>
+          <a:effectLst/>
+        </p:spPr>
+        <p:style>
+          <a:lnRef idx="1">
+            <a:schemeClr val="accent1"/>
+          </a:lnRef>
+          <a:fillRef idx="3">
+            <a:schemeClr val="accent1"/>
+          </a:fillRef>
+          <a:effectRef idx="2">
+            <a:schemeClr val="accent1"/>
+          </a:effectRef>
+          <a:fontRef idx="minor">
+            <a:schemeClr val="lt1"/>
+          </a:fontRef>
+        </p:style>
+        <p:txBody>
+          <a:bodyPr rtlCol="0" anchor="ctr"/>
+          <a:lstStyle/>
+          <a:p>
+            <a:pPr algn="ctr"/>
+          </a:p>
+        </p:txBody>
+      </p:sp>
+      <p:sp>
+        <p:nvSpPr>
+          <p:cNvPr id="15" name="TextBox 14"/>
+          <p:cNvSpPr txBox="1"/>
+          <p:nvPr/>
+        </p:nvSpPr>
+        <p:spPr>
+          <a:xfrm>
+            <a:off x="502920" y="6400800"/>
+            <a:ext cx="9875520" cy="320040"/>
+          </a:xfrm>
+          <a:prstGeom prst="rect">
+            <a:avLst/>
+          </a:prstGeom>
+          <a:noFill/>
+        </p:spPr>
+        <p:txBody>
+          <a:bodyPr wrap="square" anchor="t" lIns="18288" rIns="18288" tIns="18288" bIns="18288">
+            <a:spAutoFit/>
+          </a:bodyPr>
+          <a:lstStyle/>
+          <a:p>
+            <a:pPr algn="l"/>
+            <a:r>
               <a:rPr sz="900" b="0">
                 <a:solidFill>
                   <a:srgbClr val="8C8C8C"/>
                 </a:solidFill>
                 <a:latin typeface="Arial"/>
               </a:rPr>
-              <a:t>Source: srm_broken.csv, 2026-09-01 to 2026-09-14; chi-square goodness-of-fit vs intended 50/50</a:t>
-            </a:r>
-          </a:p>
-        </p:txBody>
-      </p:sp>
-      <p:sp>
-        <p:nvSpPr>
-          <p:cNvPr id="9" name="TextBox 8"/>
+              <a:t>Source: srm_broken.csv, 2026-09-01 to 2026-09-14; run 2026-10-01_onboarding-checklist</a:t>
+            </a:r>
+          </a:p>
+        </p:txBody>
+      </p:sp>
+      <p:sp>
+        <p:nvSpPr>
+          <p:cNvPr id="16" name="TextBox 15"/>
           <p:cNvSpPr txBox="1"/>
           <p:nvPr/>
         </p:nvSpPr>
@@ -4813,7 +7072,77 @@
         </p:nvSpPr>
         <p:spPr>
           <a:xfrm>
-            <a:off x="502920" y="320040"/>
+            <a:off x="502920" y="109728"/>
+            <a:ext cx="11185855" cy="256032"/>
+          </a:xfrm>
+          <a:prstGeom prst="rect">
+            <a:avLst/>
+          </a:prstGeom>
+          <a:noFill/>
+        </p:spPr>
+        <p:txBody>
+          <a:bodyPr wrap="none" lIns="0" rIns="0" tIns="0" bIns="0">
+            <a:spAutoFit/>
+          </a:bodyPr>
+          <a:lstStyle/>
+          <a:p>
+            <a:r>
+              <a:rPr sz="900" b="1">
+                <a:solidFill>
+                  <a:srgbClr val="2251FF"/>
+                </a:solidFill>
+                <a:latin typeface="Arial"/>
+              </a:rPr>
+              <a:t>1  THE ASK      </a:t>
+            </a:r>
+            <a:r>
+              <a:rPr sz="900" b="0">
+                <a:solidFill>
+                  <a:srgbClr val="8C8C8C"/>
+                </a:solidFill>
+                <a:latin typeface="Arial"/>
+              </a:rPr>
+              <a:t>2  APPROACH      </a:t>
+            </a:r>
+            <a:r>
+              <a:rPr sz="900" b="0">
+                <a:solidFill>
+                  <a:srgbClr val="8C8C8C"/>
+                </a:solidFill>
+                <a:latin typeface="Arial"/>
+              </a:rPr>
+              <a:t>3  FINDINGS      </a:t>
+            </a:r>
+            <a:r>
+              <a:rPr sz="900" b="0">
+                <a:solidFill>
+                  <a:srgbClr val="8C8C8C"/>
+                </a:solidFill>
+                <a:latin typeface="Arial"/>
+              </a:rPr>
+              <a:t>4  IMPACT      </a:t>
+            </a:r>
+            <a:r>
+              <a:rPr sz="900" b="0">
+                <a:solidFill>
+                  <a:srgbClr val="8C8C8C"/>
+                </a:solidFill>
+                <a:latin typeface="Arial"/>
+              </a:rPr>
+              <a:t>5  RECOMMENDATION</a:t>
+            </a:r>
+          </a:p>
+        </p:txBody>
+      </p:sp>
+      <p:sp>
+        <p:nvSpPr>
+          <p:cNvPr id="3" name="TextBox 2"/>
+          <p:cNvSpPr txBox="1"/>
+          <p:nvPr/>
+        </p:nvSpPr>
+        <p:spPr>
+          <a:xfrm>
+            <a:off x="502920" y="384048"/>
             <a:ext cx="11185855" cy="868680"/>
           </a:xfrm>
           <a:prstGeom prst="rect">
@@ -4835,20 +7164,20 @@
                 </a:solidFill>
                 <a:latin typeface="Arial"/>
               </a:rPr>
-              <a:t>The loss is on Android: treatment has 37.4% of Android users; iOS and Web are balanced</a:t>
-            </a:r>
-          </a:p>
-        </p:txBody>
-      </p:sp>
-      <p:sp>
-        <p:nvSpPr>
-          <p:cNvPr id="3" name="Rectangle 2"/>
+              <a:t>The ask: Does the new onboarding checklist increase 7-day activation?</a:t>
+            </a:r>
+          </a:p>
+        </p:txBody>
+      </p:sp>
+      <p:sp>
+        <p:nvSpPr>
+          <p:cNvPr id="4" name="Rectangle 3"/>
           <p:cNvSpPr/>
           <p:nvPr/>
         </p:nvSpPr>
         <p:spPr>
           <a:xfrm>
-            <a:off x="502920" y="1170432"/>
+            <a:off x="502920" y="1216152"/>
             <a:ext cx="822960" cy="38100"/>
           </a:xfrm>
           <a:prstGeom prst="rect">
@@ -4884,185 +7213,9 @@
           </a:p>
         </p:txBody>
       </p:sp>
-      <p:pic>
-        <p:nvPicPr>
-          <p:cNvPr id="4" name="Picture 3" descr="srm_bar_android.png"/>
-          <p:cNvPicPr>
-            <a:picLocks noChangeAspect="1"/>
-          </p:cNvPicPr>
-          <p:nvPr/>
-        </p:nvPicPr>
-        <p:blipFill>
-          <a:blip r:embed="rId2"/>
-          <a:srcRect t="11100"/>
-          <a:stretch>
-            <a:fillRect/>
-          </a:stretch>
-        </p:blipFill>
-        <p:spPr>
-          <a:xfrm>
-            <a:off x="502920" y="1417320"/>
-            <a:ext cx="7589520" cy="3795234"/>
-          </a:xfrm>
-          <a:prstGeom prst="rect">
-            <a:avLst/>
-          </a:prstGeom>
-        </p:spPr>
-      </p:pic>
-      <p:sp>
-        <p:nvSpPr>
-          <p:cNvPr id="5" name="TextBox 4"/>
-          <p:cNvSpPr txBox="1"/>
-          <p:nvPr/>
-        </p:nvSpPr>
-        <p:spPr>
-          <a:xfrm>
-            <a:off x="8412480" y="1463040"/>
-            <a:ext cx="3276295" cy="365760"/>
-          </a:xfrm>
-          <a:prstGeom prst="rect">
-            <a:avLst/>
-          </a:prstGeom>
-          <a:noFill/>
-        </p:spPr>
-        <p:txBody>
-          <a:bodyPr wrap="square" anchor="t" lIns="18288" rIns="18288" tIns="18288" bIns="18288">
-            <a:spAutoFit/>
-          </a:bodyPr>
-          <a:lstStyle/>
-          <a:p>
-            <a:pPr algn="l"/>
-            <a:r>
-              <a:rPr sz="1100" b="1">
-                <a:solidFill>
-                  <a:srgbClr val="8C8C8C"/>
-                </a:solidFill>
-                <a:latin typeface="Arial"/>
-              </a:rPr>
-              <a:t>KEY TAKEAWAYS</a:t>
-            </a:r>
-          </a:p>
-        </p:txBody>
-      </p:sp>
-      <p:sp>
-        <p:nvSpPr>
-          <p:cNvPr id="6" name="TextBox 5"/>
-          <p:cNvSpPr txBox="1"/>
-          <p:nvPr/>
-        </p:nvSpPr>
-        <p:spPr>
-          <a:xfrm>
-            <a:off x="8412480" y="1874520"/>
-            <a:ext cx="3276295" cy="4114800"/>
-          </a:xfrm>
-          <a:prstGeom prst="rect">
-            <a:avLst/>
-          </a:prstGeom>
-          <a:noFill/>
-        </p:spPr>
-        <p:txBody>
-          <a:bodyPr wrap="square">
-            <a:spAutoFit/>
-          </a:bodyPr>
-          <a:lstStyle/>
-          <a:p>
-            <a:pPr>
-              <a:spcAft>
-                <a:spcPts val="1000"/>
-              </a:spcAft>
-            </a:pPr>
-            <a:r>
-              <a:rPr sz="1400" b="1">
-                <a:solidFill>
-                  <a:srgbClr val="2251FF"/>
-                </a:solidFill>
-                <a:latin typeface="Arial"/>
-              </a:rPr>
-              <a:t>1.  </a:t>
-            </a:r>
-            <a:r>
-              <a:rPr sz="1400" b="1">
-                <a:solidFill>
-                  <a:srgbClr val="1A1A1A"/>
-                </a:solidFill>
-                <a:latin typeface="Arial"/>
-              </a:rPr>
-              <a:t>Android: </a:t>
-            </a:r>
-            <a:r>
-              <a:rPr sz="1400">
-                <a:solidFill>
-                  <a:srgbClr val="1A1A1A"/>
-                </a:solidFill>
-                <a:latin typeface="Arial"/>
-              </a:rPr>
-              <a:t>p &lt; 0.001</a:t>
-            </a:r>
-          </a:p>
-          <a:p>
-            <a:pPr>
-              <a:spcAft>
-                <a:spcPts val="1000"/>
-              </a:spcAft>
-            </a:pPr>
-            <a:r>
-              <a:rPr sz="1400" b="1">
-                <a:solidFill>
-                  <a:srgbClr val="2251FF"/>
-                </a:solidFill>
-                <a:latin typeface="Arial"/>
-              </a:rPr>
-              <a:t>2.  </a:t>
-            </a:r>
-            <a:r>
-              <a:rPr sz="1400" b="1">
-                <a:solidFill>
-                  <a:srgbClr val="1A1A1A"/>
-                </a:solidFill>
-                <a:latin typeface="Arial"/>
-              </a:rPr>
-              <a:t>iOS + Web: </a:t>
-            </a:r>
-            <a:r>
-              <a:rPr sz="1400">
-                <a:solidFill>
-                  <a:srgbClr val="1A1A1A"/>
-                </a:solidFill>
-                <a:latin typeface="Arial"/>
-              </a:rPr>
-              <a:t>p = 0.323</a:t>
-            </a:r>
-          </a:p>
-          <a:p>
-            <a:pPr>
-              <a:spcAft>
-                <a:spcPts val="1000"/>
-              </a:spcAft>
-            </a:pPr>
-            <a:r>
-              <a:rPr sz="1400" b="1">
-                <a:solidFill>
-                  <a:srgbClr val="2251FF"/>
-                </a:solidFill>
-                <a:latin typeface="Arial"/>
-              </a:rPr>
-              <a:t>3.  </a:t>
-            </a:r>
-            <a:r>
-              <a:rPr sz="1400">
-                <a:solidFill>
-                  <a:srgbClr val="1A1A1A"/>
-                </a:solidFill>
-                <a:latin typeface="Arial"/>
-              </a:rPr>
-              <a:t>About 3,085 Android treatment users missing since 5 Sep</a:t>
-            </a:r>
-          </a:p>
-        </p:txBody>
-      </p:sp>
-      <p:sp>
-        <p:nvSpPr>
-          <p:cNvPr id="7" name="Rectangle 6"/>
+      <p:sp>
+        <p:nvSpPr>
+          <p:cNvPr id="5" name="Rectangle 4"/>
           <p:cNvSpPr/>
           <p:nvPr/>
         </p:nvSpPr>
@@ -5106,7 +7259,7 @@
       </p:sp>
       <p:sp>
         <p:nvSpPr>
-          <p:cNvPr id="8" name="TextBox 7"/>
+          <p:cNvPr id="6" name="TextBox 5"/>
           <p:cNvSpPr txBox="1"/>
           <p:nvPr/>
         </p:nvSpPr>
@@ -5134,14 +7287,14 @@
                 </a:solidFill>
                 <a:latin typeface="Arial"/>
               </a:rPr>
-              <a:t>Source: srm_broken.csv, 2026-09-01 to 2026-09-14; chi-square goodness-of-fit vs intended 50/50</a:t>
-            </a:r>
-          </a:p>
-        </p:txBody>
-      </p:sp>
-      <p:sp>
-        <p:nvSpPr>
-          <p:cNvPr id="9" name="TextBox 8"/>
+              <a:t>Source: srm_broken.csv, 2026-09-01 to 2026-09-14; run 2026-10-01_onboarding-checklist</a:t>
+            </a:r>
+          </a:p>
+        </p:txBody>
+      </p:sp>
+      <p:sp>
+        <p:nvSpPr>
+          <p:cNvPr id="7" name="TextBox 6"/>
           <p:cNvSpPr txBox="1"/>
           <p:nvPr/>
         </p:nvSpPr>
@@ -5174,6 +7327,553 @@
           </a:p>
         </p:txBody>
       </p:sp>
+      <p:sp>
+        <p:nvSpPr>
+          <p:cNvPr id="8" name="TextBox 7"/>
+          <p:cNvSpPr txBox="1"/>
+          <p:nvPr/>
+        </p:nvSpPr>
+        <p:spPr>
+          <a:xfrm>
+            <a:off x="502920" y="1508760"/>
+            <a:ext cx="5394960" cy="274320"/>
+          </a:xfrm>
+          <a:prstGeom prst="rect">
+            <a:avLst/>
+          </a:prstGeom>
+          <a:noFill/>
+        </p:spPr>
+        <p:txBody>
+          <a:bodyPr wrap="square" anchor="t" lIns="18288" rIns="18288" tIns="18288" bIns="18288">
+            <a:spAutoFit/>
+          </a:bodyPr>
+          <a:lstStyle/>
+          <a:p>
+            <a:pPr algn="l"/>
+            <a:r>
+              <a:rPr sz="1100" b="1">
+                <a:solidFill>
+                  <a:srgbClr val="0B2545"/>
+                </a:solidFill>
+                <a:latin typeface="Arial"/>
+              </a:rPr>
+              <a:t>THE DECISION</a:t>
+            </a:r>
+          </a:p>
+        </p:txBody>
+      </p:sp>
+      <p:sp>
+        <p:nvSpPr>
+          <p:cNvPr id="9" name="TextBox 8"/>
+          <p:cNvSpPr txBox="1"/>
+          <p:nvPr/>
+        </p:nvSpPr>
+        <p:spPr>
+          <a:xfrm>
+            <a:off x="502920" y="1783080"/>
+            <a:ext cx="5394960" cy="822960"/>
+          </a:xfrm>
+          <a:prstGeom prst="rect">
+            <a:avLst/>
+          </a:prstGeom>
+          <a:noFill/>
+        </p:spPr>
+        <p:txBody>
+          <a:bodyPr wrap="square" anchor="t" lIns="18288" rIns="18288" tIns="18288" bIns="18288">
+            <a:spAutoFit/>
+          </a:bodyPr>
+          <a:lstStyle/>
+          <a:p>
+            <a:pPr algn="l"/>
+            <a:r>
+              <a:rPr sz="1400" b="0">
+                <a:solidFill>
+                  <a:srgbClr val="1A1A1A"/>
+                </a:solidFill>
+                <a:latin typeface="Arial"/>
+              </a:rPr>
+              <a:t>Ship / don't ship the checklist.</a:t>
+            </a:r>
+          </a:p>
+        </p:txBody>
+      </p:sp>
+      <p:sp>
+        <p:nvSpPr>
+          <p:cNvPr id="10" name="TextBox 9"/>
+          <p:cNvSpPr txBox="1"/>
+          <p:nvPr/>
+        </p:nvSpPr>
+        <p:spPr>
+          <a:xfrm>
+            <a:off x="502920" y="2697480"/>
+            <a:ext cx="5394960" cy="274320"/>
+          </a:xfrm>
+          <a:prstGeom prst="rect">
+            <a:avLst/>
+          </a:prstGeom>
+          <a:noFill/>
+        </p:spPr>
+        <p:txBody>
+          <a:bodyPr wrap="square" anchor="t" lIns="18288" rIns="18288" tIns="18288" bIns="18288">
+            <a:spAutoFit/>
+          </a:bodyPr>
+          <a:lstStyle/>
+          <a:p>
+            <a:pPr algn="l"/>
+            <a:r>
+              <a:rPr sz="1100" b="1">
+                <a:solidFill>
+                  <a:srgbClr val="0B2545"/>
+                </a:solidFill>
+                <a:latin typeface="Arial"/>
+              </a:rPr>
+              <a:t>OUR HYPOTHESIS</a:t>
+            </a:r>
+          </a:p>
+        </p:txBody>
+      </p:sp>
+      <p:sp>
+        <p:nvSpPr>
+          <p:cNvPr id="11" name="TextBox 10"/>
+          <p:cNvSpPr txBox="1"/>
+          <p:nvPr/>
+        </p:nvSpPr>
+        <p:spPr>
+          <a:xfrm>
+            <a:off x="502920" y="2971800"/>
+            <a:ext cx="5394960" cy="822960"/>
+          </a:xfrm>
+          <a:prstGeom prst="rect">
+            <a:avLst/>
+          </a:prstGeom>
+          <a:noFill/>
+        </p:spPr>
+        <p:txBody>
+          <a:bodyPr wrap="square" anchor="t" lIns="18288" rIns="18288" tIns="18288" bIns="18288">
+            <a:spAutoFit/>
+          </a:bodyPr>
+          <a:lstStyle/>
+          <a:p>
+            <a:pPr algn="l"/>
+            <a:r>
+              <a:rPr sz="1400" b="0">
+                <a:solidFill>
+                  <a:srgbClr val="1A1A1A"/>
+                </a:solidFill>
+                <a:latin typeface="Arial"/>
+              </a:rPr>
+              <a:t>Showing a checklist during onboarding raises the share of new users who activate within 7 days.</a:t>
+            </a:r>
+          </a:p>
+        </p:txBody>
+      </p:sp>
+      <p:sp>
+        <p:nvSpPr>
+          <p:cNvPr id="12" name="TextBox 11"/>
+          <p:cNvSpPr txBox="1"/>
+          <p:nvPr/>
+        </p:nvSpPr>
+        <p:spPr>
+          <a:xfrm>
+            <a:off x="502920" y="3886200"/>
+            <a:ext cx="5394960" cy="274320"/>
+          </a:xfrm>
+          <a:prstGeom prst="rect">
+            <a:avLst/>
+          </a:prstGeom>
+          <a:noFill/>
+        </p:spPr>
+        <p:txBody>
+          <a:bodyPr wrap="square" anchor="t" lIns="18288" rIns="18288" tIns="18288" bIns="18288">
+            <a:spAutoFit/>
+          </a:bodyPr>
+          <a:lstStyle/>
+          <a:p>
+            <a:pPr algn="l"/>
+            <a:r>
+              <a:rPr sz="1100" b="1">
+                <a:solidFill>
+                  <a:srgbClr val="0B2545"/>
+                </a:solidFill>
+                <a:latin typeface="Arial"/>
+              </a:rPr>
+              <a:t>WHAT SUCCESS LOOKS LIKE</a:t>
+            </a:r>
+          </a:p>
+        </p:txBody>
+      </p:sp>
+      <p:sp>
+        <p:nvSpPr>
+          <p:cNvPr id="13" name="TextBox 12"/>
+          <p:cNvSpPr txBox="1"/>
+          <p:nvPr/>
+        </p:nvSpPr>
+        <p:spPr>
+          <a:xfrm>
+            <a:off x="502920" y="4160520"/>
+            <a:ext cx="5394960" cy="822960"/>
+          </a:xfrm>
+          <a:prstGeom prst="rect">
+            <a:avLst/>
+          </a:prstGeom>
+          <a:noFill/>
+        </p:spPr>
+        <p:txBody>
+          <a:bodyPr wrap="square" anchor="t" lIns="18288" rIns="18288" tIns="18288" bIns="18288">
+            <a:spAutoFit/>
+          </a:bodyPr>
+          <a:lstStyle/>
+          <a:p>
+            <a:pPr algn="l"/>
+            <a:r>
+              <a:rPr sz="1400" b="0">
+                <a:solidFill>
+                  <a:srgbClr val="1A1A1A"/>
+                </a:solidFill>
+                <a:latin typeface="Arial"/>
+              </a:rPr>
+              <a:t>7-day activation must rise by at least 3% (relative).</a:t>
+            </a:r>
+          </a:p>
+        </p:txBody>
+      </p:sp>
+      <p:sp>
+        <p:nvSpPr>
+          <p:cNvPr id="14" name="TextBox 13"/>
+          <p:cNvSpPr txBox="1"/>
+          <p:nvPr/>
+        </p:nvSpPr>
+        <p:spPr>
+          <a:xfrm>
+            <a:off x="6446520" y="1508760"/>
+            <a:ext cx="5242255" cy="274320"/>
+          </a:xfrm>
+          <a:prstGeom prst="rect">
+            <a:avLst/>
+          </a:prstGeom>
+          <a:noFill/>
+        </p:spPr>
+        <p:txBody>
+          <a:bodyPr wrap="square" anchor="t" lIns="18288" rIns="18288" tIns="18288" bIns="18288">
+            <a:spAutoFit/>
+          </a:bodyPr>
+          <a:lstStyle/>
+          <a:p>
+            <a:pPr algn="l"/>
+            <a:r>
+              <a:rPr sz="1100" b="1">
+                <a:solidFill>
+                  <a:srgbClr val="0B2545"/>
+                </a:solidFill>
+                <a:latin typeface="Arial"/>
+              </a:rPr>
+              <a:t>WHAT WAS TESTED</a:t>
+            </a:r>
+          </a:p>
+        </p:txBody>
+      </p:sp>
+      <p:graphicFrame>
+        <p:nvGraphicFramePr>
+          <p:cNvPr id="15" name="Table 14"/>
+          <p:cNvGraphicFramePr>
+            <a:graphicFrameLocks noGrp="1"/>
+          </p:cNvGraphicFramePr>
+          <p:nvPr/>
+        </p:nvGraphicFramePr>
+        <p:xfrm>
+          <a:off x="6446520" y="1828800"/>
+          <a:ext cx="5242255" cy="2304288"/>
+        </p:xfrm>
+        <a:graphic>
+          <a:graphicData uri="http://schemas.openxmlformats.org/drawingml/2006/table">
+            <a:tbl>
+              <a:tblPr firstRow="1" bandRow="1">
+                <a:tableStyleId>{5C22544A-7EE6-4342-B048-85BDC9FD1C3A}</a:tableStyleId>
+              </a:tblPr>
+              <a:tblGrid>
+                <a:gridCol w="1887211"/>
+                <a:gridCol w="3355044"/>
+              </a:tblGrid>
+              <a:tr h="384048">
+                <a:tc>
+                  <a:txBody>
+                    <a:bodyPr/>
+                    <a:lstStyle/>
+                    <a:p>
+                      <a:r>
+                        <a:rPr sz="1200" b="1">
+                          <a:solidFill>
+                            <a:srgbClr val="0B2545"/>
+                          </a:solidFill>
+                          <a:latin typeface="Arial"/>
+                        </a:rPr>
+                        <a:t>Groups</a:t>
+                      </a:r>
+                    </a:p>
+                  </a:txBody>
+                  <a:tcPr marL="91440" anchor="ctr">
+                    <a:solidFill>
+                      <a:srgbClr val="E3E3E3"/>
+                    </a:solidFill>
+                  </a:tcPr>
+                </a:tc>
+                <a:tc>
+                  <a:txBody>
+                    <a:bodyPr/>
+                    <a:lstStyle/>
+                    <a:p>
+                      <a:r>
+                        <a:rPr sz="1200" b="0">
+                          <a:solidFill>
+                            <a:srgbClr val="1A1A1A"/>
+                          </a:solidFill>
+                          <a:latin typeface="Arial"/>
+                        </a:rPr>
+                        <a:t>control: 20,838, treatment: 18,073</a:t>
+                      </a:r>
+                    </a:p>
+                  </a:txBody>
+                  <a:tcPr marL="91440" anchor="ctr">
+                    <a:solidFill>
+                      <a:srgbClr val="E3E3E3"/>
+                    </a:solidFill>
+                  </a:tcPr>
+                </a:tc>
+              </a:tr>
+              <a:tr h="384048">
+                <a:tc>
+                  <a:txBody>
+                    <a:bodyPr/>
+                    <a:lstStyle/>
+                    <a:p>
+                      <a:r>
+                        <a:rPr sz="1200" b="1">
+                          <a:solidFill>
+                            <a:srgbClr val="0B2545"/>
+                          </a:solidFill>
+                          <a:latin typeface="Arial"/>
+                        </a:rPr>
+                        <a:t>Unit</a:t>
+                      </a:r>
+                    </a:p>
+                  </a:txBody>
+                  <a:tcPr marL="91440" anchor="ctr">
+                    <a:solidFill>
+                      <a:srgbClr val="FFFFFF"/>
+                    </a:solidFill>
+                  </a:tcPr>
+                </a:tc>
+                <a:tc>
+                  <a:txBody>
+                    <a:bodyPr/>
+                    <a:lstStyle/>
+                    <a:p>
+                      <a:r>
+                        <a:rPr sz="1200" b="0">
+                          <a:solidFill>
+                            <a:srgbClr val="1A1A1A"/>
+                          </a:solidFill>
+                          <a:latin typeface="Arial"/>
+                        </a:rPr>
+                        <a:t>users</a:t>
+                      </a:r>
+                    </a:p>
+                  </a:txBody>
+                  <a:tcPr marL="91440" anchor="ctr">
+                    <a:solidFill>
+                      <a:srgbClr val="FFFFFF"/>
+                    </a:solidFill>
+                  </a:tcPr>
+                </a:tc>
+              </a:tr>
+              <a:tr h="384048">
+                <a:tc>
+                  <a:txBody>
+                    <a:bodyPr/>
+                    <a:lstStyle/>
+                    <a:p>
+                      <a:r>
+                        <a:rPr sz="1200" b="1">
+                          <a:solidFill>
+                            <a:srgbClr val="0B2545"/>
+                          </a:solidFill>
+                          <a:latin typeface="Arial"/>
+                        </a:rPr>
+                        <a:t>Period</a:t>
+                      </a:r>
+                    </a:p>
+                  </a:txBody>
+                  <a:tcPr marL="91440" anchor="ctr">
+                    <a:solidFill>
+                      <a:srgbClr val="E3E3E3"/>
+                    </a:solidFill>
+                  </a:tcPr>
+                </a:tc>
+                <a:tc>
+                  <a:txBody>
+                    <a:bodyPr/>
+                    <a:lstStyle/>
+                    <a:p>
+                      <a:r>
+                        <a:rPr sz="1200" b="0">
+                          <a:solidFill>
+                            <a:srgbClr val="1A1A1A"/>
+                          </a:solidFill>
+                          <a:latin typeface="Arial"/>
+                        </a:rPr>
+                        <a:t>2026-09-01 to 2026-09-14</a:t>
+                      </a:r>
+                    </a:p>
+                  </a:txBody>
+                  <a:tcPr marL="91440" anchor="ctr">
+                    <a:solidFill>
+                      <a:srgbClr val="E3E3E3"/>
+                    </a:solidFill>
+                  </a:tcPr>
+                </a:tc>
+              </a:tr>
+              <a:tr h="384048">
+                <a:tc>
+                  <a:txBody>
+                    <a:bodyPr/>
+                    <a:lstStyle/>
+                    <a:p>
+                      <a:r>
+                        <a:rPr sz="1200" b="1">
+                          <a:solidFill>
+                            <a:srgbClr val="0B2545"/>
+                          </a:solidFill>
+                          <a:latin typeface="Arial"/>
+                        </a:rPr>
+                        <a:t>Primary metric</a:t>
+                      </a:r>
+                    </a:p>
+                  </a:txBody>
+                  <a:tcPr marL="91440" anchor="ctr">
+                    <a:solidFill>
+                      <a:srgbClr val="FFFFFF"/>
+                    </a:solidFill>
+                  </a:tcPr>
+                </a:tc>
+                <a:tc>
+                  <a:txBody>
+                    <a:bodyPr/>
+                    <a:lstStyle/>
+                    <a:p>
+                      <a:r>
+                        <a:rPr sz="1200" b="0">
+                          <a:solidFill>
+                            <a:srgbClr val="1A1A1A"/>
+                          </a:solidFill>
+                          <a:latin typeface="Arial"/>
+                        </a:rPr>
+                        <a:t>7-day activation</a:t>
+                      </a:r>
+                    </a:p>
+                  </a:txBody>
+                  <a:tcPr marL="91440" anchor="ctr">
+                    <a:solidFill>
+                      <a:srgbClr val="FFFFFF"/>
+                    </a:solidFill>
+                  </a:tcPr>
+                </a:tc>
+              </a:tr>
+              <a:tr h="384048">
+                <a:tc>
+                  <a:txBody>
+                    <a:bodyPr/>
+                    <a:lstStyle/>
+                    <a:p>
+                      <a:r>
+                        <a:rPr sz="1200" b="1">
+                          <a:solidFill>
+                            <a:srgbClr val="0B2545"/>
+                          </a:solidFill>
+                          <a:latin typeface="Arial"/>
+                        </a:rPr>
+                        <a:t>Guardrails</a:t>
+                      </a:r>
+                    </a:p>
+                  </a:txBody>
+                  <a:tcPr marL="91440" anchor="ctr">
+                    <a:solidFill>
+                      <a:srgbClr val="E3E3E3"/>
+                    </a:solidFill>
+                  </a:tcPr>
+                </a:tc>
+                <a:tc>
+                  <a:txBody>
+                    <a:bodyPr/>
+                    <a:lstStyle/>
+                    <a:p>
+                      <a:r>
+                        <a:rPr sz="1200" b="0">
+                          <a:solidFill>
+                            <a:srgbClr val="1A1A1A"/>
+                          </a:solidFill>
+                          <a:latin typeface="Arial"/>
+                        </a:rPr>
+                        <a:t>none defined</a:t>
+                      </a:r>
+                    </a:p>
+                  </a:txBody>
+                  <a:tcPr marL="91440" anchor="ctr">
+                    <a:solidFill>
+                      <a:srgbClr val="E3E3E3"/>
+                    </a:solidFill>
+                  </a:tcPr>
+                </a:tc>
+              </a:tr>
+              <a:tr h="384048">
+                <a:tc>
+                  <a:txBody>
+                    <a:bodyPr/>
+                    <a:lstStyle/>
+                    <a:p>
+                      <a:r>
+                        <a:rPr sz="1200" b="1">
+                          <a:solidFill>
+                            <a:srgbClr val="0B2545"/>
+                          </a:solidFill>
+                          <a:latin typeface="Arial"/>
+                        </a:rPr>
+                        <a:t>Practical threshold</a:t>
+                      </a:r>
+                    </a:p>
+                  </a:txBody>
+                  <a:tcPr marL="91440" anchor="ctr">
+                    <a:solidFill>
+                      <a:srgbClr val="FFFFFF"/>
+                    </a:solidFill>
+                  </a:tcPr>
+                </a:tc>
+                <a:tc>
+                  <a:txBody>
+                    <a:bodyPr/>
+                    <a:lstStyle/>
+                    <a:p>
+                      <a:r>
+                        <a:rPr sz="1200" b="0">
+                          <a:solidFill>
+                            <a:srgbClr val="1A1A1A"/>
+                          </a:solidFill>
+                          <a:latin typeface="Arial"/>
+                        </a:rPr>
+                        <a:t>+3% relative</a:t>
+                      </a:r>
+                    </a:p>
+                  </a:txBody>
+                  <a:tcPr marL="91440" anchor="ctr">
+                    <a:solidFill>
+                      <a:srgbClr val="FFFFFF"/>
+                    </a:solidFill>
+                  </a:tcPr>
+                </a:tc>
+              </a:tr>
+            </a:tbl>
+          </a:graphicData>
+        </a:graphic>
+      </p:graphicFrame>
     </p:spTree>
   </p:cSld>
   <p:clrMapOvr>
@@ -5200,7 +7900,77 @@
         </p:nvSpPr>
         <p:spPr>
           <a:xfrm>
-            <a:off x="502920" y="320040"/>
+            <a:off x="502920" y="109728"/>
+            <a:ext cx="11185855" cy="256032"/>
+          </a:xfrm>
+          <a:prstGeom prst="rect">
+            <a:avLst/>
+          </a:prstGeom>
+          <a:noFill/>
+        </p:spPr>
+        <p:txBody>
+          <a:bodyPr wrap="none" lIns="0" rIns="0" tIns="0" bIns="0">
+            <a:spAutoFit/>
+          </a:bodyPr>
+          <a:lstStyle/>
+          <a:p>
+            <a:r>
+              <a:rPr sz="900" b="0">
+                <a:solidFill>
+                  <a:srgbClr val="8C8C8C"/>
+                </a:solidFill>
+                <a:latin typeface="Arial"/>
+              </a:rPr>
+              <a:t>1  THE ASK      </a:t>
+            </a:r>
+            <a:r>
+              <a:rPr sz="900" b="1">
+                <a:solidFill>
+                  <a:srgbClr val="2251FF"/>
+                </a:solidFill>
+                <a:latin typeface="Arial"/>
+              </a:rPr>
+              <a:t>2  APPROACH      </a:t>
+            </a:r>
+            <a:r>
+              <a:rPr sz="900" b="0">
+                <a:solidFill>
+                  <a:srgbClr val="8C8C8C"/>
+                </a:solidFill>
+                <a:latin typeface="Arial"/>
+              </a:rPr>
+              <a:t>3  FINDINGS      </a:t>
+            </a:r>
+            <a:r>
+              <a:rPr sz="900" b="0">
+                <a:solidFill>
+                  <a:srgbClr val="8C8C8C"/>
+                </a:solidFill>
+                <a:latin typeface="Arial"/>
+              </a:rPr>
+              <a:t>4  IMPACT      </a:t>
+            </a:r>
+            <a:r>
+              <a:rPr sz="900" b="0">
+                <a:solidFill>
+                  <a:srgbClr val="8C8C8C"/>
+                </a:solidFill>
+                <a:latin typeface="Arial"/>
+              </a:rPr>
+              <a:t>5  RECOMMENDATION</a:t>
+            </a:r>
+          </a:p>
+        </p:txBody>
+      </p:sp>
+      <p:sp>
+        <p:nvSpPr>
+          <p:cNvPr id="3" name="TextBox 2"/>
+          <p:cNvSpPr txBox="1"/>
+          <p:nvPr/>
+        </p:nvSpPr>
+        <p:spPr>
+          <a:xfrm>
+            <a:off x="502920" y="384048"/>
             <a:ext cx="11185855" cy="868680"/>
           </a:xfrm>
           <a:prstGeom prst="rect">
@@ -5222,20 +7992,20 @@
                 </a:solidFill>
                 <a:latin typeface="Arial"/>
               </a:rPr>
-              <a:t>Data validation: overall verdict BLOCK</a:t>
-            </a:r>
-          </a:p>
-        </p:txBody>
-      </p:sp>
-      <p:sp>
-        <p:nvSpPr>
-          <p:cNvPr id="3" name="Rectangle 2"/>
+              <a:t>We answered it with a randomised comparison of 38,911 users, quality checks and an independent review</a:t>
+            </a:r>
+          </a:p>
+        </p:txBody>
+      </p:sp>
+      <p:sp>
+        <p:nvSpPr>
+          <p:cNvPr id="4" name="Rectangle 3"/>
           <p:cNvSpPr/>
           <p:nvPr/>
         </p:nvSpPr>
         <p:spPr>
           <a:xfrm>
-            <a:off x="502920" y="1170432"/>
+            <a:off x="502920" y="1216152"/>
             <a:ext cx="822960" cy="38100"/>
           </a:xfrm>
           <a:prstGeom prst="rect">
@@ -5271,16 +8041,1659 @@
           </a:p>
         </p:txBody>
       </p:sp>
+      <p:sp>
+        <p:nvSpPr>
+          <p:cNvPr id="5" name="Rectangle 4"/>
+          <p:cNvSpPr/>
+          <p:nvPr/>
+        </p:nvSpPr>
+        <p:spPr>
+          <a:xfrm>
+            <a:off x="502920" y="6327648"/>
+            <a:ext cx="11185855" cy="6350"/>
+          </a:xfrm>
+          <a:prstGeom prst="rect">
+            <a:avLst/>
+          </a:prstGeom>
+          <a:solidFill>
+            <a:srgbClr val="E3E3E3"/>
+          </a:solidFill>
+          <a:ln>
+            <a:noFill/>
+          </a:ln>
+          <a:effectLst/>
+        </p:spPr>
+        <p:style>
+          <a:lnRef idx="1">
+            <a:schemeClr val="accent1"/>
+          </a:lnRef>
+          <a:fillRef idx="3">
+            <a:schemeClr val="accent1"/>
+          </a:fillRef>
+          <a:effectRef idx="2">
+            <a:schemeClr val="accent1"/>
+          </a:effectRef>
+          <a:fontRef idx="minor">
+            <a:schemeClr val="lt1"/>
+          </a:fontRef>
+        </p:style>
+        <p:txBody>
+          <a:bodyPr rtlCol="0" anchor="ctr"/>
+          <a:lstStyle/>
+          <a:p>
+            <a:pPr algn="ctr"/>
+          </a:p>
+        </p:txBody>
+      </p:sp>
+      <p:sp>
+        <p:nvSpPr>
+          <p:cNvPr id="6" name="TextBox 5"/>
+          <p:cNvSpPr txBox="1"/>
+          <p:nvPr/>
+        </p:nvSpPr>
+        <p:spPr>
+          <a:xfrm>
+            <a:off x="502920" y="6400800"/>
+            <a:ext cx="9875520" cy="320040"/>
+          </a:xfrm>
+          <a:prstGeom prst="rect">
+            <a:avLst/>
+          </a:prstGeom>
+          <a:noFill/>
+        </p:spPr>
+        <p:txBody>
+          <a:bodyPr wrap="square" anchor="t" lIns="18288" rIns="18288" tIns="18288" bIns="18288">
+            <a:spAutoFit/>
+          </a:bodyPr>
+          <a:lstStyle/>
+          <a:p>
+            <a:pPr algn="l"/>
+            <a:r>
+              <a:rPr sz="900" b="0">
+                <a:solidFill>
+                  <a:srgbClr val="8C8C8C"/>
+                </a:solidFill>
+                <a:latin typeface="Arial"/>
+              </a:rPr>
+              <a:t>Source: srm_broken.csv, 2026-09-01 to 2026-09-14; run 2026-10-01_onboarding-checklist</a:t>
+            </a:r>
+          </a:p>
+        </p:txBody>
+      </p:sp>
+      <p:sp>
+        <p:nvSpPr>
+          <p:cNvPr id="7" name="TextBox 6"/>
+          <p:cNvSpPr txBox="1"/>
+          <p:nvPr/>
+        </p:nvSpPr>
+        <p:spPr>
+          <a:xfrm>
+            <a:off x="10957255" y="6400800"/>
+            <a:ext cx="731520" cy="320040"/>
+          </a:xfrm>
+          <a:prstGeom prst="rect">
+            <a:avLst/>
+          </a:prstGeom>
+          <a:noFill/>
+        </p:spPr>
+        <p:txBody>
+          <a:bodyPr wrap="square" anchor="t" lIns="18288" rIns="18288" tIns="18288" bIns="18288">
+            <a:spAutoFit/>
+          </a:bodyPr>
+          <a:lstStyle/>
+          <a:p>
+            <a:pPr algn="r"/>
+            <a:r>
+              <a:rPr sz="900" b="0">
+                <a:solidFill>
+                  <a:srgbClr val="8C8C8C"/>
+                </a:solidFill>
+                <a:latin typeface="Arial"/>
+              </a:rPr>
+              <a:t>5</a:t>
+            </a:r>
+          </a:p>
+        </p:txBody>
+      </p:sp>
+      <p:sp>
+        <p:nvSpPr>
+          <p:cNvPr id="8" name="Pentagon 7"/>
+          <p:cNvSpPr/>
+          <p:nvPr/>
+        </p:nvSpPr>
+        <p:spPr>
+          <a:xfrm>
+            <a:off x="502920" y="1737360"/>
+            <a:ext cx="2762173" cy="731520"/>
+          </a:xfrm>
+          <a:prstGeom prst="homePlate">
+            <a:avLst/>
+          </a:prstGeom>
+          <a:solidFill>
+            <a:srgbClr val="0B2545"/>
+          </a:solidFill>
+          <a:ln>
+            <a:noFill/>
+          </a:ln>
+          <a:effectLst/>
+        </p:spPr>
+        <p:style>
+          <a:lnRef idx="1">
+            <a:schemeClr val="accent1"/>
+          </a:lnRef>
+          <a:fillRef idx="3">
+            <a:schemeClr val="accent1"/>
+          </a:fillRef>
+          <a:effectRef idx="2">
+            <a:schemeClr val="accent1"/>
+          </a:effectRef>
+          <a:fontRef idx="minor">
+            <a:schemeClr val="lt1"/>
+          </a:fontRef>
+        </p:style>
+        <p:txBody>
+          <a:bodyPr rtlCol="0" anchor="ctr" wrap="square" lIns="320040" rIns="320040"/>
+          <a:lstStyle/>
+          <a:p>
+            <a:pPr algn="ctr"/>
+            <a:r>
+              <a:rPr sz="1500" b="1">
+                <a:solidFill>
+                  <a:srgbClr val="FFFFFF"/>
+                </a:solidFill>
+                <a:latin typeface="Arial"/>
+              </a:rPr>
+              <a:t>1. Data</a:t>
+            </a:r>
+          </a:p>
+        </p:txBody>
+      </p:sp>
+      <p:sp>
+        <p:nvSpPr>
+          <p:cNvPr id="9" name="TextBox 8"/>
+          <p:cNvSpPr txBox="1"/>
+          <p:nvPr/>
+        </p:nvSpPr>
+        <p:spPr>
+          <a:xfrm>
+            <a:off x="640080" y="2697480"/>
+            <a:ext cx="2487853" cy="2926080"/>
+          </a:xfrm>
+          <a:prstGeom prst="rect">
+            <a:avLst/>
+          </a:prstGeom>
+          <a:noFill/>
+        </p:spPr>
+        <p:txBody>
+          <a:bodyPr wrap="square" anchor="t" lIns="18288" rIns="18288" tIns="18288" bIns="18288">
+            <a:spAutoFit/>
+          </a:bodyPr>
+          <a:lstStyle/>
+          <a:p>
+            <a:pPr algn="l"/>
+            <a:r>
+              <a:rPr sz="1300" b="0">
+                <a:solidFill>
+                  <a:srgbClr val="1A1A1A"/>
+                </a:solidFill>
+                <a:latin typeface="Arial"/>
+              </a:rPr>
+              <a:t>38,911 users in 2 groups (control, treatment). Period: 2026-09-01 to 2026-09-14.</a:t>
+            </a:r>
+          </a:p>
+        </p:txBody>
+      </p:sp>
+      <p:sp>
+        <p:nvSpPr>
+          <p:cNvPr id="10" name="Chevron 9"/>
+          <p:cNvSpPr/>
+          <p:nvPr/>
+        </p:nvSpPr>
+        <p:spPr>
+          <a:xfrm>
+            <a:off x="3310813" y="1737360"/>
+            <a:ext cx="2762173" cy="731520"/>
+          </a:xfrm>
+          <a:prstGeom prst="chevron">
+            <a:avLst/>
+          </a:prstGeom>
+          <a:solidFill>
+            <a:srgbClr val="0B2545"/>
+          </a:solidFill>
+          <a:ln>
+            <a:noFill/>
+          </a:ln>
+          <a:effectLst/>
+        </p:spPr>
+        <p:style>
+          <a:lnRef idx="1">
+            <a:schemeClr val="accent1"/>
+          </a:lnRef>
+          <a:fillRef idx="3">
+            <a:schemeClr val="accent1"/>
+          </a:fillRef>
+          <a:effectRef idx="2">
+            <a:schemeClr val="accent1"/>
+          </a:effectRef>
+          <a:fontRef idx="minor">
+            <a:schemeClr val="lt1"/>
+          </a:fontRef>
+        </p:style>
+        <p:txBody>
+          <a:bodyPr rtlCol="0" anchor="ctr" wrap="square" lIns="320040" rIns="320040"/>
+          <a:lstStyle/>
+          <a:p>
+            <a:pPr algn="ctr"/>
+            <a:r>
+              <a:rPr sz="1500" b="1">
+                <a:solidFill>
+                  <a:srgbClr val="FFFFFF"/>
+                </a:solidFill>
+                <a:latin typeface="Arial"/>
+              </a:rPr>
+              <a:t>2. Quality checks</a:t>
+            </a:r>
+          </a:p>
+        </p:txBody>
+      </p:sp>
+      <p:sp>
+        <p:nvSpPr>
+          <p:cNvPr id="11" name="TextBox 10"/>
+          <p:cNvSpPr txBox="1"/>
+          <p:nvPr/>
+        </p:nvSpPr>
+        <p:spPr>
+          <a:xfrm>
+            <a:off x="3447973" y="2697480"/>
+            <a:ext cx="2487853" cy="2926080"/>
+          </a:xfrm>
+          <a:prstGeom prst="rect">
+            <a:avLst/>
+          </a:prstGeom>
+          <a:noFill/>
+        </p:spPr>
+        <p:txBody>
+          <a:bodyPr wrap="square" anchor="t" lIns="18288" rIns="18288" tIns="18288" bIns="18288">
+            <a:spAutoFit/>
+          </a:bodyPr>
+          <a:lstStyle/>
+          <a:p>
+            <a:pPr algn="l"/>
+            <a:r>
+              <a:rPr sz="1300" b="0">
+                <a:solidFill>
+                  <a:srgbClr val="1A1A1A"/>
+                </a:solidFill>
+                <a:latin typeface="Arial"/>
+              </a:rPr>
+              <a:t>12 data checks: overall BLOCK. Traffic split does NOT match the design (p &lt; 0.001).</a:t>
+            </a:r>
+          </a:p>
+        </p:txBody>
+      </p:sp>
+      <p:sp>
+        <p:nvSpPr>
+          <p:cNvPr id="12" name="Chevron 11"/>
+          <p:cNvSpPr/>
+          <p:nvPr/>
+        </p:nvSpPr>
+        <p:spPr>
+          <a:xfrm>
+            <a:off x="6118706" y="1737360"/>
+            <a:ext cx="2762173" cy="731520"/>
+          </a:xfrm>
+          <a:prstGeom prst="chevron">
+            <a:avLst/>
+          </a:prstGeom>
+          <a:solidFill>
+            <a:srgbClr val="0B2545"/>
+          </a:solidFill>
+          <a:ln>
+            <a:noFill/>
+          </a:ln>
+          <a:effectLst/>
+        </p:spPr>
+        <p:style>
+          <a:lnRef idx="1">
+            <a:schemeClr val="accent1"/>
+          </a:lnRef>
+          <a:fillRef idx="3">
+            <a:schemeClr val="accent1"/>
+          </a:fillRef>
+          <a:effectRef idx="2">
+            <a:schemeClr val="accent1"/>
+          </a:effectRef>
+          <a:fontRef idx="minor">
+            <a:schemeClr val="lt1"/>
+          </a:fontRef>
+        </p:style>
+        <p:txBody>
+          <a:bodyPr rtlCol="0" anchor="ctr" wrap="square" lIns="320040" rIns="320040"/>
+          <a:lstStyle/>
+          <a:p>
+            <a:pPr algn="ctr"/>
+            <a:r>
+              <a:rPr sz="1500" b="1">
+                <a:solidFill>
+                  <a:srgbClr val="FFFFFF"/>
+                </a:solidFill>
+                <a:latin typeface="Arial"/>
+              </a:rPr>
+              <a:t>3. Analysis</a:t>
+            </a:r>
+          </a:p>
+        </p:txBody>
+      </p:sp>
+      <p:sp>
+        <p:nvSpPr>
+          <p:cNvPr id="13" name="TextBox 12"/>
+          <p:cNvSpPr txBox="1"/>
+          <p:nvPr/>
+        </p:nvSpPr>
+        <p:spPr>
+          <a:xfrm>
+            <a:off x="6255866" y="2697480"/>
+            <a:ext cx="2487853" cy="2926080"/>
+          </a:xfrm>
+          <a:prstGeom prst="rect">
+            <a:avLst/>
+          </a:prstGeom>
+          <a:noFill/>
+        </p:spPr>
+        <p:txBody>
+          <a:bodyPr wrap="square" anchor="t" lIns="18288" rIns="18288" tIns="18288" bIns="18288">
+            <a:spAutoFit/>
+          </a:bodyPr>
+          <a:lstStyle/>
+          <a:p>
+            <a:pPr algn="l"/>
+            <a:r>
+              <a:rPr sz="1300" b="0">
+                <a:solidFill>
+                  <a:srgbClr val="1A1A1A"/>
+                </a:solidFill>
+                <a:latin typeface="Arial"/>
+              </a:rPr>
+              <a:t>No effect estimated.</a:t>
+            </a:r>
+          </a:p>
+        </p:txBody>
+      </p:sp>
+      <p:sp>
+        <p:nvSpPr>
+          <p:cNvPr id="14" name="Chevron 13"/>
+          <p:cNvSpPr/>
+          <p:nvPr/>
+        </p:nvSpPr>
+        <p:spPr>
+          <a:xfrm>
+            <a:off x="8926599" y="1737360"/>
+            <a:ext cx="2762173" cy="731520"/>
+          </a:xfrm>
+          <a:prstGeom prst="chevron">
+            <a:avLst/>
+          </a:prstGeom>
+          <a:solidFill>
+            <a:srgbClr val="2251FF"/>
+          </a:solidFill>
+          <a:ln>
+            <a:noFill/>
+          </a:ln>
+          <a:effectLst/>
+        </p:spPr>
+        <p:style>
+          <a:lnRef idx="1">
+            <a:schemeClr val="accent1"/>
+          </a:lnRef>
+          <a:fillRef idx="3">
+            <a:schemeClr val="accent1"/>
+          </a:fillRef>
+          <a:effectRef idx="2">
+            <a:schemeClr val="accent1"/>
+          </a:effectRef>
+          <a:fontRef idx="minor">
+            <a:schemeClr val="lt1"/>
+          </a:fontRef>
+        </p:style>
+        <p:txBody>
+          <a:bodyPr rtlCol="0" anchor="ctr" wrap="square" lIns="320040" rIns="320040"/>
+          <a:lstStyle/>
+          <a:p>
+            <a:pPr algn="ctr"/>
+            <a:r>
+              <a:rPr sz="1500" b="1">
+                <a:solidFill>
+                  <a:srgbClr val="FFFFFF"/>
+                </a:solidFill>
+                <a:latin typeface="Arial"/>
+              </a:rPr>
+              <a:t>4. Review</a:t>
+            </a:r>
+          </a:p>
+        </p:txBody>
+      </p:sp>
+      <p:sp>
+        <p:nvSpPr>
+          <p:cNvPr id="15" name="TextBox 14"/>
+          <p:cNvSpPr txBox="1"/>
+          <p:nvPr/>
+        </p:nvSpPr>
+        <p:spPr>
+          <a:xfrm>
+            <a:off x="9063759" y="2697480"/>
+            <a:ext cx="2487853" cy="2926080"/>
+          </a:xfrm>
+          <a:prstGeom prst="rect">
+            <a:avLst/>
+          </a:prstGeom>
+          <a:noFill/>
+        </p:spPr>
+        <p:txBody>
+          <a:bodyPr wrap="square" anchor="t" lIns="18288" rIns="18288" tIns="18288" bIns="18288">
+            <a:spAutoFit/>
+          </a:bodyPr>
+          <a:lstStyle/>
+          <a:p>
+            <a:pPr algn="l"/>
+            <a:r>
+              <a:rPr sz="1300" b="0">
+                <a:solidFill>
+                  <a:srgbClr val="1A1A1A"/>
+                </a:solidFill>
+                <a:latin typeface="Arial"/>
+              </a:rPr>
+              <a:t>Independent reviewer re-checked the numbers from the raw data: 1 round, passed.</a:t>
+            </a:r>
+          </a:p>
+        </p:txBody>
+      </p:sp>
+    </p:spTree>
+  </p:cSld>
+  <p:clrMapOvr>
+    <a:masterClrMapping/>
+  </p:clrMapOvr>
+</p:sld>
+</file>
+
+<file path=ppt/slides/slide6.xml><?xml version="1.0" encoding="utf-8"?>
+<p:sld xmlns:a="http://schemas.openxmlformats.org/drawingml/2006/main" xmlns:p="http://schemas.openxmlformats.org/presentationml/2006/main" xmlns:r="http://schemas.openxmlformats.org/officeDocument/2006/relationships">
+  <p:cSld>
+    <p:spTree>
+      <p:nvGrpSpPr>
+        <p:cNvPr id="1" name=""/>
+        <p:cNvGrpSpPr/>
+        <p:nvPr/>
+      </p:nvGrpSpPr>
+      <p:grpSpPr/>
+      <p:sp>
+        <p:nvSpPr>
+          <p:cNvPr id="2" name="TextBox 1"/>
+          <p:cNvSpPr txBox="1"/>
+          <p:nvPr/>
+        </p:nvSpPr>
+        <p:spPr>
+          <a:xfrm>
+            <a:off x="502920" y="109728"/>
+            <a:ext cx="11185855" cy="256032"/>
+          </a:xfrm>
+          <a:prstGeom prst="rect">
+            <a:avLst/>
+          </a:prstGeom>
+          <a:noFill/>
+        </p:spPr>
+        <p:txBody>
+          <a:bodyPr wrap="none" lIns="0" rIns="0" tIns="0" bIns="0">
+            <a:spAutoFit/>
+          </a:bodyPr>
+          <a:lstStyle/>
+          <a:p>
+            <a:r>
+              <a:rPr sz="900" b="0">
+                <a:solidFill>
+                  <a:srgbClr val="8C8C8C"/>
+                </a:solidFill>
+                <a:latin typeface="Arial"/>
+              </a:rPr>
+              <a:t>1  THE ASK      </a:t>
+            </a:r>
+            <a:r>
+              <a:rPr sz="900" b="0">
+                <a:solidFill>
+                  <a:srgbClr val="8C8C8C"/>
+                </a:solidFill>
+                <a:latin typeface="Arial"/>
+              </a:rPr>
+              <a:t>2  APPROACH      </a:t>
+            </a:r>
+            <a:r>
+              <a:rPr sz="900" b="1">
+                <a:solidFill>
+                  <a:srgbClr val="2251FF"/>
+                </a:solidFill>
+                <a:latin typeface="Arial"/>
+              </a:rPr>
+              <a:t>3  FINDINGS      </a:t>
+            </a:r>
+            <a:r>
+              <a:rPr sz="900" b="0">
+                <a:solidFill>
+                  <a:srgbClr val="8C8C8C"/>
+                </a:solidFill>
+                <a:latin typeface="Arial"/>
+              </a:rPr>
+              <a:t>4  IMPACT      </a:t>
+            </a:r>
+            <a:r>
+              <a:rPr sz="900" b="0">
+                <a:solidFill>
+                  <a:srgbClr val="8C8C8C"/>
+                </a:solidFill>
+                <a:latin typeface="Arial"/>
+              </a:rPr>
+              <a:t>5  RECOMMENDATION</a:t>
+            </a:r>
+          </a:p>
+        </p:txBody>
+      </p:sp>
+      <p:sp>
+        <p:nvSpPr>
+          <p:cNvPr id="3" name="TextBox 2"/>
+          <p:cNvSpPr txBox="1"/>
+          <p:nvPr/>
+        </p:nvSpPr>
+        <p:spPr>
+          <a:xfrm>
+            <a:off x="502920" y="384048"/>
+            <a:ext cx="11185855" cy="868680"/>
+          </a:xfrm>
+          <a:prstGeom prst="rect">
+            <a:avLst/>
+          </a:prstGeom>
+          <a:noFill/>
+        </p:spPr>
+        <p:txBody>
+          <a:bodyPr wrap="square" anchor="t" lIns="18288" rIns="18288" tIns="18288" bIns="18288">
+            <a:spAutoFit/>
+          </a:bodyPr>
+          <a:lstStyle/>
+          <a:p>
+            <a:pPr algn="l"/>
+            <a:r>
+              <a:rPr sz="2400" b="1">
+                <a:solidFill>
+                  <a:srgbClr val="1A1A1A"/>
+                </a:solidFill>
+                <a:latin typeface="Arial"/>
+              </a:rPr>
+              <a:t>Treatment is missing 7.1% of its expected users: results cannot be trusted until this is fixed</a:t>
+            </a:r>
+          </a:p>
+        </p:txBody>
+      </p:sp>
+      <p:sp>
+        <p:nvSpPr>
+          <p:cNvPr id="4" name="Rectangle 3"/>
+          <p:cNvSpPr/>
+          <p:nvPr/>
+        </p:nvSpPr>
+        <p:spPr>
+          <a:xfrm>
+            <a:off x="502920" y="1216152"/>
+            <a:ext cx="822960" cy="38100"/>
+          </a:xfrm>
+          <a:prstGeom prst="rect">
+            <a:avLst/>
+          </a:prstGeom>
+          <a:solidFill>
+            <a:srgbClr val="2251FF"/>
+          </a:solidFill>
+          <a:ln>
+            <a:noFill/>
+          </a:ln>
+          <a:effectLst/>
+        </p:spPr>
+        <p:style>
+          <a:lnRef idx="1">
+            <a:schemeClr val="accent1"/>
+          </a:lnRef>
+          <a:fillRef idx="3">
+            <a:schemeClr val="accent1"/>
+          </a:fillRef>
+          <a:effectRef idx="2">
+            <a:schemeClr val="accent1"/>
+          </a:effectRef>
+          <a:fontRef idx="minor">
+            <a:schemeClr val="lt1"/>
+          </a:fontRef>
+        </p:style>
+        <p:txBody>
+          <a:bodyPr rtlCol="0" anchor="ctr"/>
+          <a:lstStyle/>
+          <a:p>
+            <a:pPr algn="ctr"/>
+          </a:p>
+        </p:txBody>
+      </p:sp>
+      <p:sp>
+        <p:nvSpPr>
+          <p:cNvPr id="5" name="Rectangle 4"/>
+          <p:cNvSpPr/>
+          <p:nvPr/>
+        </p:nvSpPr>
+        <p:spPr>
+          <a:xfrm>
+            <a:off x="502920" y="6327648"/>
+            <a:ext cx="11185855" cy="6350"/>
+          </a:xfrm>
+          <a:prstGeom prst="rect">
+            <a:avLst/>
+          </a:prstGeom>
+          <a:solidFill>
+            <a:srgbClr val="E3E3E3"/>
+          </a:solidFill>
+          <a:ln>
+            <a:noFill/>
+          </a:ln>
+          <a:effectLst/>
+        </p:spPr>
+        <p:style>
+          <a:lnRef idx="1">
+            <a:schemeClr val="accent1"/>
+          </a:lnRef>
+          <a:fillRef idx="3">
+            <a:schemeClr val="accent1"/>
+          </a:fillRef>
+          <a:effectRef idx="2">
+            <a:schemeClr val="accent1"/>
+          </a:effectRef>
+          <a:fontRef idx="minor">
+            <a:schemeClr val="lt1"/>
+          </a:fontRef>
+        </p:style>
+        <p:txBody>
+          <a:bodyPr rtlCol="0" anchor="ctr"/>
+          <a:lstStyle/>
+          <a:p>
+            <a:pPr algn="ctr"/>
+          </a:p>
+        </p:txBody>
+      </p:sp>
+      <p:sp>
+        <p:nvSpPr>
+          <p:cNvPr id="6" name="TextBox 5"/>
+          <p:cNvSpPr txBox="1"/>
+          <p:nvPr/>
+        </p:nvSpPr>
+        <p:spPr>
+          <a:xfrm>
+            <a:off x="502920" y="6400800"/>
+            <a:ext cx="9875520" cy="320040"/>
+          </a:xfrm>
+          <a:prstGeom prst="rect">
+            <a:avLst/>
+          </a:prstGeom>
+          <a:noFill/>
+        </p:spPr>
+        <p:txBody>
+          <a:bodyPr wrap="square" anchor="t" lIns="18288" rIns="18288" tIns="18288" bIns="18288">
+            <a:spAutoFit/>
+          </a:bodyPr>
+          <a:lstStyle/>
+          <a:p>
+            <a:pPr algn="l"/>
+            <a:r>
+              <a:rPr sz="900" b="0">
+                <a:solidFill>
+                  <a:srgbClr val="8C8C8C"/>
+                </a:solidFill>
+                <a:latin typeface="Arial"/>
+              </a:rPr>
+              <a:t>Source: srm_broken.csv, 2026-09-01 to 2026-09-14; chi-square goodness-of-fit vs intended 50/50</a:t>
+            </a:r>
+          </a:p>
+        </p:txBody>
+      </p:sp>
+      <p:sp>
+        <p:nvSpPr>
+          <p:cNvPr id="7" name="TextBox 6"/>
+          <p:cNvSpPr txBox="1"/>
+          <p:nvPr/>
+        </p:nvSpPr>
+        <p:spPr>
+          <a:xfrm>
+            <a:off x="10957255" y="6400800"/>
+            <a:ext cx="731520" cy="320040"/>
+          </a:xfrm>
+          <a:prstGeom prst="rect">
+            <a:avLst/>
+          </a:prstGeom>
+          <a:noFill/>
+        </p:spPr>
+        <p:txBody>
+          <a:bodyPr wrap="square" anchor="t" lIns="18288" rIns="18288" tIns="18288" bIns="18288">
+            <a:spAutoFit/>
+          </a:bodyPr>
+          <a:lstStyle/>
+          <a:p>
+            <a:pPr algn="r"/>
+            <a:r>
+              <a:rPr sz="900" b="0">
+                <a:solidFill>
+                  <a:srgbClr val="8C8C8C"/>
+                </a:solidFill>
+                <a:latin typeface="Arial"/>
+              </a:rPr>
+              <a:t>6</a:t>
+            </a:r>
+          </a:p>
+        </p:txBody>
+      </p:sp>
+      <p:pic>
+        <p:nvPicPr>
+          <p:cNvPr id="8" name="Picture 7" descr="srm_bar.png"/>
+          <p:cNvPicPr>
+            <a:picLocks noChangeAspect="1"/>
+          </p:cNvPicPr>
+          <p:nvPr/>
+        </p:nvPicPr>
+        <p:blipFill>
+          <a:blip r:embed="rId3"/>
+          <a:srcRect t="16900"/>
+          <a:stretch>
+            <a:fillRect/>
+          </a:stretch>
+        </p:blipFill>
+        <p:spPr>
+          <a:xfrm>
+            <a:off x="502920" y="1463040"/>
+            <a:ext cx="7589520" cy="3547626"/>
+          </a:xfrm>
+          <a:prstGeom prst="rect">
+            <a:avLst/>
+          </a:prstGeom>
+        </p:spPr>
+      </p:pic>
+      <p:sp>
+        <p:nvSpPr>
+          <p:cNvPr id="9" name="TextBox 8"/>
+          <p:cNvSpPr txBox="1"/>
+          <p:nvPr/>
+        </p:nvSpPr>
+        <p:spPr>
+          <a:xfrm>
+            <a:off x="8412480" y="1508760"/>
+            <a:ext cx="3276295" cy="274320"/>
+          </a:xfrm>
+          <a:prstGeom prst="rect">
+            <a:avLst/>
+          </a:prstGeom>
+          <a:noFill/>
+        </p:spPr>
+        <p:txBody>
+          <a:bodyPr wrap="square" anchor="t" lIns="18288" rIns="18288" tIns="18288" bIns="18288">
+            <a:spAutoFit/>
+          </a:bodyPr>
+          <a:lstStyle/>
+          <a:p>
+            <a:pPr algn="l"/>
+            <a:r>
+              <a:rPr sz="1100" b="1">
+                <a:solidFill>
+                  <a:srgbClr val="0B2545"/>
+                </a:solidFill>
+                <a:latin typeface="Arial"/>
+              </a:rPr>
+              <a:t>KEY TAKEAWAYS</a:t>
+            </a:r>
+          </a:p>
+        </p:txBody>
+      </p:sp>
+      <p:sp>
+        <p:nvSpPr>
+          <p:cNvPr id="10" name="TextBox 9"/>
+          <p:cNvSpPr txBox="1"/>
+          <p:nvPr/>
+        </p:nvSpPr>
+        <p:spPr>
+          <a:xfrm>
+            <a:off x="8412480" y="1920240"/>
+            <a:ext cx="3276295" cy="4114800"/>
+          </a:xfrm>
+          <a:prstGeom prst="rect">
+            <a:avLst/>
+          </a:prstGeom>
+          <a:noFill/>
+        </p:spPr>
+        <p:txBody>
+          <a:bodyPr wrap="square" lIns="18288" rIns="18288">
+            <a:spAutoFit/>
+          </a:bodyPr>
+          <a:lstStyle/>
+          <a:p>
+            <a:pPr>
+              <a:spcAft>
+                <a:spcPts val="1000"/>
+              </a:spcAft>
+            </a:pPr>
+            <a:r>
+              <a:rPr sz="1400" b="1">
+                <a:solidFill>
+                  <a:srgbClr val="2251FF"/>
+                </a:solidFill>
+                <a:latin typeface="Arial"/>
+              </a:rPr>
+              <a:t>1.  </a:t>
+            </a:r>
+            <a:r>
+              <a:rPr sz="1400">
+                <a:solidFill>
+                  <a:srgbClr val="1A1A1A"/>
+                </a:solidFill>
+                <a:latin typeface="Arial"/>
+              </a:rPr>
+              <a:t>Treatment share 46.4% vs 50.0% intended</a:t>
+            </a:r>
+          </a:p>
+          <a:p>
+            <a:pPr>
+              <a:spcAft>
+                <a:spcPts val="1000"/>
+              </a:spcAft>
+            </a:pPr>
+            <a:r>
+              <a:rPr sz="1400" b="1">
+                <a:solidFill>
+                  <a:srgbClr val="2251FF"/>
+                </a:solidFill>
+                <a:latin typeface="Arial"/>
+              </a:rPr>
+              <a:t>2.  </a:t>
+            </a:r>
+            <a:r>
+              <a:rPr sz="1400">
+                <a:solidFill>
+                  <a:srgbClr val="1A1A1A"/>
+                </a:solidFill>
+                <a:latin typeface="Arial"/>
+              </a:rPr>
+              <a:t>Chi-square p &lt; 0.001 (threshold 0.001)</a:t>
+            </a:r>
+          </a:p>
+          <a:p>
+            <a:pPr>
+              <a:spcAft>
+                <a:spcPts val="1000"/>
+              </a:spcAft>
+            </a:pPr>
+            <a:r>
+              <a:rPr sz="1400" b="1">
+                <a:solidFill>
+                  <a:srgbClr val="2251FF"/>
+                </a:solidFill>
+                <a:latin typeface="Arial"/>
+              </a:rPr>
+              <a:t>3.  </a:t>
+            </a:r>
+            <a:r>
+              <a:rPr sz="1400">
+                <a:solidFill>
+                  <a:srgbClr val="1A1A1A"/>
+                </a:solidFill>
+                <a:latin typeface="Arial"/>
+              </a:rPr>
+              <a:t>Effect estimates are withheld</a:t>
+            </a:r>
+          </a:p>
+        </p:txBody>
+      </p:sp>
+    </p:spTree>
+  </p:cSld>
+  <p:clrMapOvr>
+    <a:masterClrMapping/>
+  </p:clrMapOvr>
+</p:sld>
+</file>
+
+<file path=ppt/slides/slide7.xml><?xml version="1.0" encoding="utf-8"?>
+<p:sld xmlns:a="http://schemas.openxmlformats.org/drawingml/2006/main" xmlns:p="http://schemas.openxmlformats.org/presentationml/2006/main" xmlns:r="http://schemas.openxmlformats.org/officeDocument/2006/relationships">
+  <p:cSld>
+    <p:spTree>
+      <p:nvGrpSpPr>
+        <p:cNvPr id="1" name=""/>
+        <p:cNvGrpSpPr/>
+        <p:nvPr/>
+      </p:nvGrpSpPr>
+      <p:grpSpPr/>
+      <p:sp>
+        <p:nvSpPr>
+          <p:cNvPr id="2" name="TextBox 1"/>
+          <p:cNvSpPr txBox="1"/>
+          <p:nvPr/>
+        </p:nvSpPr>
+        <p:spPr>
+          <a:xfrm>
+            <a:off x="502920" y="109728"/>
+            <a:ext cx="11185855" cy="256032"/>
+          </a:xfrm>
+          <a:prstGeom prst="rect">
+            <a:avLst/>
+          </a:prstGeom>
+          <a:noFill/>
+        </p:spPr>
+        <p:txBody>
+          <a:bodyPr wrap="none" lIns="0" rIns="0" tIns="0" bIns="0">
+            <a:spAutoFit/>
+          </a:bodyPr>
+          <a:lstStyle/>
+          <a:p>
+            <a:r>
+              <a:rPr sz="900" b="0">
+                <a:solidFill>
+                  <a:srgbClr val="8C8C8C"/>
+                </a:solidFill>
+                <a:latin typeface="Arial"/>
+              </a:rPr>
+              <a:t>1  THE ASK      </a:t>
+            </a:r>
+            <a:r>
+              <a:rPr sz="900" b="0">
+                <a:solidFill>
+                  <a:srgbClr val="8C8C8C"/>
+                </a:solidFill>
+                <a:latin typeface="Arial"/>
+              </a:rPr>
+              <a:t>2  APPROACH      </a:t>
+            </a:r>
+            <a:r>
+              <a:rPr sz="900" b="1">
+                <a:solidFill>
+                  <a:srgbClr val="2251FF"/>
+                </a:solidFill>
+                <a:latin typeface="Arial"/>
+              </a:rPr>
+              <a:t>3  FINDINGS      </a:t>
+            </a:r>
+            <a:r>
+              <a:rPr sz="900" b="0">
+                <a:solidFill>
+                  <a:srgbClr val="8C8C8C"/>
+                </a:solidFill>
+                <a:latin typeface="Arial"/>
+              </a:rPr>
+              <a:t>4  IMPACT      </a:t>
+            </a:r>
+            <a:r>
+              <a:rPr sz="900" b="0">
+                <a:solidFill>
+                  <a:srgbClr val="8C8C8C"/>
+                </a:solidFill>
+                <a:latin typeface="Arial"/>
+              </a:rPr>
+              <a:t>5  RECOMMENDATION</a:t>
+            </a:r>
+          </a:p>
+        </p:txBody>
+      </p:sp>
+      <p:sp>
+        <p:nvSpPr>
+          <p:cNvPr id="3" name="TextBox 2"/>
+          <p:cNvSpPr txBox="1"/>
+          <p:nvPr/>
+        </p:nvSpPr>
+        <p:spPr>
+          <a:xfrm>
+            <a:off x="502920" y="384048"/>
+            <a:ext cx="11185855" cy="868680"/>
+          </a:xfrm>
+          <a:prstGeom prst="rect">
+            <a:avLst/>
+          </a:prstGeom>
+          <a:noFill/>
+        </p:spPr>
+        <p:txBody>
+          <a:bodyPr wrap="square" anchor="t" lIns="18288" rIns="18288" tIns="18288" bIns="18288">
+            <a:spAutoFit/>
+          </a:bodyPr>
+          <a:lstStyle/>
+          <a:p>
+            <a:pPr algn="l"/>
+            <a:r>
+              <a:rPr sz="2400" b="1">
+                <a:solidFill>
+                  <a:srgbClr val="1A1A1A"/>
+                </a:solidFill>
+                <a:latin typeface="Arial"/>
+              </a:rPr>
+              <a:t>The loss is on Android: treatment has 37.4% of Android users; iOS and Web are balanced</a:t>
+            </a:r>
+          </a:p>
+        </p:txBody>
+      </p:sp>
+      <p:sp>
+        <p:nvSpPr>
+          <p:cNvPr id="4" name="Rectangle 3"/>
+          <p:cNvSpPr/>
+          <p:nvPr/>
+        </p:nvSpPr>
+        <p:spPr>
+          <a:xfrm>
+            <a:off x="502920" y="1216152"/>
+            <a:ext cx="822960" cy="38100"/>
+          </a:xfrm>
+          <a:prstGeom prst="rect">
+            <a:avLst/>
+          </a:prstGeom>
+          <a:solidFill>
+            <a:srgbClr val="2251FF"/>
+          </a:solidFill>
+          <a:ln>
+            <a:noFill/>
+          </a:ln>
+          <a:effectLst/>
+        </p:spPr>
+        <p:style>
+          <a:lnRef idx="1">
+            <a:schemeClr val="accent1"/>
+          </a:lnRef>
+          <a:fillRef idx="3">
+            <a:schemeClr val="accent1"/>
+          </a:fillRef>
+          <a:effectRef idx="2">
+            <a:schemeClr val="accent1"/>
+          </a:effectRef>
+          <a:fontRef idx="minor">
+            <a:schemeClr val="lt1"/>
+          </a:fontRef>
+        </p:style>
+        <p:txBody>
+          <a:bodyPr rtlCol="0" anchor="ctr"/>
+          <a:lstStyle/>
+          <a:p>
+            <a:pPr algn="ctr"/>
+          </a:p>
+        </p:txBody>
+      </p:sp>
+      <p:sp>
+        <p:nvSpPr>
+          <p:cNvPr id="5" name="Rectangle 4"/>
+          <p:cNvSpPr/>
+          <p:nvPr/>
+        </p:nvSpPr>
+        <p:spPr>
+          <a:xfrm>
+            <a:off x="502920" y="6327648"/>
+            <a:ext cx="11185855" cy="6350"/>
+          </a:xfrm>
+          <a:prstGeom prst="rect">
+            <a:avLst/>
+          </a:prstGeom>
+          <a:solidFill>
+            <a:srgbClr val="E3E3E3"/>
+          </a:solidFill>
+          <a:ln>
+            <a:noFill/>
+          </a:ln>
+          <a:effectLst/>
+        </p:spPr>
+        <p:style>
+          <a:lnRef idx="1">
+            <a:schemeClr val="accent1"/>
+          </a:lnRef>
+          <a:fillRef idx="3">
+            <a:schemeClr val="accent1"/>
+          </a:fillRef>
+          <a:effectRef idx="2">
+            <a:schemeClr val="accent1"/>
+          </a:effectRef>
+          <a:fontRef idx="minor">
+            <a:schemeClr val="lt1"/>
+          </a:fontRef>
+        </p:style>
+        <p:txBody>
+          <a:bodyPr rtlCol="0" anchor="ctr"/>
+          <a:lstStyle/>
+          <a:p>
+            <a:pPr algn="ctr"/>
+          </a:p>
+        </p:txBody>
+      </p:sp>
+      <p:sp>
+        <p:nvSpPr>
+          <p:cNvPr id="6" name="TextBox 5"/>
+          <p:cNvSpPr txBox="1"/>
+          <p:nvPr/>
+        </p:nvSpPr>
+        <p:spPr>
+          <a:xfrm>
+            <a:off x="502920" y="6400800"/>
+            <a:ext cx="9875520" cy="320040"/>
+          </a:xfrm>
+          <a:prstGeom prst="rect">
+            <a:avLst/>
+          </a:prstGeom>
+          <a:noFill/>
+        </p:spPr>
+        <p:txBody>
+          <a:bodyPr wrap="square" anchor="t" lIns="18288" rIns="18288" tIns="18288" bIns="18288">
+            <a:spAutoFit/>
+          </a:bodyPr>
+          <a:lstStyle/>
+          <a:p>
+            <a:pPr algn="l"/>
+            <a:r>
+              <a:rPr sz="900" b="0">
+                <a:solidFill>
+                  <a:srgbClr val="8C8C8C"/>
+                </a:solidFill>
+                <a:latin typeface="Arial"/>
+              </a:rPr>
+              <a:t>Source: srm_broken.csv, 2026-09-01 to 2026-09-14; chi-square goodness-of-fit vs intended 50/50</a:t>
+            </a:r>
+          </a:p>
+        </p:txBody>
+      </p:sp>
+      <p:sp>
+        <p:nvSpPr>
+          <p:cNvPr id="7" name="TextBox 6"/>
+          <p:cNvSpPr txBox="1"/>
+          <p:nvPr/>
+        </p:nvSpPr>
+        <p:spPr>
+          <a:xfrm>
+            <a:off x="10957255" y="6400800"/>
+            <a:ext cx="731520" cy="320040"/>
+          </a:xfrm>
+          <a:prstGeom prst="rect">
+            <a:avLst/>
+          </a:prstGeom>
+          <a:noFill/>
+        </p:spPr>
+        <p:txBody>
+          <a:bodyPr wrap="square" anchor="t" lIns="18288" rIns="18288" tIns="18288" bIns="18288">
+            <a:spAutoFit/>
+          </a:bodyPr>
+          <a:lstStyle/>
+          <a:p>
+            <a:pPr algn="r"/>
+            <a:r>
+              <a:rPr sz="900" b="0">
+                <a:solidFill>
+                  <a:srgbClr val="8C8C8C"/>
+                </a:solidFill>
+                <a:latin typeface="Arial"/>
+              </a:rPr>
+              <a:t>7</a:t>
+            </a:r>
+          </a:p>
+        </p:txBody>
+      </p:sp>
+      <p:pic>
+        <p:nvPicPr>
+          <p:cNvPr id="8" name="Picture 7" descr="srm_bar_android.png"/>
+          <p:cNvPicPr>
+            <a:picLocks noChangeAspect="1"/>
+          </p:cNvPicPr>
+          <p:nvPr/>
+        </p:nvPicPr>
+        <p:blipFill>
+          <a:blip r:embed="rId3"/>
+          <a:srcRect t="11100"/>
+          <a:stretch>
+            <a:fillRect/>
+          </a:stretch>
+        </p:blipFill>
+        <p:spPr>
+          <a:xfrm>
+            <a:off x="502920" y="1463040"/>
+            <a:ext cx="7589520" cy="3795234"/>
+          </a:xfrm>
+          <a:prstGeom prst="rect">
+            <a:avLst/>
+          </a:prstGeom>
+        </p:spPr>
+      </p:pic>
+      <p:sp>
+        <p:nvSpPr>
+          <p:cNvPr id="9" name="TextBox 8"/>
+          <p:cNvSpPr txBox="1"/>
+          <p:nvPr/>
+        </p:nvSpPr>
+        <p:spPr>
+          <a:xfrm>
+            <a:off x="8412480" y="1508760"/>
+            <a:ext cx="3276295" cy="274320"/>
+          </a:xfrm>
+          <a:prstGeom prst="rect">
+            <a:avLst/>
+          </a:prstGeom>
+          <a:noFill/>
+        </p:spPr>
+        <p:txBody>
+          <a:bodyPr wrap="square" anchor="t" lIns="18288" rIns="18288" tIns="18288" bIns="18288">
+            <a:spAutoFit/>
+          </a:bodyPr>
+          <a:lstStyle/>
+          <a:p>
+            <a:pPr algn="l"/>
+            <a:r>
+              <a:rPr sz="1100" b="1">
+                <a:solidFill>
+                  <a:srgbClr val="0B2545"/>
+                </a:solidFill>
+                <a:latin typeface="Arial"/>
+              </a:rPr>
+              <a:t>KEY TAKEAWAYS</a:t>
+            </a:r>
+          </a:p>
+        </p:txBody>
+      </p:sp>
+      <p:sp>
+        <p:nvSpPr>
+          <p:cNvPr id="10" name="TextBox 9"/>
+          <p:cNvSpPr txBox="1"/>
+          <p:nvPr/>
+        </p:nvSpPr>
+        <p:spPr>
+          <a:xfrm>
+            <a:off x="8412480" y="1920240"/>
+            <a:ext cx="3276295" cy="4114800"/>
+          </a:xfrm>
+          <a:prstGeom prst="rect">
+            <a:avLst/>
+          </a:prstGeom>
+          <a:noFill/>
+        </p:spPr>
+        <p:txBody>
+          <a:bodyPr wrap="square" lIns="18288" rIns="18288">
+            <a:spAutoFit/>
+          </a:bodyPr>
+          <a:lstStyle/>
+          <a:p>
+            <a:pPr>
+              <a:spcAft>
+                <a:spcPts val="1000"/>
+              </a:spcAft>
+            </a:pPr>
+            <a:r>
+              <a:rPr sz="1400" b="1">
+                <a:solidFill>
+                  <a:srgbClr val="2251FF"/>
+                </a:solidFill>
+                <a:latin typeface="Arial"/>
+              </a:rPr>
+              <a:t>1.  </a:t>
+            </a:r>
+            <a:r>
+              <a:rPr sz="1400" b="1">
+                <a:solidFill>
+                  <a:srgbClr val="1A1A1A"/>
+                </a:solidFill>
+                <a:latin typeface="Arial"/>
+              </a:rPr>
+              <a:t>Android: </a:t>
+            </a:r>
+            <a:r>
+              <a:rPr sz="1400">
+                <a:solidFill>
+                  <a:srgbClr val="1A1A1A"/>
+                </a:solidFill>
+                <a:latin typeface="Arial"/>
+              </a:rPr>
+              <a:t>p &lt; 0.001</a:t>
+            </a:r>
+          </a:p>
+          <a:p>
+            <a:pPr>
+              <a:spcAft>
+                <a:spcPts val="1000"/>
+              </a:spcAft>
+            </a:pPr>
+            <a:r>
+              <a:rPr sz="1400" b="1">
+                <a:solidFill>
+                  <a:srgbClr val="2251FF"/>
+                </a:solidFill>
+                <a:latin typeface="Arial"/>
+              </a:rPr>
+              <a:t>2.  </a:t>
+            </a:r>
+            <a:r>
+              <a:rPr sz="1400" b="1">
+                <a:solidFill>
+                  <a:srgbClr val="1A1A1A"/>
+                </a:solidFill>
+                <a:latin typeface="Arial"/>
+              </a:rPr>
+              <a:t>iOS + Web: </a:t>
+            </a:r>
+            <a:r>
+              <a:rPr sz="1400">
+                <a:solidFill>
+                  <a:srgbClr val="1A1A1A"/>
+                </a:solidFill>
+                <a:latin typeface="Arial"/>
+              </a:rPr>
+              <a:t>p = 0.323</a:t>
+            </a:r>
+          </a:p>
+          <a:p>
+            <a:pPr>
+              <a:spcAft>
+                <a:spcPts val="1000"/>
+              </a:spcAft>
+            </a:pPr>
+            <a:r>
+              <a:rPr sz="1400" b="1">
+                <a:solidFill>
+                  <a:srgbClr val="2251FF"/>
+                </a:solidFill>
+                <a:latin typeface="Arial"/>
+              </a:rPr>
+              <a:t>3.  </a:t>
+            </a:r>
+            <a:r>
+              <a:rPr sz="1400">
+                <a:solidFill>
+                  <a:srgbClr val="1A1A1A"/>
+                </a:solidFill>
+                <a:latin typeface="Arial"/>
+              </a:rPr>
+              <a:t>About 3,085 Android treatment users missing since 5 Sep</a:t>
+            </a:r>
+          </a:p>
+        </p:txBody>
+      </p:sp>
+    </p:spTree>
+  </p:cSld>
+  <p:clrMapOvr>
+    <a:masterClrMapping/>
+  </p:clrMapOvr>
+</p:sld>
+</file>
+
+<file path=ppt/slides/slide8.xml><?xml version="1.0" encoding="utf-8"?>
+<p:sld xmlns:a="http://schemas.openxmlformats.org/drawingml/2006/main" xmlns:p="http://schemas.openxmlformats.org/presentationml/2006/main" xmlns:r="http://schemas.openxmlformats.org/officeDocument/2006/relationships">
+  <p:cSld>
+    <p:spTree>
+      <p:nvGrpSpPr>
+        <p:cNvPr id="1" name=""/>
+        <p:cNvGrpSpPr/>
+        <p:nvPr/>
+      </p:nvGrpSpPr>
+      <p:grpSpPr/>
+      <p:sp>
+        <p:nvSpPr>
+          <p:cNvPr id="2" name="TextBox 1"/>
+          <p:cNvSpPr txBox="1"/>
+          <p:nvPr/>
+        </p:nvSpPr>
+        <p:spPr>
+          <a:xfrm>
+            <a:off x="502920" y="109728"/>
+            <a:ext cx="11185855" cy="256032"/>
+          </a:xfrm>
+          <a:prstGeom prst="rect">
+            <a:avLst/>
+          </a:prstGeom>
+          <a:noFill/>
+        </p:spPr>
+        <p:txBody>
+          <a:bodyPr wrap="none" lIns="0" rIns="0" tIns="0" bIns="0">
+            <a:spAutoFit/>
+          </a:bodyPr>
+          <a:lstStyle/>
+          <a:p>
+            <a:r>
+              <a:rPr sz="900" b="0">
+                <a:solidFill>
+                  <a:srgbClr val="8C8C8C"/>
+                </a:solidFill>
+                <a:latin typeface="Arial"/>
+              </a:rPr>
+              <a:t>1  THE ASK      </a:t>
+            </a:r>
+            <a:r>
+              <a:rPr sz="900" b="0">
+                <a:solidFill>
+                  <a:srgbClr val="8C8C8C"/>
+                </a:solidFill>
+                <a:latin typeface="Arial"/>
+              </a:rPr>
+              <a:t>2  APPROACH      </a:t>
+            </a:r>
+            <a:r>
+              <a:rPr sz="900" b="1">
+                <a:solidFill>
+                  <a:srgbClr val="2251FF"/>
+                </a:solidFill>
+                <a:latin typeface="Arial"/>
+              </a:rPr>
+              <a:t>3  FINDINGS      </a:t>
+            </a:r>
+            <a:r>
+              <a:rPr sz="900" b="0">
+                <a:solidFill>
+                  <a:srgbClr val="8C8C8C"/>
+                </a:solidFill>
+                <a:latin typeface="Arial"/>
+              </a:rPr>
+              <a:t>4  IMPACT      </a:t>
+            </a:r>
+            <a:r>
+              <a:rPr sz="900" b="0">
+                <a:solidFill>
+                  <a:srgbClr val="8C8C8C"/>
+                </a:solidFill>
+                <a:latin typeface="Arial"/>
+              </a:rPr>
+              <a:t>5  RECOMMENDATION</a:t>
+            </a:r>
+          </a:p>
+        </p:txBody>
+      </p:sp>
+      <p:sp>
+        <p:nvSpPr>
+          <p:cNvPr id="3" name="TextBox 2"/>
+          <p:cNvSpPr txBox="1"/>
+          <p:nvPr/>
+        </p:nvSpPr>
+        <p:spPr>
+          <a:xfrm>
+            <a:off x="502920" y="384048"/>
+            <a:ext cx="11185855" cy="868680"/>
+          </a:xfrm>
+          <a:prstGeom prst="rect">
+            <a:avLst/>
+          </a:prstGeom>
+          <a:noFill/>
+        </p:spPr>
+        <p:txBody>
+          <a:bodyPr wrap="square" anchor="t" lIns="18288" rIns="18288" tIns="18288" bIns="18288">
+            <a:spAutoFit/>
+          </a:bodyPr>
+          <a:lstStyle/>
+          <a:p>
+            <a:pPr algn="l"/>
+            <a:r>
+              <a:rPr sz="2400" b="1">
+                <a:solidFill>
+                  <a:srgbClr val="1A1A1A"/>
+                </a:solidFill>
+                <a:latin typeface="Arial"/>
+              </a:rPr>
+              <a:t>Data validation: overall verdict BLOCK</a:t>
+            </a:r>
+          </a:p>
+        </p:txBody>
+      </p:sp>
+      <p:sp>
+        <p:nvSpPr>
+          <p:cNvPr id="4" name="Rectangle 3"/>
+          <p:cNvSpPr/>
+          <p:nvPr/>
+        </p:nvSpPr>
+        <p:spPr>
+          <a:xfrm>
+            <a:off x="502920" y="1216152"/>
+            <a:ext cx="822960" cy="38100"/>
+          </a:xfrm>
+          <a:prstGeom prst="rect">
+            <a:avLst/>
+          </a:prstGeom>
+          <a:solidFill>
+            <a:srgbClr val="2251FF"/>
+          </a:solidFill>
+          <a:ln>
+            <a:noFill/>
+          </a:ln>
+          <a:effectLst/>
+        </p:spPr>
+        <p:style>
+          <a:lnRef idx="1">
+            <a:schemeClr val="accent1"/>
+          </a:lnRef>
+          <a:fillRef idx="3">
+            <a:schemeClr val="accent1"/>
+          </a:fillRef>
+          <a:effectRef idx="2">
+            <a:schemeClr val="accent1"/>
+          </a:effectRef>
+          <a:fontRef idx="minor">
+            <a:schemeClr val="lt1"/>
+          </a:fontRef>
+        </p:style>
+        <p:txBody>
+          <a:bodyPr rtlCol="0" anchor="ctr"/>
+          <a:lstStyle/>
+          <a:p>
+            <a:pPr algn="ctr"/>
+          </a:p>
+        </p:txBody>
+      </p:sp>
+      <p:sp>
+        <p:nvSpPr>
+          <p:cNvPr id="5" name="Rectangle 4"/>
+          <p:cNvSpPr/>
+          <p:nvPr/>
+        </p:nvSpPr>
+        <p:spPr>
+          <a:xfrm>
+            <a:off x="502920" y="6327648"/>
+            <a:ext cx="11185855" cy="6350"/>
+          </a:xfrm>
+          <a:prstGeom prst="rect">
+            <a:avLst/>
+          </a:prstGeom>
+          <a:solidFill>
+            <a:srgbClr val="E3E3E3"/>
+          </a:solidFill>
+          <a:ln>
+            <a:noFill/>
+          </a:ln>
+          <a:effectLst/>
+        </p:spPr>
+        <p:style>
+          <a:lnRef idx="1">
+            <a:schemeClr val="accent1"/>
+          </a:lnRef>
+          <a:fillRef idx="3">
+            <a:schemeClr val="accent1"/>
+          </a:fillRef>
+          <a:effectRef idx="2">
+            <a:schemeClr val="accent1"/>
+          </a:effectRef>
+          <a:fontRef idx="minor">
+            <a:schemeClr val="lt1"/>
+          </a:fontRef>
+        </p:style>
+        <p:txBody>
+          <a:bodyPr rtlCol="0" anchor="ctr"/>
+          <a:lstStyle/>
+          <a:p>
+            <a:pPr algn="ctr"/>
+          </a:p>
+        </p:txBody>
+      </p:sp>
+      <p:sp>
+        <p:nvSpPr>
+          <p:cNvPr id="6" name="TextBox 5"/>
+          <p:cNvSpPr txBox="1"/>
+          <p:nvPr/>
+        </p:nvSpPr>
+        <p:spPr>
+          <a:xfrm>
+            <a:off x="502920" y="6400800"/>
+            <a:ext cx="9875520" cy="320040"/>
+          </a:xfrm>
+          <a:prstGeom prst="rect">
+            <a:avLst/>
+          </a:prstGeom>
+          <a:noFill/>
+        </p:spPr>
+        <p:txBody>
+          <a:bodyPr wrap="square" anchor="t" lIns="18288" rIns="18288" tIns="18288" bIns="18288">
+            <a:spAutoFit/>
+          </a:bodyPr>
+          <a:lstStyle/>
+          <a:p>
+            <a:pPr algn="l"/>
+            <a:r>
+              <a:rPr sz="900" b="0">
+                <a:solidFill>
+                  <a:srgbClr val="8C8C8C"/>
+                </a:solidFill>
+                <a:latin typeface="Arial"/>
+              </a:rPr>
+              <a:t>Source: srm_broken.csv, 2026-09-01 to 2026-09-14; run 2026-10-01_onboarding-checklist</a:t>
+            </a:r>
+          </a:p>
+        </p:txBody>
+      </p:sp>
+      <p:sp>
+        <p:nvSpPr>
+          <p:cNvPr id="7" name="TextBox 6"/>
+          <p:cNvSpPr txBox="1"/>
+          <p:nvPr/>
+        </p:nvSpPr>
+        <p:spPr>
+          <a:xfrm>
+            <a:off x="10957255" y="6400800"/>
+            <a:ext cx="731520" cy="320040"/>
+          </a:xfrm>
+          <a:prstGeom prst="rect">
+            <a:avLst/>
+          </a:prstGeom>
+          <a:noFill/>
+        </p:spPr>
+        <p:txBody>
+          <a:bodyPr wrap="square" anchor="t" lIns="18288" rIns="18288" tIns="18288" bIns="18288">
+            <a:spAutoFit/>
+          </a:bodyPr>
+          <a:lstStyle/>
+          <a:p>
+            <a:pPr algn="r"/>
+            <a:r>
+              <a:rPr sz="900" b="0">
+                <a:solidFill>
+                  <a:srgbClr val="8C8C8C"/>
+                </a:solidFill>
+                <a:latin typeface="Arial"/>
+              </a:rPr>
+              <a:t>8</a:t>
+            </a:r>
+          </a:p>
+        </p:txBody>
+      </p:sp>
       <p:graphicFrame>
         <p:nvGraphicFramePr>
-          <p:cNvPr id="4" name="Table 3"/>
+          <p:cNvPr id="8" name="Table 7"/>
           <p:cNvGraphicFramePr>
             <a:graphicFrameLocks noGrp="1"/>
           </p:cNvGraphicFramePr>
           <p:nvPr/>
         </p:nvGraphicFramePr>
         <p:xfrm>
-          <a:off x="502920" y="1463040"/>
+          <a:off x="502920" y="1508760"/>
           <a:ext cx="11185854" cy="3803904"/>
         </p:xfrm>
         <a:graphic>
@@ -6182,22 +10595,145 @@
           </a:graphicData>
         </a:graphic>
       </p:graphicFrame>
-      <p:sp>
-        <p:nvSpPr>
-          <p:cNvPr id="5" name="Rectangle 4"/>
+    </p:spTree>
+  </p:cSld>
+  <p:clrMapOvr>
+    <a:masterClrMapping/>
+  </p:clrMapOvr>
+</p:sld>
+</file>
+
+<file path=ppt/slides/slide9.xml><?xml version="1.0" encoding="utf-8"?>
+<p:sld xmlns:a="http://schemas.openxmlformats.org/drawingml/2006/main" xmlns:p="http://schemas.openxmlformats.org/presentationml/2006/main" xmlns:r="http://schemas.openxmlformats.org/officeDocument/2006/relationships">
+  <p:cSld>
+    <p:spTree>
+      <p:nvGrpSpPr>
+        <p:cNvPr id="1" name=""/>
+        <p:cNvGrpSpPr/>
+        <p:nvPr/>
+      </p:nvGrpSpPr>
+      <p:grpSpPr/>
+      <p:sp>
+        <p:nvSpPr>
+          <p:cNvPr id="2" name="TextBox 1"/>
+          <p:cNvSpPr txBox="1"/>
+          <p:nvPr/>
+        </p:nvSpPr>
+        <p:spPr>
+          <a:xfrm>
+            <a:off x="502920" y="109728"/>
+            <a:ext cx="11185855" cy="256032"/>
+          </a:xfrm>
+          <a:prstGeom prst="rect">
+            <a:avLst/>
+          </a:prstGeom>
+          <a:noFill/>
+        </p:spPr>
+        <p:txBody>
+          <a:bodyPr wrap="none" lIns="0" rIns="0" tIns="0" bIns="0">
+            <a:spAutoFit/>
+          </a:bodyPr>
+          <a:lstStyle/>
+          <a:p>
+            <a:r>
+              <a:rPr sz="900" b="0">
+                <a:solidFill>
+                  <a:srgbClr val="8C8C8C"/>
+                </a:solidFill>
+                <a:latin typeface="Arial"/>
+              </a:rPr>
+              <a:t>1  THE ASK      </a:t>
+            </a:r>
+            <a:r>
+              <a:rPr sz="900" b="0">
+                <a:solidFill>
+                  <a:srgbClr val="8C8C8C"/>
+                </a:solidFill>
+                <a:latin typeface="Arial"/>
+              </a:rPr>
+              <a:t>2  APPROACH      </a:t>
+            </a:r>
+            <a:r>
+              <a:rPr sz="900" b="0">
+                <a:solidFill>
+                  <a:srgbClr val="8C8C8C"/>
+                </a:solidFill>
+                <a:latin typeface="Arial"/>
+              </a:rPr>
+              <a:t>3  FINDINGS      </a:t>
+            </a:r>
+            <a:r>
+              <a:rPr sz="900" b="1">
+                <a:solidFill>
+                  <a:srgbClr val="2251FF"/>
+                </a:solidFill>
+                <a:latin typeface="Arial"/>
+              </a:rPr>
+              <a:t>4  IMPACT      </a:t>
+            </a:r>
+            <a:r>
+              <a:rPr sz="900" b="0">
+                <a:solidFill>
+                  <a:srgbClr val="8C8C8C"/>
+                </a:solidFill>
+                <a:latin typeface="Arial"/>
+              </a:rPr>
+              <a:t>5  RECOMMENDATION</a:t>
+            </a:r>
+          </a:p>
+        </p:txBody>
+      </p:sp>
+      <p:sp>
+        <p:nvSpPr>
+          <p:cNvPr id="3" name="TextBox 2"/>
+          <p:cNvSpPr txBox="1"/>
+          <p:nvPr/>
+        </p:nvSpPr>
+        <p:spPr>
+          <a:xfrm>
+            <a:off x="502920" y="384048"/>
+            <a:ext cx="11185855" cy="868680"/>
+          </a:xfrm>
+          <a:prstGeom prst="rect">
+            <a:avLst/>
+          </a:prstGeom>
+          <a:noFill/>
+        </p:spPr>
+        <p:txBody>
+          <a:bodyPr wrap="square" anchor="t" lIns="18288" rIns="18288" tIns="18288" bIns="18288">
+            <a:spAutoFit/>
+          </a:bodyPr>
+          <a:lstStyle/>
+          <a:p>
+            <a:pPr algn="l"/>
+            <a:r>
+              <a:rPr sz="2400" b="1">
+                <a:solidFill>
+                  <a:srgbClr val="1A1A1A"/>
+                </a:solidFill>
+                <a:latin typeface="Arial"/>
+              </a:rPr>
+              <a:t>What we can and cannot conclude from this data</a:t>
+            </a:r>
+          </a:p>
+        </p:txBody>
+      </p:sp>
+      <p:sp>
+        <p:nvSpPr>
+          <p:cNvPr id="4" name="Rectangle 3"/>
           <p:cNvSpPr/>
           <p:nvPr/>
         </p:nvSpPr>
         <p:spPr>
           <a:xfrm>
-            <a:off x="502920" y="6327648"/>
-            <a:ext cx="11185855" cy="6350"/>
+            <a:off x="502920" y="1216152"/>
+            <a:ext cx="822960" cy="38100"/>
           </a:xfrm>
           <a:prstGeom prst="rect">
             <a:avLst/>
           </a:prstGeom>
           <a:solidFill>
-            <a:srgbClr val="E3E3E3"/>
+            <a:srgbClr val="2251FF"/>
           </a:solidFill>
           <a:ln>
             <a:noFill/>
@@ -6228,143 +10764,20 @@
       </p:sp>
       <p:sp>
         <p:nvSpPr>
-          <p:cNvPr id="6" name="TextBox 5"/>
-          <p:cNvSpPr txBox="1"/>
-          <p:nvPr/>
-        </p:nvSpPr>
-        <p:spPr>
-          <a:xfrm>
-            <a:off x="502920" y="6400800"/>
-            <a:ext cx="9875520" cy="320040"/>
-          </a:xfrm>
-          <a:prstGeom prst="rect">
-            <a:avLst/>
-          </a:prstGeom>
-          <a:noFill/>
-        </p:spPr>
-        <p:txBody>
-          <a:bodyPr wrap="square" anchor="t" lIns="18288" rIns="18288" tIns="18288" bIns="18288">
-            <a:spAutoFit/>
-          </a:bodyPr>
-          <a:lstStyle/>
-          <a:p>
-            <a:pPr algn="l"/>
-            <a:r>
-              <a:rPr sz="900" b="0">
-                <a:solidFill>
-                  <a:srgbClr val="8C8C8C"/>
-                </a:solidFill>
-                <a:latin typeface="Arial"/>
-              </a:rPr>
-              <a:t>Source: srm_broken.csv, 2026-09-01 to 2026-09-14; run 2026-10-01_onboarding-checklist</a:t>
-            </a:r>
-          </a:p>
-        </p:txBody>
-      </p:sp>
-      <p:sp>
-        <p:nvSpPr>
-          <p:cNvPr id="7" name="TextBox 6"/>
-          <p:cNvSpPr txBox="1"/>
-          <p:nvPr/>
-        </p:nvSpPr>
-        <p:spPr>
-          <a:xfrm>
-            <a:off x="10957255" y="6400800"/>
-            <a:ext cx="731520" cy="320040"/>
-          </a:xfrm>
-          <a:prstGeom prst="rect">
-            <a:avLst/>
-          </a:prstGeom>
-          <a:noFill/>
-        </p:spPr>
-        <p:txBody>
-          <a:bodyPr wrap="square" anchor="t" lIns="18288" rIns="18288" tIns="18288" bIns="18288">
-            <a:spAutoFit/>
-          </a:bodyPr>
-          <a:lstStyle/>
-          <a:p>
-            <a:pPr algn="r"/>
-            <a:r>
-              <a:rPr sz="900" b="0">
-                <a:solidFill>
-                  <a:srgbClr val="8C8C8C"/>
-                </a:solidFill>
-                <a:latin typeface="Arial"/>
-              </a:rPr>
-              <a:t>5</a:t>
-            </a:r>
-          </a:p>
-        </p:txBody>
-      </p:sp>
-    </p:spTree>
-  </p:cSld>
-  <p:clrMapOvr>
-    <a:masterClrMapping/>
-  </p:clrMapOvr>
-</p:sld>
-</file>
-
-<file path=ppt/slides/slide6.xml><?xml version="1.0" encoding="utf-8"?>
-<p:sld xmlns:a="http://schemas.openxmlformats.org/drawingml/2006/main" xmlns:p="http://schemas.openxmlformats.org/presentationml/2006/main" xmlns:r="http://schemas.openxmlformats.org/officeDocument/2006/relationships">
-  <p:cSld>
-    <p:spTree>
-      <p:nvGrpSpPr>
-        <p:cNvPr id="1" name=""/>
-        <p:cNvGrpSpPr/>
-        <p:nvPr/>
-      </p:nvGrpSpPr>
-      <p:grpSpPr/>
-      <p:sp>
-        <p:nvSpPr>
-          <p:cNvPr id="2" name="TextBox 1"/>
-          <p:cNvSpPr txBox="1"/>
-          <p:nvPr/>
-        </p:nvSpPr>
-        <p:spPr>
-          <a:xfrm>
-            <a:off x="502920" y="320040"/>
-            <a:ext cx="11185855" cy="868680"/>
-          </a:xfrm>
-          <a:prstGeom prst="rect">
-            <a:avLst/>
-          </a:prstGeom>
-          <a:noFill/>
-        </p:spPr>
-        <p:txBody>
-          <a:bodyPr wrap="square" anchor="t" lIns="18288" rIns="18288" tIns="18288" bIns="18288">
-            <a:spAutoFit/>
-          </a:bodyPr>
-          <a:lstStyle/>
-          <a:p>
-            <a:pPr algn="l"/>
-            <a:r>
-              <a:rPr sz="2400" b="1">
-                <a:solidFill>
-                  <a:srgbClr val="1A1A1A"/>
-                </a:solidFill>
-                <a:latin typeface="Arial"/>
-              </a:rPr>
-              <a:t>Recommendation: Blocked: data issue</a:t>
-            </a:r>
-          </a:p>
-        </p:txBody>
-      </p:sp>
-      <p:sp>
-        <p:nvSpPr>
-          <p:cNvPr id="3" name="Rectangle 2"/>
+          <p:cNvPr id="5" name="Rectangle 4"/>
           <p:cNvSpPr/>
           <p:nvPr/>
         </p:nvSpPr>
         <p:spPr>
           <a:xfrm>
-            <a:off x="502920" y="1170432"/>
-            <a:ext cx="822960" cy="38100"/>
+            <a:off x="502920" y="6327648"/>
+            <a:ext cx="11185855" cy="6350"/>
           </a:xfrm>
           <a:prstGeom prst="rect">
             <a:avLst/>
           </a:prstGeom>
           <a:solidFill>
-            <a:srgbClr val="2251FF"/>
+            <a:srgbClr val="E3E3E3"/>
           </a:solidFill>
           <a:ln>
             <a:noFill/>
@@ -6395,14 +10808,14 @@
       </p:sp>
       <p:sp>
         <p:nvSpPr>
-          <p:cNvPr id="4" name="TextBox 3"/>
+          <p:cNvPr id="6" name="TextBox 5"/>
           <p:cNvSpPr txBox="1"/>
           <p:nvPr/>
         </p:nvSpPr>
         <p:spPr>
           <a:xfrm>
-            <a:off x="502920" y="1508760"/>
-            <a:ext cx="5486400" cy="365760"/>
+            <a:off x="502920" y="6400800"/>
+            <a:ext cx="9875520" cy="320040"/>
           </a:xfrm>
           <a:prstGeom prst="rect">
             <a:avLst/>
@@ -6417,27 +10830,27 @@
           <a:p>
             <a:pPr algn="l"/>
             <a:r>
-              <a:rPr sz="1100" b="1">
+              <a:rPr sz="900" b="0">
                 <a:solidFill>
                   <a:srgbClr val="8C8C8C"/>
                 </a:solidFill>
                 <a:latin typeface="Arial"/>
               </a:rPr>
-              <a:t>NEXT STEPS</a:t>
-            </a:r>
-          </a:p>
-        </p:txBody>
-      </p:sp>
-      <p:sp>
-        <p:nvSpPr>
-          <p:cNvPr id="5" name="TextBox 4"/>
+              <a:t>Source: srm_broken.csv, 2026-09-01 to 2026-09-14; run 2026-10-01_onboarding-checklist</a:t>
+            </a:r>
+          </a:p>
+        </p:txBody>
+      </p:sp>
+      <p:sp>
+        <p:nvSpPr>
+          <p:cNvPr id="7" name="TextBox 6"/>
           <p:cNvSpPr txBox="1"/>
           <p:nvPr/>
         </p:nvSpPr>
         <p:spPr>
           <a:xfrm>
-            <a:off x="502920" y="1920240"/>
-            <a:ext cx="11185855" cy="4572000"/>
+            <a:off x="10957255" y="6400800"/>
+            <a:ext cx="731520" cy="320040"/>
           </a:xfrm>
           <a:prstGeom prst="rect">
             <a:avLst/>
@@ -6445,137 +10858,40 @@
           <a:noFill/>
         </p:spPr>
         <p:txBody>
-          <a:bodyPr wrap="square">
+          <a:bodyPr wrap="square" anchor="t" lIns="18288" rIns="18288" tIns="18288" bIns="18288">
             <a:spAutoFit/>
           </a:bodyPr>
           <a:lstStyle/>
           <a:p>
-            <a:pPr>
-              <a:spcAft>
-                <a:spcPts val="1000"/>
-              </a:spcAft>
-            </a:pPr>
-            <a:r>
-              <a:rPr sz="1600" b="1">
-                <a:solidFill>
-                  <a:srgbClr val="2251FF"/>
-                </a:solidFill>
-                <a:latin typeface="Arial"/>
-              </a:rPr>
-              <a:t>1.  </a:t>
-            </a:r>
-            <a:r>
-              <a:rPr sz="1600" b="1">
-                <a:solidFill>
-                  <a:srgbClr val="1A1A1A"/>
-                </a:solidFill>
-                <a:latin typeface="Arial"/>
-              </a:rPr>
-              <a:t>Engineering: </a:t>
-            </a:r>
-            <a:r>
-              <a:rPr sz="1600">
-                <a:solidFill>
-                  <a:srgbClr val="1A1A1A"/>
-                </a:solidFill>
-                <a:latin typeface="Arial"/>
-              </a:rPr>
-              <a:t>fix the Android exposure event lost since the 2026-09-05 release (about 3,085 treatment users missing)</a:t>
-            </a:r>
-          </a:p>
-          <a:p>
-            <a:pPr>
-              <a:spcAft>
-                <a:spcPts val="1000"/>
-              </a:spcAft>
-            </a:pPr>
-            <a:r>
-              <a:rPr sz="1600" b="1">
-                <a:solidFill>
-                  <a:srgbClr val="2251FF"/>
-                </a:solidFill>
-                <a:latin typeface="Arial"/>
-              </a:rPr>
-              <a:t>2.  </a:t>
-            </a:r>
-            <a:r>
-              <a:rPr sz="1600">
-                <a:solidFill>
-                  <a:srgbClr val="1A1A1A"/>
-                </a:solidFill>
-                <a:latin typeface="Arial"/>
-              </a:rPr>
-              <a:t>Re-extract exposures from server-side assignment logs and rerun this workflow on the corrected data</a:t>
-            </a:r>
-          </a:p>
-          <a:p>
-            <a:pPr>
-              <a:spcAft>
-                <a:spcPts val="1000"/>
-              </a:spcAft>
-            </a:pPr>
-            <a:r>
-              <a:rPr sz="1600" b="1">
-                <a:solidFill>
-                  <a:srgbClr val="2251FF"/>
-                </a:solidFill>
-                <a:latin typeface="Arial"/>
-              </a:rPr>
-              <a:t>3.  </a:t>
-            </a:r>
-            <a:r>
-              <a:rPr sz="1600">
-                <a:solidFill>
-                  <a:srgbClr val="1A1A1A"/>
-                </a:solidFill>
-                <a:latin typeface="Arial"/>
-              </a:rPr>
-              <a:t>If the logs cannot be repaired, rerun the test for two full weeks after the fix</a:t>
-            </a:r>
-          </a:p>
-          <a:p>
-            <a:pPr>
-              <a:spcAft>
-                <a:spcPts val="1000"/>
-              </a:spcAft>
-            </a:pPr>
-            <a:r>
-              <a:rPr sz="1600" b="1">
-                <a:solidFill>
-                  <a:srgbClr val="2251FF"/>
-                </a:solidFill>
-                <a:latin typeface="Arial"/>
-              </a:rPr>
-              <a:t>4.  </a:t>
-            </a:r>
-            <a:r>
-              <a:rPr sz="1600">
-                <a:solidFill>
-                  <a:srgbClr val="1A1A1A"/>
-                </a:solidFill>
-                <a:latin typeface="Arial"/>
-              </a:rPr>
-              <a:t>Add an automated daily SRM alert (by platform) to the experiment dashboard</a:t>
-            </a:r>
-          </a:p>
-        </p:txBody>
-      </p:sp>
-      <p:sp>
-        <p:nvSpPr>
-          <p:cNvPr id="6" name="Rectangle 5"/>
+            <a:pPr algn="r"/>
+            <a:r>
+              <a:rPr sz="900" b="0">
+                <a:solidFill>
+                  <a:srgbClr val="8C8C8C"/>
+                </a:solidFill>
+                <a:latin typeface="Arial"/>
+              </a:rPr>
+              <a:t>9</a:t>
+            </a:r>
+          </a:p>
+        </p:txBody>
+      </p:sp>
+      <p:sp>
+        <p:nvSpPr>
+          <p:cNvPr id="8" name="Rectangle 7"/>
           <p:cNvSpPr/>
           <p:nvPr/>
         </p:nvSpPr>
         <p:spPr>
           <a:xfrm>
-            <a:off x="502920" y="6327648"/>
-            <a:ext cx="11185855" cy="6350"/>
+            <a:off x="502920" y="1691640"/>
+            <a:ext cx="3545738" cy="50800"/>
           </a:xfrm>
           <a:prstGeom prst="rect">
             <a:avLst/>
           </a:prstGeom>
           <a:solidFill>
-            <a:srgbClr val="E3E3E3"/>
+            <a:srgbClr val="2251FF"/>
           </a:solidFill>
           <a:ln>
             <a:noFill/>
@@ -6606,14 +10922,14 @@
       </p:sp>
       <p:sp>
         <p:nvSpPr>
-          <p:cNvPr id="7" name="TextBox 6"/>
+          <p:cNvPr id="9" name="TextBox 8"/>
           <p:cNvSpPr txBox="1"/>
           <p:nvPr/>
         </p:nvSpPr>
         <p:spPr>
           <a:xfrm>
-            <a:off x="502920" y="6400800"/>
-            <a:ext cx="9875520" cy="320040"/>
+            <a:off x="502920" y="1874520"/>
+            <a:ext cx="3545738" cy="822960"/>
           </a:xfrm>
           <a:prstGeom prst="rect">
             <a:avLst/>
@@ -6628,27 +10944,27 @@
           <a:p>
             <a:pPr algn="l"/>
             <a:r>
-              <a:rPr sz="900" b="0">
-                <a:solidFill>
-                  <a:srgbClr val="8C8C8C"/>
-                </a:solidFill>
-                <a:latin typeface="Arial"/>
-              </a:rPr>
-              <a:t>Source: srm_broken.csv, 2026-09-01 to 2026-09-14; run 2026-10-01_onboarding-checklist</a:t>
-            </a:r>
-          </a:p>
-        </p:txBody>
-      </p:sp>
-      <p:sp>
-        <p:nvSpPr>
-          <p:cNvPr id="8" name="TextBox 7"/>
+              <a:rPr sz="2400" b="1">
+                <a:solidFill>
+                  <a:srgbClr val="2251FF"/>
+                </a:solidFill>
+                <a:latin typeface="Arial"/>
+              </a:rPr>
+              <a:t>53.6% (expected 50.0%)</a:t>
+            </a:r>
+          </a:p>
+        </p:txBody>
+      </p:sp>
+      <p:sp>
+        <p:nvSpPr>
+          <p:cNvPr id="10" name="TextBox 9"/>
           <p:cNvSpPr txBox="1"/>
           <p:nvPr/>
         </p:nvSpPr>
         <p:spPr>
           <a:xfrm>
-            <a:off x="10957255" y="6400800"/>
-            <a:ext cx="731520" cy="320040"/>
+            <a:off x="502920" y="2743200"/>
+            <a:ext cx="3545738" cy="640080"/>
           </a:xfrm>
           <a:prstGeom prst="rect">
             <a:avLst/>
@@ -6661,15 +10977,448 @@
           </a:bodyPr>
           <a:lstStyle/>
           <a:p>
-            <a:pPr algn="r"/>
-            <a:r>
-              <a:rPr sz="900" b="0">
+            <a:pPr algn="l"/>
+            <a:r>
+              <a:rPr sz="1400" b="1">
+                <a:solidFill>
+                  <a:srgbClr val="1A1A1A"/>
+                </a:solidFill>
+                <a:latin typeface="Arial"/>
+              </a:rPr>
+              <a:t>Observed share control</a:t>
+            </a:r>
+          </a:p>
+        </p:txBody>
+      </p:sp>
+      <p:sp>
+        <p:nvSpPr>
+          <p:cNvPr id="11" name="TextBox 10"/>
+          <p:cNvSpPr txBox="1"/>
+          <p:nvPr/>
+        </p:nvSpPr>
+        <p:spPr>
+          <a:xfrm>
+            <a:off x="502920" y="3383280"/>
+            <a:ext cx="3545738" cy="731520"/>
+          </a:xfrm>
+          <a:prstGeom prst="rect">
+            <a:avLst/>
+          </a:prstGeom>
+          <a:noFill/>
+        </p:spPr>
+        <p:txBody>
+          <a:bodyPr wrap="square" anchor="t" lIns="18288" rIns="18288" tIns="18288" bIns="18288">
+            <a:spAutoFit/>
+          </a:bodyPr>
+          <a:lstStyle/>
+          <a:p>
+            <a:pPr algn="l"/>
+            <a:r>
+              <a:rPr sz="1200" b="0">
                 <a:solidFill>
                   <a:srgbClr val="8C8C8C"/>
                 </a:solidFill>
                 <a:latin typeface="Arial"/>
               </a:rPr>
-              <a:t>6</a:t>
+              <a:t/>
+            </a:r>
+          </a:p>
+        </p:txBody>
+      </p:sp>
+      <p:sp>
+        <p:nvSpPr>
+          <p:cNvPr id="12" name="Rectangle 11"/>
+          <p:cNvSpPr/>
+          <p:nvPr/>
+        </p:nvSpPr>
+        <p:spPr>
+          <a:xfrm>
+            <a:off x="4322978" y="1691640"/>
+            <a:ext cx="3545738" cy="50800"/>
+          </a:xfrm>
+          <a:prstGeom prst="rect">
+            <a:avLst/>
+          </a:prstGeom>
+          <a:solidFill>
+            <a:srgbClr val="0B2545"/>
+          </a:solidFill>
+          <a:ln>
+            <a:noFill/>
+          </a:ln>
+          <a:effectLst/>
+        </p:spPr>
+        <p:style>
+          <a:lnRef idx="1">
+            <a:schemeClr val="accent1"/>
+          </a:lnRef>
+          <a:fillRef idx="3">
+            <a:schemeClr val="accent1"/>
+          </a:fillRef>
+          <a:effectRef idx="2">
+            <a:schemeClr val="accent1"/>
+          </a:effectRef>
+          <a:fontRef idx="minor">
+            <a:schemeClr val="lt1"/>
+          </a:fontRef>
+        </p:style>
+        <p:txBody>
+          <a:bodyPr rtlCol="0" anchor="ctr"/>
+          <a:lstStyle/>
+          <a:p>
+            <a:pPr algn="ctr"/>
+          </a:p>
+        </p:txBody>
+      </p:sp>
+      <p:sp>
+        <p:nvSpPr>
+          <p:cNvPr id="13" name="TextBox 12"/>
+          <p:cNvSpPr txBox="1"/>
+          <p:nvPr/>
+        </p:nvSpPr>
+        <p:spPr>
+          <a:xfrm>
+            <a:off x="4322978" y="1874520"/>
+            <a:ext cx="3545738" cy="822960"/>
+          </a:xfrm>
+          <a:prstGeom prst="rect">
+            <a:avLst/>
+          </a:prstGeom>
+          <a:noFill/>
+        </p:spPr>
+        <p:txBody>
+          <a:bodyPr wrap="square" anchor="t" lIns="18288" rIns="18288" tIns="18288" bIns="18288">
+            <a:spAutoFit/>
+          </a:bodyPr>
+          <a:lstStyle/>
+          <a:p>
+            <a:pPr algn="l"/>
+            <a:r>
+              <a:rPr sz="2400" b="1">
+                <a:solidFill>
+                  <a:srgbClr val="0B2545"/>
+                </a:solidFill>
+                <a:latin typeface="Arial"/>
+              </a:rPr>
+              <a:t>46.4% (expected 50.0%)</a:t>
+            </a:r>
+          </a:p>
+        </p:txBody>
+      </p:sp>
+      <p:sp>
+        <p:nvSpPr>
+          <p:cNvPr id="14" name="TextBox 13"/>
+          <p:cNvSpPr txBox="1"/>
+          <p:nvPr/>
+        </p:nvSpPr>
+        <p:spPr>
+          <a:xfrm>
+            <a:off x="4322978" y="2743200"/>
+            <a:ext cx="3545738" cy="640080"/>
+          </a:xfrm>
+          <a:prstGeom prst="rect">
+            <a:avLst/>
+          </a:prstGeom>
+          <a:noFill/>
+        </p:spPr>
+        <p:txBody>
+          <a:bodyPr wrap="square" anchor="t" lIns="18288" rIns="18288" tIns="18288" bIns="18288">
+            <a:spAutoFit/>
+          </a:bodyPr>
+          <a:lstStyle/>
+          <a:p>
+            <a:pPr algn="l"/>
+            <a:r>
+              <a:rPr sz="1400" b="1">
+                <a:solidFill>
+                  <a:srgbClr val="1A1A1A"/>
+                </a:solidFill>
+                <a:latin typeface="Arial"/>
+              </a:rPr>
+              <a:t>Observed share treatment</a:t>
+            </a:r>
+          </a:p>
+        </p:txBody>
+      </p:sp>
+      <p:sp>
+        <p:nvSpPr>
+          <p:cNvPr id="15" name="TextBox 14"/>
+          <p:cNvSpPr txBox="1"/>
+          <p:nvPr/>
+        </p:nvSpPr>
+        <p:spPr>
+          <a:xfrm>
+            <a:off x="4322978" y="3383280"/>
+            <a:ext cx="3545738" cy="731520"/>
+          </a:xfrm>
+          <a:prstGeom prst="rect">
+            <a:avLst/>
+          </a:prstGeom>
+          <a:noFill/>
+        </p:spPr>
+        <p:txBody>
+          <a:bodyPr wrap="square" anchor="t" lIns="18288" rIns="18288" tIns="18288" bIns="18288">
+            <a:spAutoFit/>
+          </a:bodyPr>
+          <a:lstStyle/>
+          <a:p>
+            <a:pPr algn="l"/>
+            <a:r>
+              <a:rPr sz="1200" b="0">
+                <a:solidFill>
+                  <a:srgbClr val="8C8C8C"/>
+                </a:solidFill>
+                <a:latin typeface="Arial"/>
+              </a:rPr>
+              <a:t/>
+            </a:r>
+          </a:p>
+        </p:txBody>
+      </p:sp>
+      <p:sp>
+        <p:nvSpPr>
+          <p:cNvPr id="16" name="Rectangle 15"/>
+          <p:cNvSpPr/>
+          <p:nvPr/>
+        </p:nvSpPr>
+        <p:spPr>
+          <a:xfrm>
+            <a:off x="8143036" y="1691640"/>
+            <a:ext cx="3545738" cy="50800"/>
+          </a:xfrm>
+          <a:prstGeom prst="rect">
+            <a:avLst/>
+          </a:prstGeom>
+          <a:solidFill>
+            <a:srgbClr val="0B2545"/>
+          </a:solidFill>
+          <a:ln>
+            <a:noFill/>
+          </a:ln>
+          <a:effectLst/>
+        </p:spPr>
+        <p:style>
+          <a:lnRef idx="1">
+            <a:schemeClr val="accent1"/>
+          </a:lnRef>
+          <a:fillRef idx="3">
+            <a:schemeClr val="accent1"/>
+          </a:fillRef>
+          <a:effectRef idx="2">
+            <a:schemeClr val="accent1"/>
+          </a:effectRef>
+          <a:fontRef idx="minor">
+            <a:schemeClr val="lt1"/>
+          </a:fontRef>
+        </p:style>
+        <p:txBody>
+          <a:bodyPr rtlCol="0" anchor="ctr"/>
+          <a:lstStyle/>
+          <a:p>
+            <a:pPr algn="ctr"/>
+          </a:p>
+        </p:txBody>
+      </p:sp>
+      <p:sp>
+        <p:nvSpPr>
+          <p:cNvPr id="17" name="TextBox 16"/>
+          <p:cNvSpPr txBox="1"/>
+          <p:nvPr/>
+        </p:nvSpPr>
+        <p:spPr>
+          <a:xfrm>
+            <a:off x="8143036" y="1874520"/>
+            <a:ext cx="3545738" cy="822960"/>
+          </a:xfrm>
+          <a:prstGeom prst="rect">
+            <a:avLst/>
+          </a:prstGeom>
+          <a:noFill/>
+        </p:spPr>
+        <p:txBody>
+          <a:bodyPr wrap="square" anchor="t" lIns="18288" rIns="18288" tIns="18288" bIns="18288">
+            <a:spAutoFit/>
+          </a:bodyPr>
+          <a:lstStyle/>
+          <a:p>
+            <a:pPr algn="l"/>
+            <a:r>
+              <a:rPr sz="2400" b="1">
+                <a:solidFill>
+                  <a:srgbClr val="0B2545"/>
+                </a:solidFill>
+                <a:latin typeface="Arial"/>
+              </a:rPr>
+              <a:t>chi-square p &lt; 0.001 (threshold 0.001)</a:t>
+            </a:r>
+          </a:p>
+        </p:txBody>
+      </p:sp>
+      <p:sp>
+        <p:nvSpPr>
+          <p:cNvPr id="18" name="TextBox 17"/>
+          <p:cNvSpPr txBox="1"/>
+          <p:nvPr/>
+        </p:nvSpPr>
+        <p:spPr>
+          <a:xfrm>
+            <a:off x="8143036" y="2743200"/>
+            <a:ext cx="3545738" cy="640080"/>
+          </a:xfrm>
+          <a:prstGeom prst="rect">
+            <a:avLst/>
+          </a:prstGeom>
+          <a:noFill/>
+        </p:spPr>
+        <p:txBody>
+          <a:bodyPr wrap="square" anchor="t" lIns="18288" rIns="18288" tIns="18288" bIns="18288">
+            <a:spAutoFit/>
+          </a:bodyPr>
+          <a:lstStyle/>
+          <a:p>
+            <a:pPr algn="l"/>
+            <a:r>
+              <a:rPr sz="1400" b="1">
+                <a:solidFill>
+                  <a:srgbClr val="1A1A1A"/>
+                </a:solidFill>
+                <a:latin typeface="Arial"/>
+              </a:rPr>
+              <a:t>SRM test</a:t>
+            </a:r>
+          </a:p>
+        </p:txBody>
+      </p:sp>
+      <p:sp>
+        <p:nvSpPr>
+          <p:cNvPr id="19" name="TextBox 18"/>
+          <p:cNvSpPr txBox="1"/>
+          <p:nvPr/>
+        </p:nvSpPr>
+        <p:spPr>
+          <a:xfrm>
+            <a:off x="8143036" y="3383280"/>
+            <a:ext cx="3545738" cy="731520"/>
+          </a:xfrm>
+          <a:prstGeom prst="rect">
+            <a:avLst/>
+          </a:prstGeom>
+          <a:noFill/>
+        </p:spPr>
+        <p:txBody>
+          <a:bodyPr wrap="square" anchor="t" lIns="18288" rIns="18288" tIns="18288" bIns="18288">
+            <a:spAutoFit/>
+          </a:bodyPr>
+          <a:lstStyle/>
+          <a:p>
+            <a:pPr algn="l"/>
+            <a:r>
+              <a:rPr sz="1200" b="0">
+                <a:solidFill>
+                  <a:srgbClr val="8C8C8C"/>
+                </a:solidFill>
+                <a:latin typeface="Arial"/>
+              </a:rPr>
+              <a:t/>
+            </a:r>
+          </a:p>
+        </p:txBody>
+      </p:sp>
+      <p:sp>
+        <p:nvSpPr>
+          <p:cNvPr id="20" name="Rectangle 19"/>
+          <p:cNvSpPr/>
+          <p:nvPr/>
+        </p:nvSpPr>
+        <p:spPr>
+          <a:xfrm>
+            <a:off x="502920" y="4389120"/>
+            <a:ext cx="11185855" cy="914400"/>
+          </a:xfrm>
+          <a:prstGeom prst="rect">
+            <a:avLst/>
+          </a:prstGeom>
+          <a:solidFill>
+            <a:srgbClr val="E3E3E3"/>
+          </a:solidFill>
+          <a:ln>
+            <a:noFill/>
+          </a:ln>
+          <a:effectLst/>
+        </p:spPr>
+        <p:style>
+          <a:lnRef idx="1">
+            <a:schemeClr val="accent1"/>
+          </a:lnRef>
+          <a:fillRef idx="3">
+            <a:schemeClr val="accent1"/>
+          </a:fillRef>
+          <a:effectRef idx="2">
+            <a:schemeClr val="accent1"/>
+          </a:effectRef>
+          <a:fontRef idx="minor">
+            <a:schemeClr val="lt1"/>
+          </a:fontRef>
+        </p:style>
+        <p:txBody>
+          <a:bodyPr rtlCol="0" anchor="ctr" wrap="square" lIns="274320" rIns="274320"/>
+          <a:lstStyle/>
+          <a:p>
+            <a:pPr algn="l"/>
+            <a:r>
+              <a:rPr sz="1100" b="1">
+                <a:solidFill>
+                  <a:srgbClr val="1A1A1A"/>
+                </a:solidFill>
+                <a:latin typeface="Arial"/>
+              </a:rPr>
+              <a:t>SO WHAT</a:t>
+            </a:r>
+          </a:p>
+          <a:p>
+            <a:pPr algn="l"/>
+            <a:r>
+              <a:rPr sz="1500" b="0">
+                <a:solidFill>
+                  <a:srgbClr val="1A1A1A"/>
+                </a:solidFill>
+                <a:latin typeface="Arial"/>
+              </a:rPr>
+              <a:t>The data failed a blocking validation check, so treatment effects cannot be trusted.</a:t>
+            </a:r>
+          </a:p>
+        </p:txBody>
+      </p:sp>
+      <p:sp>
+        <p:nvSpPr>
+          <p:cNvPr id="21" name="TextBox 20"/>
+          <p:cNvSpPr txBox="1"/>
+          <p:nvPr/>
+        </p:nvSpPr>
+        <p:spPr>
+          <a:xfrm>
+            <a:off x="502920" y="5440679"/>
+            <a:ext cx="11185855" cy="365760"/>
+          </a:xfrm>
+          <a:prstGeom prst="rect">
+            <a:avLst/>
+          </a:prstGeom>
+          <a:noFill/>
+        </p:spPr>
+        <p:txBody>
+          <a:bodyPr wrap="square" anchor="t" lIns="18288" rIns="18288" tIns="18288" bIns="18288">
+            <a:spAutoFit/>
+          </a:bodyPr>
+          <a:lstStyle/>
+          <a:p>
+            <a:pPr algn="l"/>
+            <a:r>
+              <a:rPr sz="1000" b="0">
+                <a:solidFill>
+                  <a:srgbClr val="8C8C8C"/>
+                </a:solidFill>
+                <a:latin typeface="Arial"/>
+              </a:rPr>
+              <a:t>Read with the 2 caveats on the next slide.</a:t>
             </a:r>
           </a:p>
         </p:txBody>
